--- a/slides/BodyScout-judges.pptx
+++ b/slides/BodyScout-judges.pptx
@@ -4,6 +4,9 @@
   <p:sldMasterIdLst>
     <p:sldMasterId id="2147483648" r:id="rId1"/>
   </p:sldMasterIdLst>
+  <p:notesMasterIdLst>
+    <p:notesMasterId r:id="rId30"/>
+  </p:notesMasterIdLst>
   <p:sldIdLst>
     <p:sldId id="256" r:id="rId2"/>
     <p:sldId id="257" r:id="rId3"/>
@@ -34,11 +37,8 @@
     <p:sldId id="282" r:id="rId28"/>
     <p:sldId id="283" r:id="rId29"/>
   </p:sldIdLst>
-  <p:notesMasterIdLst>
-    <p:notesMasterId r:id="rId30"/>
-  </p:notesMasterIdLst>
-  <p:sldSz cx="12191695" cy="6858000"/>
-  <p:notesSz cx="6858000" cy="12191695"/>
+  <p:sldSz cx="12192000" cy="6858000"/>
+  <p:notesSz cx="6858000" cy="12192000"/>
   <p:defaultTextStyle>
     <a:lvl1pPr marL="0" algn="l" defTabSz="914400" rtl="0" eaLnBrk="1" latinLnBrk="0" hangingPunct="1">
       <a:defRPr sz="1800" kern="1200">
@@ -134,7 +134,7 @@
   <p:extLst>
     <p:ext uri="{521415D9-36F7-43E2-AB2F-B90AF26B5E84}">
       <p14:sectionLst xmlns:p14="http://schemas.microsoft.com/office/powerpoint/2010/main">
-        <p14:section name="The problem" id="{12868ba8-7047-0bce-d7f5-9ae46567cdce}">
+        <p14:section name="The problem" id="{12868BA8-7047-0BCE-D7F5-9AE46567CDCE}">
           <p14:sldIdLst>
             <p14:sldId id="256"/>
             <p14:sldId id="257"/>
@@ -142,58 +142,58 @@
             <p14:sldId id="259"/>
           </p14:sldIdLst>
         </p14:section>
-        <p14:section name="Hypotheses" id="{f6e48a8c-0c02-9c8d-5c07-2c3e1b75e536}">
+        <p14:section name="Hypotheses" id="{F6E48A8C-0C02-9C8D-5C07-2C3E1B75E536}">
           <p14:sldIdLst>
             <p14:sldId id="260"/>
-            <p14:sldId id="277"/>
           </p14:sldIdLst>
         </p14:section>
-        <p14:section name="Method" id="{c83e4128-08b2-2627-746e-7cb0d6a51d6c}">
+        <p14:section name="Method" id="{C83E4128-08B2-2627-746E-7CB0D6A51D6C}">
           <p14:sldIdLst>
             <p14:sldId id="261"/>
             <p14:sldId id="262"/>
             <p14:sldId id="263"/>
             <p14:sldId id="264"/>
-            <p14:sldId id="278"/>
           </p14:sldIdLst>
         </p14:section>
-        <p14:section name="The test" id="{918a7c06-5a03-67f3-d22f-97ac5af23bd3}">
+        <p14:section name="The test" id="{918A7C06-5A03-67F3-D22F-97AC5AF23BD3}">
           <p14:sldIdLst>
             <p14:sldId id="265"/>
           </p14:sldIdLst>
         </p14:section>
-        <p14:section name="Results" id="{3d16b2be-52f9-3210-dd26-8ad03018660c}">
+        <p14:section name="Results" id="{3D16B2BE-52F9-3210-DD26-8AD03018660C}">
           <p14:sldIdLst>
             <p14:sldId id="266"/>
             <p14:sldId id="267"/>
             <p14:sldId id="268"/>
-            <p14:sldId id="273"/>
-            <p14:sldId id="274"/>
-            <p14:sldId id="275"/>
           </p14:sldIdLst>
         </p14:section>
-        <p14:section name="Which is better" id="{f4e62349-69e1-853e-723f-4a62004b6946}">
+        <p14:section name="Which is better" id="{F4E62349-69E1-853E-723F-4A62004B6946}">
           <p14:sldIdLst>
             <p14:sldId id="269"/>
             <p14:sldId id="270"/>
             <p14:sldId id="271"/>
             <p14:sldId id="272"/>
+            <p14:sldId id="273"/>
+            <p14:sldId id="274"/>
+            <p14:sldId id="275"/>
             <p14:sldId id="276"/>
+            <p14:sldId id="277"/>
+            <p14:sldId id="278"/>
           </p14:sldIdLst>
         </p14:section>
-        <p14:section name="Results" id="{612d2897-fba3-0bcb-1e90-0537dedf79e3}">
+        <p14:section name="Results" id="{612D2897-FBA3-0BCB-1E90-0537DEDF79E3}">
           <p14:sldIdLst/>
         </p14:section>
-        <p14:section name="Which is better" id="{eed4402a-d2c0-fd9b-7673-77675dc6c699}">
+        <p14:section name="Which is better" id="{EED4402A-D2C0-FD9B-7673-77675DC6C699}">
           <p14:sldIdLst/>
         </p14:section>
-        <p14:section name="Hypotheses" id="{77decbc8-1f0f-2c0b-6aab-3037d38e10a7}">
+        <p14:section name="Hypotheses" id="{77DECBC8-1F0F-2C0B-6AAB-3037D38E10A7}">
           <p14:sldIdLst/>
         </p14:section>
-        <p14:section name="Method" id="{e608404a-e515-7b52-f99f-14e2f75e2864}">
+        <p14:section name="Method" id="{E608404A-E515-7B52-F99F-14E2F75E2864}">
           <p14:sldIdLst/>
         </p14:section>
-        <p14:section name="How to use it" id="{17660fb1-9be9-4a73-c63b-75339e2319bd}">
+        <p14:section name="How to use it" id="{17660FB1-9BE9-4A73-C63B-75339E2319BD}">
           <p14:sldIdLst>
             <p14:sldId id="279"/>
             <p14:sldId id="280"/>
@@ -201,7 +201,7 @@
             <p14:sldId id="282"/>
           </p14:sldIdLst>
         </p14:section>
-        <p14:section name="Close" id="{37ef794e-169f-e04a-f3cd-f260efacc2b3}">
+        <p14:section name="Close" id="{37EF794E-169F-E04A-F3CD-F260EFACC2B3}">
           <p14:sldIdLst>
             <p14:sldId id="283"/>
           </p14:sldIdLst>
@@ -237,234 +237,10 @@
           <a:chExt cx="0" cy="0"/>
         </a:xfrm>
       </p:grpSpPr>
-      <p:sp>
-        <p:nvSpPr>
-          <p:cNvPr id="2" name="Header Placeholder 1"/>
-          <p:cNvSpPr>
-            <a:spLocks noGrp="1"/>
-          </p:cNvSpPr>
-          <p:nvPr>
-            <p:ph type="hdr" sz="quarter"/>
-          </p:nvPr>
-        </p:nvSpPr>
-        <p:spPr>
-          <a:xfrm>
-            <a:off x="0" y="0"/>
-            <a:ext cx="2971800" cy="458788"/>
-          </a:xfrm>
-          <a:prstGeom prst="rect">
-            <a:avLst/>
-          </a:prstGeom>
-        </p:spPr>
-        <p:txBody>
-          <a:bodyPr vert="horz" lIns="91440" tIns="45720" rIns="91440" bIns="45720" rtlCol="0"/>
-          <a:lstStyle>
-            <a:lvl1pPr algn="l">
-              <a:defRPr sz="1200"/>
-            </a:lvl1pPr>
-          </a:lstStyle>
-          <a:p>
-            <a:endParaRPr lang="en-US"/>
-          </a:p>
-        </p:txBody>
-      </p:sp>
-      <p:sp>
-        <p:nvSpPr>
-          <p:cNvPr id="3" name="Date Placeholder 2"/>
-          <p:cNvSpPr>
-            <a:spLocks noGrp="1"/>
-          </p:cNvSpPr>
-          <p:nvPr>
-            <p:ph type="dt" idx="1"/>
-          </p:nvPr>
-        </p:nvSpPr>
-        <p:spPr>
-          <a:xfrm>
-            <a:off x="3884613" y="0"/>
-            <a:ext cx="2971800" cy="458788"/>
-          </a:xfrm>
-          <a:prstGeom prst="rect">
-            <a:avLst/>
-          </a:prstGeom>
-        </p:spPr>
-        <p:txBody>
-          <a:bodyPr vert="horz" lIns="91440" tIns="45720" rIns="91440" bIns="45720" rtlCol="0"/>
-          <a:lstStyle>
-            <a:lvl1pPr algn="r">
-              <a:defRPr sz="1200"/>
-            </a:lvl1pPr>
-          </a:lstStyle>
-          <a:p>
-            <a:fld id="{5282F153-3F37-0F45-9E97-73ACFA13230C}" type="datetimeFigureOut">
-              <a:rPr lang="en-US"/>
-              <a:t>7/23/19</a:t>
-            </a:fld>
-            <a:endParaRPr lang="en-US"/>
-          </a:p>
-        </p:txBody>
-      </p:sp>
-      <p:sp>
-        <p:nvSpPr>
-          <p:cNvPr id="4" name="Slide Image Placeholder 3"/>
-          <p:cNvSpPr>
-            <a:spLocks noGrp="1" noRot="1" noChangeAspect="1"/>
-          </p:cNvSpPr>
-          <p:nvPr>
-            <p:ph type="sldImg" idx="2"/>
-          </p:nvPr>
-        </p:nvSpPr>
-        <p:spPr>
-          <a:xfrm>
-            <a:off x="685800" y="1143000"/>
-            <a:ext cx="5486400" cy="3086100"/>
-          </a:xfrm>
-          <a:prstGeom prst="rect">
-            <a:avLst/>
-          </a:prstGeom>
-          <a:noFill/>
-          <a:ln w="12700">
-            <a:solidFill>
-              <a:prstClr val="black"/>
-            </a:solidFill>
-          </a:ln>
-        </p:spPr>
-        <p:txBody>
-          <a:bodyPr vert="horz" lIns="91440" tIns="45720" rIns="91440" bIns="45720" rtlCol="0" anchor="ctr"/>
-          <a:lstStyle/>
-          <a:p>
-            <a:endParaRPr lang="en-US"/>
-          </a:p>
-        </p:txBody>
-      </p:sp>
-      <p:sp>
-        <p:nvSpPr>
-          <p:cNvPr id="5" name="Notes Placeholder 4"/>
-          <p:cNvSpPr>
-            <a:spLocks noGrp="1"/>
-          </p:cNvSpPr>
-          <p:nvPr>
-            <p:ph type="body" sz="quarter" idx="3"/>
-          </p:nvPr>
-        </p:nvSpPr>
-        <p:spPr>
-          <a:xfrm>
-            <a:off x="685800" y="4400550"/>
-            <a:ext cx="5486400" cy="3600450"/>
-          </a:xfrm>
-          <a:prstGeom prst="rect">
-            <a:avLst/>
-          </a:prstGeom>
-        </p:spPr>
-        <p:txBody>
-          <a:bodyPr vert="horz" lIns="91440" tIns="45720" rIns="91440" bIns="45720" rtlCol="0"/>
-          <a:lstStyle/>
-          <a:p>
-            <a:pPr lvl="0"/>
-            <a:r>
-              <a:rPr lang="en-US"/>
-              <a:t>Click to edit Master text styles</a:t>
-            </a:r>
-          </a:p>
-          <a:p>
-            <a:pPr lvl="1"/>
-            <a:r>
-              <a:rPr lang="en-US"/>
-              <a:t>Second level</a:t>
-            </a:r>
-          </a:p>
-          <a:p>
-            <a:pPr lvl="2"/>
-            <a:r>
-              <a:rPr lang="en-US"/>
-              <a:t>Third level</a:t>
-            </a:r>
-          </a:p>
-          <a:p>
-            <a:pPr lvl="3"/>
-            <a:r>
-              <a:rPr lang="en-US"/>
-              <a:t>Fourth level</a:t>
-            </a:r>
-          </a:p>
-          <a:p>
-            <a:pPr lvl="4"/>
-            <a:r>
-              <a:rPr lang="en-US"/>
-              <a:t>Fifth level</a:t>
-            </a:r>
-          </a:p>
-        </p:txBody>
-      </p:sp>
-      <p:sp>
-        <p:nvSpPr>
-          <p:cNvPr id="6" name="Footer Placeholder 5"/>
-          <p:cNvSpPr>
-            <a:spLocks noGrp="1"/>
-          </p:cNvSpPr>
-          <p:nvPr>
-            <p:ph type="ftr" sz="quarter" idx="4"/>
-          </p:nvPr>
-        </p:nvSpPr>
-        <p:spPr>
-          <a:xfrm>
-            <a:off x="0" y="8685213"/>
-            <a:ext cx="2971800" cy="458787"/>
-          </a:xfrm>
-          <a:prstGeom prst="rect">
-            <a:avLst/>
-          </a:prstGeom>
-        </p:spPr>
-        <p:txBody>
-          <a:bodyPr vert="horz" lIns="91440" tIns="45720" rIns="91440" bIns="45720" rtlCol="0" anchor="b"/>
-          <a:lstStyle>
-            <a:lvl1pPr algn="l">
-              <a:defRPr sz="1200"/>
-            </a:lvl1pPr>
-          </a:lstStyle>
-          <a:p>
-            <a:endParaRPr lang="en-US"/>
-          </a:p>
-        </p:txBody>
-      </p:sp>
-      <p:sp>
-        <p:nvSpPr>
-          <p:cNvPr id="7" name="Slide Number Placeholder 6"/>
-          <p:cNvSpPr>
-            <a:spLocks noGrp="1"/>
-          </p:cNvSpPr>
-          <p:nvPr>
-            <p:ph type="sldNum" sz="quarter" idx="5"/>
-          </p:nvPr>
-        </p:nvSpPr>
-        <p:spPr>
-          <a:xfrm>
-            <a:off x="3884613" y="8685213"/>
-            <a:ext cx="2971800" cy="458787"/>
-          </a:xfrm>
-          <a:prstGeom prst="rect">
-            <a:avLst/>
-          </a:prstGeom>
-        </p:spPr>
-        <p:txBody>
-          <a:bodyPr vert="horz" lIns="91440" tIns="45720" rIns="91440" bIns="45720" rtlCol="0" anchor="b"/>
-          <a:lstStyle>
-            <a:lvl1pPr algn="r">
-              <a:defRPr sz="1200"/>
-            </a:lvl1pPr>
-          </a:lstStyle>
-          <a:p>
-            <a:fld id="{CE5E9CC1-C706-0F49-92D6-E571CC5EEA8F}" type="slidenum">
-              <a:rPr lang="en-US"/>
-              <a:t>‹#›</a:t>
-            </a:fld>
-            <a:endParaRPr lang="en-US"/>
-          </a:p>
-        </p:txBody>
-      </p:sp>
     </p:spTree>
     <p:extLst>
       <p:ext uri="{BB962C8B-B14F-4D97-AF65-F5344CB8AC3E}">
-        <p14:creationId xmlns:p14="http://schemas.microsoft.com/office/powerpoint/2010/main" val="1024086991"/>
+        <p14:creationId xmlns:p14="http://schemas.microsoft.com/office/powerpoint/2010/main" val="4076494411"/>
       </p:ext>
     </p:extLst>
   </p:cSld>
@@ -612,7 +388,6 @@
               <a:rPr lang="en-US" dirty="0"/>
               <a:t>Ask the room what it is. Then say the swarm is not told either.</a:t>
             </a:r>
-            <a:endParaRPr lang="en-US" dirty="0"/>
           </a:p>
         </p:txBody>
       </p:sp>
@@ -700,7 +475,6 @@
               <a:rPr lang="en-US" dirty="0"/>
               <a:t>Designed on seeds 1 and 2. Scored on 101 to 105. If someone asks whether we tuned on the test, this is the answer.</a:t>
             </a:r>
-            <a:endParaRPr lang="en-US" dirty="0"/>
           </a:p>
         </p:txBody>
       </p:sp>
@@ -788,7 +562,6 @@
               <a:rPr lang="en-US" dirty="0"/>
               <a:t>Give the 20/20, then give it away: the probe and the pipeline also get it. The swarm earns its keep under faults.</a:t>
             </a:r>
-            <a:endParaRPr lang="en-US" dirty="0"/>
           </a:p>
         </p:txBody>
       </p:sp>
@@ -876,7 +649,6 @@
               <a:rPr lang="en-US" dirty="0"/>
               <a:t>Point at the red cloud, then at the pile near 1 to 2 mm. That pile is the probe result. The swarm is not special yet.</a:t>
             </a:r>
-            <a:endParaRPr lang="en-US" dirty="0"/>
           </a:p>
         </p:txBody>
       </p:sp>
@@ -964,7 +736,6 @@
               <a:rPr lang="en-US" dirty="0"/>
               <a:t>Three seeds is a small n. Say so. The gap to the single agent is not small.</a:t>
             </a:r>
-            <a:endParaRPr lang="en-US" dirty="0"/>
           </a:p>
         </p:txBody>
       </p:sp>
@@ -1052,7 +823,6 @@
               <a:rPr lang="en-US" dirty="0"/>
               <a:t>Read the lying-sensor row out loud. The 4/4 is true, and it is not the whole story.</a:t>
             </a:r>
-            <a:endParaRPr lang="en-US" dirty="0"/>
           </a:p>
         </p:txBody>
       </p:sp>
@@ -1140,7 +910,6 @@
               <a:rPr lang="en-US" dirty="0"/>
               <a:t>Three wins come from a second opinion. The loss is two agents believing the same bad sensor.</a:t>
             </a:r>
-            <a:endParaRPr lang="en-US" dirty="0"/>
           </a:p>
         </p:txBody>
       </p:sp>
@@ -1228,7 +997,6 @@
               <a:rPr lang="en-US" dirty="0"/>
               <a:t>Separate the alarm from the recovery. We notice about as well as the pipeline. We rebuild more slowly.</a:t>
             </a:r>
-            <a:endParaRPr lang="en-US" dirty="0"/>
           </a:p>
         </p:txBody>
       </p:sp>
@@ -1316,7 +1084,6 @@
               <a:rPr lang="en-US" dirty="0"/>
               <a:t>While the alarm is open, the planner refuses to move. That pause is why the swarm asks for a new plan.</a:t>
             </a:r>
-            <a:endParaRPr lang="en-US" dirty="0"/>
           </a:p>
         </p:txBody>
       </p:sp>
@@ -1404,7 +1171,6 @@
               <a:rPr lang="en-US" dirty="0"/>
               <a:t>Name the two noise tests apart. One bad channel fools the swarm. Noise on every frame is where the extra sweeps pay.</a:t>
             </a:r>
-            <a:endParaRPr lang="en-US" dirty="0"/>
           </a:p>
         </p:txBody>
       </p:sp>
@@ -1492,7 +1258,6 @@
               <a:rPr lang="en-US" dirty="0"/>
               <a:t>Zero false refusals is what makes the 200 out of 200 believable.</a:t>
             </a:r>
-            <a:endParaRPr lang="en-US" dirty="0"/>
           </a:p>
         </p:txBody>
       </p:sp>
@@ -1580,7 +1345,6 @@
               <a:rPr lang="en-US" dirty="0"/>
               <a:t>Units in code are metres and radians. Every number a person reads is in millimetres.</a:t>
             </a:r>
-            <a:endParaRPr lang="en-US" dirty="0"/>
           </a:p>
         </p:txBody>
       </p:sp>
@@ -1668,7 +1432,6 @@
               <a:rPr lang="en-US" dirty="0"/>
               <a:t>Knockout is a clean body. The fault slide is where a missing replica matters.</a:t>
             </a:r>
-            <a:endParaRPr lang="en-US" dirty="0"/>
           </a:p>
         </p:txBody>
       </p:sp>
@@ -1756,7 +1519,6 @@
               <a:rPr lang="en-US" dirty="0"/>
               <a:t>Do not rush this slide. A judge who finds one of these later will discount the 4/4.</a:t>
             </a:r>
-            <a:endParaRPr lang="en-US" dirty="0"/>
           </a:p>
         </p:txBody>
       </p:sp>
@@ -1844,7 +1606,6 @@
               <a:rPr lang="en-US" dirty="0"/>
               <a:t>Leave this slide up during questions.</a:t>
             </a:r>
-            <a:endParaRPr lang="en-US" dirty="0"/>
           </a:p>
         </p:txBody>
       </p:sp>
@@ -1932,7 +1693,6 @@
               <a:rPr lang="en-US" dirty="0"/>
               <a:t>Open the dashboard if a judge wants a real trace. The count is the one-line version.</a:t>
             </a:r>
-            <a:endParaRPr lang="en-US" dirty="0"/>
           </a:p>
         </p:txBody>
       </p:sp>
@@ -2020,7 +1780,6 @@
               <a:rPr lang="en-US" dirty="0"/>
               <a:t>The skill, the command, and the files already exist.</a:t>
             </a:r>
-            <a:endParaRPr lang="en-US" dirty="0"/>
           </a:p>
         </p:txBody>
       </p:sp>
@@ -2108,7 +1867,6 @@
               <a:rPr lang="en-US" dirty="0"/>
               <a:t>One command per line. The last colon in --robot is the class name, so a Windows drive letter is safe.</a:t>
             </a:r>
-            <a:endParaRPr lang="en-US" dirty="0"/>
           </a:p>
         </p:txBody>
       </p:sp>
@@ -2196,7 +1954,6 @@
               <a:rPr lang="en-US" dirty="0"/>
               <a:t>Hand a person the report. It is already in millimetres.</a:t>
             </a:r>
-            <a:endParaRPr lang="en-US" dirty="0"/>
           </a:p>
         </p:txBody>
       </p:sp>
@@ -2284,7 +2041,6 @@
               <a:rPr lang="en-US" dirty="0"/>
               <a:t>The claim to stand on is the independent-seed table, with the six losses beside it.</a:t>
             </a:r>
-            <a:endParaRPr lang="en-US" dirty="0"/>
           </a:p>
         </p:txBody>
       </p:sp>
@@ -2372,7 +2128,6 @@
               <a:rPr lang="en-US" dirty="0"/>
               <a:t>Stop. Leave the verdict slide or this one up.</a:t>
             </a:r>
-            <a:endParaRPr lang="en-US" dirty="0"/>
           </a:p>
         </p:txBody>
       </p:sp>
@@ -2460,7 +2215,6 @@
               <a:rPr lang="en-US" dirty="0"/>
               <a:t>These are the generator's patterns. The swarm is not shown them, and the wires can arrive in any order.</a:t>
             </a:r>
-            <a:endParaRPr lang="en-US" dirty="0"/>
           </a:p>
         </p:txBody>
       </p:sp>
@@ -2548,7 +2302,6 @@
               <a:rPr lang="en-US" dirty="0"/>
               <a:t>If a judge asks whether it peeked: the spec, the MuJoCo model, and the true tip belong to the scorer.</a:t>
             </a:r>
-            <a:endParaRPr lang="en-US" dirty="0"/>
           </a:p>
         </p:txBody>
       </p:sp>
@@ -2636,7 +2389,6 @@
               <a:rPr lang="en-US" dirty="0"/>
               <a:t>H3 is the collective-capability score. H6 is the one we expected might fail, and it did.</a:t>
             </a:r>
-            <a:endParaRPr lang="en-US" dirty="0"/>
           </a:p>
         </p:txBody>
       </p:sp>
@@ -2724,7 +2476,6 @@
               <a:rPr lang="en-US" dirty="0"/>
               <a:t>The review agent and the monitor are the two single copies. Knocking out the review agent still left 20/20.</a:t>
             </a:r>
-            <a:endParaRPr lang="en-US" dirty="0"/>
           </a:p>
         </p:txBody>
       </p:sp>
@@ -2812,7 +2563,6 @@
               <a:rPr lang="en-US" dirty="0"/>
               <a:t>Two agents do this per channel. A disputed channel is not deleted. Every type is still proposed.</a:t>
             </a:r>
-            <a:endParaRPr lang="en-US" dirty="0"/>
           </a:p>
         </p:txBody>
       </p:sp>
@@ -2900,7 +2650,6 @@
               <a:rPr lang="en-US" dirty="0"/>
               <a:t>Confidence is not the crown. A loud wrong hypothesis loses to a quiet model that predicts the holdout.</a:t>
             </a:r>
-            <a:endParaRPr lang="en-US" dirty="0"/>
           </a:p>
         </p:txBody>
       </p:sp>
@@ -2988,7 +2737,6 @@
               <a:rPr lang="en-US" dirty="0"/>
               <a:t>Say this out loud: same robots, same 64 motions, same scorer.</a:t>
             </a:r>
-            <a:endParaRPr lang="en-US" dirty="0"/>
           </a:p>
         </p:txBody>
       </p:sp>
@@ -3066,6 +2814,7 @@
         <a:solidFill>
           <a:srgbClr val="F4F1EA"/>
         </a:solidFill>
+        <a:effectLst/>
       </p:bgPr>
     </p:bg>
     <p:spTree>
@@ -3085,9 +2834,11 @@
       <p:sp>
         <p:nvSpPr>
           <p:cNvPr id="2" name="Text 0"/>
-          <p:cNvSpPr/>
+          <p:cNvSpPr>
+            <a:spLocks noGrp="1"/>
+          </p:cNvSpPr>
           <p:nvPr>
-            <p:ph idx="100" type="title" hasCustomPrompt="1"/>
+            <p:ph type="title" idx="100" hasCustomPrompt="1"/>
           </p:nvPr>
         </p:nvSpPr>
         <p:spPr>
@@ -3104,7 +2855,7 @@
         <p:txBody>
           <a:bodyPr wrap="square" rtlCol="0"/>
           <a:lstStyle>
-            <a:lvl1pPr indent="0" marL="0">
+            <a:lvl1pPr marL="0" indent="0">
               <a:buNone/>
               <a:defRPr lang="en-US" sz="3200" dirty="0">
                 <a:solidFill>
@@ -3117,7 +2868,7 @@
             </a:lvl1pPr>
           </a:lstStyle>
           <a:p>
-            <a:pPr indent="0" marL="0">
+            <a:pPr marL="0" indent="0">
               <a:buNone/>
             </a:pPr>
             <a:endParaRPr lang="en-US" sz="3200" dirty="0"/>
@@ -3144,7 +2895,7 @@
           </a:prstGeom>
           <a:extLst>
             <a:ext uri="{C572A759-6A51-4108-AA02-DFA0A04FC94B}">
-              <ma14:wrappingTextBoxFlag xmlns:ma14="http://schemas.microsoft.com/office/mac/drawingml/2011/main" val="0"/>
+              <ma14:wrappingTextBoxFlag xmlns:ma14="http://schemas.microsoft.com/office/mac/drawingml/2011/main" xmlns="" val="0"/>
             </a:ext>
           </a:extLst>
         </p:spPr>
@@ -3165,8 +2916,8 @@
           <a:p>
             <a:pPr algn="l"/>
             <a:fld id="{F7021451-1387-4CA6-816F-3879F97B5CBC}" type="slidenum">
-              <a:rPr b="0" lang="en-US"/>
-              <a:t>1002</a:t>
+              <a:rPr lang="en-US" b="0"/>
+              <a:t>‹#›</a:t>
             </a:fld>
             <a:endParaRPr lang="en-US"/>
           </a:p>
@@ -3188,6 +2939,7 @@
         <a:solidFill>
           <a:srgbClr val="14181C"/>
         </a:solidFill>
+        <a:effectLst/>
       </p:bgPr>
     </p:bg>
     <p:spTree>
@@ -3207,9 +2959,11 @@
       <p:sp>
         <p:nvSpPr>
           <p:cNvPr id="2" name="Text 0"/>
-          <p:cNvSpPr/>
+          <p:cNvSpPr>
+            <a:spLocks noGrp="1"/>
+          </p:cNvSpPr>
           <p:nvPr>
-            <p:ph idx="100" type="title" hasCustomPrompt="1"/>
+            <p:ph type="title" idx="100" hasCustomPrompt="1"/>
           </p:nvPr>
         </p:nvSpPr>
         <p:spPr>
@@ -3226,7 +2980,7 @@
         <p:txBody>
           <a:bodyPr wrap="square" rtlCol="0"/>
           <a:lstStyle>
-            <a:lvl1pPr indent="0" marL="0">
+            <a:lvl1pPr marL="0" indent="0">
               <a:buNone/>
               <a:defRPr lang="en-US" sz="4400" dirty="0">
                 <a:solidFill>
@@ -3239,7 +2993,7 @@
             </a:lvl1pPr>
           </a:lstStyle>
           <a:p>
-            <a:pPr indent="0" marL="0">
+            <a:pPr marL="0" indent="0">
               <a:buNone/>
             </a:pPr>
             <a:endParaRPr lang="en-US" sz="4400" dirty="0"/>
@@ -3266,7 +3020,7 @@
           </a:prstGeom>
           <a:extLst>
             <a:ext uri="{C572A759-6A51-4108-AA02-DFA0A04FC94B}">
-              <ma14:wrappingTextBoxFlag xmlns:ma14="http://schemas.microsoft.com/office/mac/drawingml/2011/main" val="0"/>
+              <ma14:wrappingTextBoxFlag xmlns:ma14="http://schemas.microsoft.com/office/mac/drawingml/2011/main" xmlns="" val="0"/>
             </a:ext>
           </a:extLst>
         </p:spPr>
@@ -3287,8 +3041,8 @@
           <a:p>
             <a:pPr algn="l"/>
             <a:fld id="{F7021451-1387-4CA6-816F-3879F97B5CBC}" type="slidenum">
-              <a:rPr b="0" lang="en-US"/>
-              <a:t>1003</a:t>
+              <a:rPr lang="en-US" b="0"/>
+              <a:t>‹#›</a:t>
             </a:fld>
             <a:endParaRPr lang="en-US"/>
           </a:p>
@@ -3305,6 +3059,11 @@
 <file path=ppt/slideMasters/slideMaster1.xml><?xml version="1.0" encoding="utf-8"?>
 <p:sldMaster xmlns:a="http://schemas.openxmlformats.org/drawingml/2006/main" xmlns:r="http://schemas.openxmlformats.org/officeDocument/2006/relationships" xmlns:p="http://schemas.openxmlformats.org/presentationml/2006/main">
   <p:cSld>
+    <p:bg>
+      <p:bgRef idx="1001">
+        <a:schemeClr val="bg1"/>
+      </p:bgRef>
+    </p:bg>
     <p:spTree>
       <p:nvGrpSpPr>
         <p:cNvPr id="1" name=""/>
@@ -3339,7 +3098,7 @@
           </a:prstGeom>
           <a:extLst>
             <a:ext uri="{C572A759-6A51-4108-AA02-DFA0A04FC94B}">
-              <ma14:wrappingTextBoxFlag xmlns:ma14="http://schemas.microsoft.com/office/mac/drawingml/2011/main" val="0"/>
+              <ma14:wrappingTextBoxFlag xmlns:ma14="http://schemas.microsoft.com/office/mac/drawingml/2011/main" xmlns="" val="0"/>
             </a:ext>
           </a:extLst>
         </p:spPr>
@@ -3360,8 +3119,8 @@
           <a:p>
             <a:pPr algn="l"/>
             <a:fld id="{F7021451-1387-4CA6-816F-3879F97B5CBC}" type="slidenum">
-              <a:rPr b="0" lang="en-US"/>
-              <a:t>null</a:t>
+              <a:rPr lang="en-US" b="0"/>
+              <a:t>‹#›</a:t>
             </a:fld>
             <a:endParaRPr lang="en-US"/>
           </a:p>
@@ -3667,11 +3426,11 @@
           <a:bodyPr wrap="square" lIns="0" tIns="0" rIns="0" bIns="0" rtlCol="0" anchor="ctr"/>
           <a:lstStyle/>
           <a:p>
-            <a:pPr indent="0" marL="0">
-              <a:buNone/>
-            </a:pPr>
-            <a:r>
-              <a:rPr lang="en-US" sz="1300" spc="120" kern="0" dirty="0">
+            <a:pPr marL="0" indent="0">
+              <a:buNone/>
+            </a:pPr>
+            <a:r>
+              <a:rPr lang="en-US" sz="1300" kern="0" spc="120" dirty="0">
                 <a:solidFill>
                   <a:srgbClr val="F0C56A"/>
                 </a:solidFill>
@@ -3688,14 +3447,16 @@
       <p:sp>
         <p:nvSpPr>
           <p:cNvPr id="3" name="Text 0"/>
-          <p:cNvSpPr/>
+          <p:cNvSpPr>
+            <a:spLocks noGrp="1"/>
+          </p:cNvSpPr>
           <p:nvPr>
-            <p:ph idx="100" type="title" hasCustomPrompt="1"/>
+            <p:ph type="title" idx="100" hasCustomPrompt="1"/>
           </p:nvPr>
         </p:nvSpPr>
         <p:spPr>
           <a:xfrm>
-            <a:off x="548640" y="1554480"/>
+            <a:off x="309155" y="1655064"/>
             <a:ext cx="11064240" cy="2103120"/>
           </a:xfrm>
           <a:prstGeom prst="rect">
@@ -3708,7 +3469,7 @@
           <a:bodyPr wrap="square" lIns="0" tIns="0" rIns="0" bIns="0" rtlCol="0"/>
           <a:lstStyle/>
           <a:p>
-            <a:pPr indent="0" marL="0">
+            <a:pPr marL="0" indent="0">
               <a:buNone/>
             </a:pPr>
             <a:r>
@@ -3747,7 +3508,7 @@
           <a:bodyPr wrap="square" lIns="0" tIns="0" rIns="0" bIns="0" rtlCol="0" anchor="ctr"/>
           <a:lstStyle/>
           <a:p>
-            <a:pPr indent="0" marL="0">
+            <a:pPr marL="0" indent="0">
               <a:buNone/>
             </a:pPr>
             <a:r>
@@ -3786,7 +3547,7 @@
           <a:bodyPr wrap="square" lIns="0" tIns="0" rIns="0" bIns="0" rtlCol="0" anchor="ctr"/>
           <a:lstStyle/>
           <a:p>
-            <a:pPr indent="0" marL="0">
+            <a:pPr marL="0" indent="0">
               <a:buNone/>
             </a:pPr>
             <a:r>
@@ -3825,7 +3586,7 @@
           <a:bodyPr wrap="square" lIns="0" tIns="0" rIns="0" bIns="0" rtlCol="0" anchor="ctr"/>
           <a:lstStyle/>
           <a:p>
-            <a:pPr indent="0" marL="0">
+            <a:pPr marL="0" indent="0">
               <a:buNone/>
             </a:pPr>
             <a:r>
@@ -3864,7 +3625,7 @@
           <a:bodyPr wrap="square" lIns="0" tIns="0" rIns="0" bIns="0" rtlCol="0" anchor="ctr"/>
           <a:lstStyle/>
           <a:p>
-            <a:pPr indent="0" marL="0">
+            <a:pPr marL="0" indent="0">
               <a:buNone/>
             </a:pPr>
             <a:r>
@@ -3903,7 +3664,7 @@
           <a:bodyPr wrap="square" lIns="0" tIns="0" rIns="0" bIns="0" rtlCol="0" anchor="ctr"/>
           <a:lstStyle/>
           <a:p>
-            <a:pPr indent="0" marL="0">
+            <a:pPr marL="0" indent="0">
               <a:buNone/>
             </a:pPr>
             <a:r>
@@ -3942,7 +3703,7 @@
           <a:bodyPr wrap="square" lIns="0" tIns="0" rIns="0" bIns="0" rtlCol="0" anchor="ctr"/>
           <a:lstStyle/>
           <a:p>
-            <a:pPr indent="0" marL="0">
+            <a:pPr marL="0" indent="0">
               <a:buNone/>
             </a:pPr>
             <a:r>
@@ -3981,7 +3742,7 @@
           <a:bodyPr wrap="square" lIns="0" tIns="0" rIns="0" bIns="0" rtlCol="0" anchor="ctr"/>
           <a:lstStyle/>
           <a:p>
-            <a:pPr indent="0" marL="0">
+            <a:pPr marL="0" indent="0">
               <a:buNone/>
             </a:pPr>
             <a:r>
@@ -4019,7 +3780,7 @@
           </a:prstGeom>
           <a:extLst>
             <a:ext uri="{C572A759-6A51-4108-AA02-DFA0A04FC94B}">
-              <ma14:wrappingTextBoxFlag xmlns:ma14="http://schemas.microsoft.com/office/mac/drawingml/2011/main" val="0"/>
+              <ma14:wrappingTextBoxFlag xmlns:ma14="http://schemas.microsoft.com/office/mac/drawingml/2011/main" xmlns="" val="0"/>
             </a:ext>
           </a:extLst>
         </p:spPr>
@@ -4040,7 +3801,7 @@
           <a:p>
             <a:pPr algn="l"/>
             <a:fld id="{F7021451-1387-4CA6-816F-3879F97B5CBC}" type="slidenum">
-              <a:rPr b="0" lang="en-US"/>
+              <a:rPr lang="en-US" b="0"/>
               <a:t>1</a:t>
             </a:fld>
             <a:endParaRPr lang="en-US"/>
@@ -4093,11 +3854,11 @@
           <a:bodyPr wrap="square" lIns="0" tIns="0" rIns="0" bIns="0" rtlCol="0" anchor="ctr"/>
           <a:lstStyle/>
           <a:p>
-            <a:pPr indent="0" marL="0">
-              <a:buNone/>
-            </a:pPr>
-            <a:r>
-              <a:rPr lang="en-US" sz="1300" spc="120" kern="0" dirty="0">
+            <a:pPr marL="0" indent="0">
+              <a:buNone/>
+            </a:pPr>
+            <a:r>
+              <a:rPr lang="en-US" sz="1300" kern="0" spc="120" dirty="0">
                 <a:solidFill>
                   <a:srgbClr val="F0C56A"/>
                 </a:solidFill>
@@ -4114,9 +3875,11 @@
       <p:sp>
         <p:nvSpPr>
           <p:cNvPr id="3" name="Text 0"/>
-          <p:cNvSpPr/>
+          <p:cNvSpPr>
+            <a:spLocks noGrp="1"/>
+          </p:cNvSpPr>
           <p:nvPr>
-            <p:ph idx="100" type="title" hasCustomPrompt="1"/>
+            <p:ph type="title" idx="100" hasCustomPrompt="1"/>
           </p:nvPr>
         </p:nvSpPr>
         <p:spPr>
@@ -4134,7 +3897,7 @@
           <a:bodyPr wrap="square" lIns="0" tIns="0" rIns="0" bIns="0" rtlCol="0"/>
           <a:lstStyle/>
           <a:p>
-            <a:pPr indent="0" marL="0">
+            <a:pPr marL="0" indent="0">
               <a:buNone/>
             </a:pPr>
             <a:r>
@@ -4173,7 +3936,7 @@
           <a:bodyPr wrap="square" lIns="0" tIns="0" rIns="0" bIns="0" rtlCol="0" anchor="ctr"/>
           <a:lstStyle/>
           <a:p>
-            <a:pPr indent="0" marL="0">
+            <a:pPr marL="0" indent="0">
               <a:buNone/>
             </a:pPr>
             <a:r>
@@ -4212,7 +3975,7 @@
           <a:bodyPr wrap="square" lIns="0" tIns="0" rIns="0" bIns="0" rtlCol="0" anchor="ctr"/>
           <a:lstStyle/>
           <a:p>
-            <a:pPr indent="0" marL="0">
+            <a:pPr marL="0" indent="0">
               <a:buNone/>
             </a:pPr>
             <a:r>
@@ -4250,7 +4013,7 @@
           </a:prstGeom>
           <a:extLst>
             <a:ext uri="{C572A759-6A51-4108-AA02-DFA0A04FC94B}">
-              <ma14:wrappingTextBoxFlag xmlns:ma14="http://schemas.microsoft.com/office/mac/drawingml/2011/main" val="0"/>
+              <ma14:wrappingTextBoxFlag xmlns:ma14="http://schemas.microsoft.com/office/mac/drawingml/2011/main" xmlns="" val="0"/>
             </a:ext>
           </a:extLst>
         </p:spPr>
@@ -4271,7 +4034,7 @@
           <a:p>
             <a:pPr algn="l"/>
             <a:fld id="{F7021451-1387-4CA6-816F-3879F97B5CBC}" type="slidenum">
-              <a:rPr b="0" lang="en-US"/>
+              <a:rPr lang="en-US" b="0"/>
               <a:t>10</a:t>
             </a:fld>
             <a:endParaRPr lang="en-US"/>
@@ -4324,11 +4087,11 @@
           <a:bodyPr wrap="square" lIns="0" tIns="0" rIns="0" bIns="0" rtlCol="0" anchor="ctr"/>
           <a:lstStyle/>
           <a:p>
-            <a:pPr indent="0" marL="0">
-              <a:buNone/>
-            </a:pPr>
-            <a:r>
-              <a:rPr lang="en-US" sz="1200" spc="120" kern="0" dirty="0">
+            <a:pPr marL="0" indent="0">
+              <a:buNone/>
+            </a:pPr>
+            <a:r>
+              <a:rPr lang="en-US" sz="1200" kern="0" spc="120" dirty="0">
                 <a:solidFill>
                   <a:srgbClr val="8A5A10"/>
                 </a:solidFill>
@@ -4345,9 +4108,11 @@
       <p:sp>
         <p:nvSpPr>
           <p:cNvPr id="3" name="Text 0"/>
-          <p:cNvSpPr/>
+          <p:cNvSpPr>
+            <a:spLocks noGrp="1"/>
+          </p:cNvSpPr>
           <p:nvPr>
-            <p:ph idx="100" type="title" hasCustomPrompt="1"/>
+            <p:ph type="title" idx="100" hasCustomPrompt="1"/>
           </p:nvPr>
         </p:nvSpPr>
         <p:spPr>
@@ -4365,7 +4130,7 @@
           <a:bodyPr wrap="square" lIns="0" tIns="0" rIns="0" bIns="0" rtlCol="0" anchor="t"/>
           <a:lstStyle/>
           <a:p>
-            <a:pPr indent="0" marL="0">
+            <a:pPr marL="0" indent="0">
               <a:buNone/>
             </a:pPr>
             <a:r>
@@ -4404,7 +4169,7 @@
           <a:bodyPr wrap="square" lIns="0" tIns="0" rIns="0" bIns="0" rtlCol="0" anchor="ctr"/>
           <a:lstStyle/>
           <a:p>
-            <a:pPr indent="0" marL="0">
+            <a:pPr marL="0" indent="0">
               <a:buNone/>
             </a:pPr>
             <a:r>
@@ -4443,7 +4208,7 @@
           <a:bodyPr wrap="square" lIns="0" tIns="0" rIns="0" bIns="0" rtlCol="0" anchor="ctr"/>
           <a:lstStyle/>
           <a:p>
-            <a:pPr indent="0" marL="0">
+            <a:pPr marL="0" indent="0">
               <a:buNone/>
             </a:pPr>
             <a:r>
@@ -4482,7 +4247,7 @@
           <a:bodyPr wrap="square" lIns="0" tIns="0" rIns="0" bIns="0" rtlCol="0" anchor="ctr"/>
           <a:lstStyle/>
           <a:p>
-            <a:pPr indent="0" marL="0">
+            <a:pPr marL="0" indent="0">
               <a:buNone/>
             </a:pPr>
             <a:r>
@@ -4521,7 +4286,7 @@
           <a:bodyPr wrap="square" lIns="0" tIns="0" rIns="0" bIns="0" rtlCol="0" anchor="ctr"/>
           <a:lstStyle/>
           <a:p>
-            <a:pPr indent="0" marL="0">
+            <a:pPr marL="0" indent="0">
               <a:buNone/>
             </a:pPr>
             <a:r>
@@ -4560,7 +4325,7 @@
           <a:bodyPr wrap="square" lIns="0" tIns="0" rIns="0" bIns="0" rtlCol="0" anchor="ctr"/>
           <a:lstStyle/>
           <a:p>
-            <a:pPr indent="0" marL="0">
+            <a:pPr marL="0" indent="0">
               <a:buNone/>
             </a:pPr>
             <a:r>
@@ -4599,7 +4364,7 @@
           <a:bodyPr wrap="square" lIns="0" tIns="0" rIns="0" bIns="0" rtlCol="0" anchor="ctr"/>
           <a:lstStyle/>
           <a:p>
-            <a:pPr indent="0" marL="0">
+            <a:pPr marL="0" indent="0">
               <a:buNone/>
             </a:pPr>
             <a:r>
@@ -4638,13 +4403,20 @@
           </a:solidFill>
           <a:ln/>
           <a:effectLst>
-            <a:outerShdw sx="100000" sy="100000" kx="0" ky="0" algn="bl" rotWithShape="0" blurRad="177800" dist="38100" dir="5400000">
+            <a:outerShdw blurRad="177800" dist="38100" dir="5400000" algn="bl" rotWithShape="0">
               <a:srgbClr val="1A1E1B">
                 <a:alpha val="8000"/>
               </a:srgbClr>
             </a:outerShdw>
           </a:effectLst>
         </p:spPr>
+        <p:txBody>
+          <a:bodyPr/>
+          <a:lstStyle/>
+          <a:p>
+            <a:endParaRPr lang="en-US"/>
+          </a:p>
+        </p:txBody>
       </p:sp>
       <p:sp>
         <p:nvSpPr>
@@ -4667,7 +4439,7 @@
           <a:bodyPr wrap="square" lIns="0" tIns="0" rIns="0" bIns="0" rtlCol="0" anchor="ctr"/>
           <a:lstStyle/>
           <a:p>
-            <a:pPr indent="0" marL="0">
+            <a:pPr marL="0" indent="0">
               <a:buNone/>
             </a:pPr>
             <a:r>
@@ -4706,7 +4478,7 @@
           <a:bodyPr wrap="square" lIns="0" tIns="0" rIns="0" bIns="0" rtlCol="0" anchor="ctr"/>
           <a:lstStyle/>
           <a:p>
-            <a:pPr indent="0" marL="0">
+            <a:pPr marL="0" indent="0">
               <a:buNone/>
             </a:pPr>
             <a:r>
@@ -4745,13 +4517,20 @@
           </a:solidFill>
           <a:ln/>
           <a:effectLst>
-            <a:outerShdw sx="100000" sy="100000" kx="0" ky="0" algn="bl" rotWithShape="0" blurRad="177800" dist="38100" dir="5400000">
+            <a:outerShdw blurRad="177800" dist="38100" dir="5400000" algn="bl" rotWithShape="0">
               <a:srgbClr val="1A1E1B">
                 <a:alpha val="8000"/>
               </a:srgbClr>
             </a:outerShdw>
           </a:effectLst>
         </p:spPr>
+        <p:txBody>
+          <a:bodyPr/>
+          <a:lstStyle/>
+          <a:p>
+            <a:endParaRPr lang="en-US"/>
+          </a:p>
+        </p:txBody>
       </p:sp>
       <p:sp>
         <p:nvSpPr>
@@ -4774,7 +4553,7 @@
           <a:bodyPr wrap="square" lIns="0" tIns="0" rIns="0" bIns="0" rtlCol="0" anchor="ctr"/>
           <a:lstStyle/>
           <a:p>
-            <a:pPr indent="0" marL="0">
+            <a:pPr marL="0" indent="0">
               <a:buNone/>
             </a:pPr>
             <a:r>
@@ -4813,7 +4592,7 @@
           <a:bodyPr wrap="square" lIns="0" tIns="0" rIns="0" bIns="0" rtlCol="0" anchor="ctr"/>
           <a:lstStyle/>
           <a:p>
-            <a:pPr indent="0" marL="0">
+            <a:pPr marL="0" indent="0">
               <a:buNone/>
             </a:pPr>
             <a:r>
@@ -4852,13 +4631,20 @@
           </a:solidFill>
           <a:ln/>
           <a:effectLst>
-            <a:outerShdw sx="100000" sy="100000" kx="0" ky="0" algn="bl" rotWithShape="0" blurRad="177800" dist="38100" dir="5400000">
+            <a:outerShdw blurRad="177800" dist="38100" dir="5400000" algn="bl" rotWithShape="0">
               <a:srgbClr val="1A1E1B">
                 <a:alpha val="8000"/>
               </a:srgbClr>
             </a:outerShdw>
           </a:effectLst>
         </p:spPr>
+        <p:txBody>
+          <a:bodyPr/>
+          <a:lstStyle/>
+          <a:p>
+            <a:endParaRPr lang="en-US"/>
+          </a:p>
+        </p:txBody>
       </p:sp>
       <p:sp>
         <p:nvSpPr>
@@ -4881,7 +4667,7 @@
           <a:bodyPr wrap="square" lIns="0" tIns="0" rIns="0" bIns="0" rtlCol="0" anchor="ctr"/>
           <a:lstStyle/>
           <a:p>
-            <a:pPr indent="0" marL="0">
+            <a:pPr marL="0" indent="0">
               <a:buNone/>
             </a:pPr>
             <a:r>
@@ -4920,7 +4706,7 @@
           <a:bodyPr wrap="square" lIns="0" tIns="0" rIns="0" bIns="0" rtlCol="0" anchor="ctr"/>
           <a:lstStyle/>
           <a:p>
-            <a:pPr indent="0" marL="0">
+            <a:pPr marL="0" indent="0">
               <a:buNone/>
             </a:pPr>
             <a:r>
@@ -4959,7 +4745,7 @@
           <a:bodyPr wrap="square" lIns="0" tIns="0" rIns="0" bIns="0" rtlCol="0" anchor="ctr"/>
           <a:lstStyle/>
           <a:p>
-            <a:pPr indent="0" marL="0">
+            <a:pPr marL="0" indent="0">
               <a:buNone/>
             </a:pPr>
             <a:r>
@@ -4997,7 +4783,7 @@
           </a:prstGeom>
           <a:extLst>
             <a:ext uri="{C572A759-6A51-4108-AA02-DFA0A04FC94B}">
-              <ma14:wrappingTextBoxFlag xmlns:ma14="http://schemas.microsoft.com/office/mac/drawingml/2011/main" val="0"/>
+              <ma14:wrappingTextBoxFlag xmlns:ma14="http://schemas.microsoft.com/office/mac/drawingml/2011/main" xmlns="" val="0"/>
             </a:ext>
           </a:extLst>
         </p:spPr>
@@ -5018,7 +4804,7 @@
           <a:p>
             <a:pPr algn="l"/>
             <a:fld id="{F7021451-1387-4CA6-816F-3879F97B5CBC}" type="slidenum">
-              <a:rPr b="0" lang="en-US"/>
+              <a:rPr lang="en-US" b="0"/>
               <a:t>11</a:t>
             </a:fld>
             <a:endParaRPr lang="en-US"/>
@@ -5071,11 +4857,11 @@
           <a:bodyPr wrap="square" lIns="0" tIns="0" rIns="0" bIns="0" rtlCol="0" anchor="ctr"/>
           <a:lstStyle/>
           <a:p>
-            <a:pPr indent="0" marL="0">
-              <a:buNone/>
-            </a:pPr>
-            <a:r>
-              <a:rPr lang="en-US" sz="1200" spc="120" kern="0" dirty="0">
+            <a:pPr marL="0" indent="0">
+              <a:buNone/>
+            </a:pPr>
+            <a:r>
+              <a:rPr lang="en-US" sz="1200" kern="0" spc="120" dirty="0">
                 <a:solidFill>
                   <a:srgbClr val="8A5A10"/>
                 </a:solidFill>
@@ -5092,9 +4878,11 @@
       <p:sp>
         <p:nvSpPr>
           <p:cNvPr id="3" name="Text 0"/>
-          <p:cNvSpPr/>
+          <p:cNvSpPr>
+            <a:spLocks noGrp="1"/>
+          </p:cNvSpPr>
           <p:nvPr>
-            <p:ph idx="100" type="title" hasCustomPrompt="1"/>
+            <p:ph type="title" idx="100" hasCustomPrompt="1"/>
           </p:nvPr>
         </p:nvSpPr>
         <p:spPr>
@@ -5112,7 +4900,7 @@
           <a:bodyPr wrap="square" lIns="0" tIns="0" rIns="0" bIns="0" rtlCol="0" anchor="t"/>
           <a:lstStyle/>
           <a:p>
-            <a:pPr indent="0" marL="0">
+            <a:pPr marL="0" indent="0">
               <a:buNone/>
             </a:pPr>
             <a:r>
@@ -5132,14 +4920,14 @@
       </p:sp>
       <p:pic>
         <p:nvPicPr>
-          <p:cNvPr id="5" name="Image 0" descr="D:/bodyscout/results/fig_bodies.png">    </p:cNvPr>
+          <p:cNvPr id="5" name="Image 0" descr="D:/bodyscout/results/fig_bodies.png"/>
           <p:cNvPicPr>
             <a:picLocks noChangeAspect="1"/>
           </p:cNvPicPr>
           <p:nvPr/>
         </p:nvPicPr>
         <p:blipFill>
-          <a:blip r:embed="rId1"/>
+          <a:blip r:embed="rId3"/>
           <a:stretch>
             <a:fillRect/>
           </a:stretch>
@@ -5175,7 +4963,7 @@
           <a:bodyPr wrap="square" lIns="0" tIns="0" rIns="0" bIns="0" rtlCol="0" anchor="ctr"/>
           <a:lstStyle/>
           <a:p>
-            <a:pPr indent="0" marL="0">
+            <a:pPr marL="0" indent="0">
               <a:buNone/>
             </a:pPr>
             <a:r>
@@ -5213,7 +5001,7 @@
           </a:prstGeom>
           <a:extLst>
             <a:ext uri="{C572A759-6A51-4108-AA02-DFA0A04FC94B}">
-              <ma14:wrappingTextBoxFlag xmlns:ma14="http://schemas.microsoft.com/office/mac/drawingml/2011/main" val="0"/>
+              <ma14:wrappingTextBoxFlag xmlns:ma14="http://schemas.microsoft.com/office/mac/drawingml/2011/main" xmlns="" val="0"/>
             </a:ext>
           </a:extLst>
         </p:spPr>
@@ -5234,7 +5022,7 @@
           <a:p>
             <a:pPr algn="l"/>
             <a:fld id="{F7021451-1387-4CA6-816F-3879F97B5CBC}" type="slidenum">
-              <a:rPr b="0" lang="en-US"/>
+              <a:rPr lang="en-US" b="0"/>
               <a:t>12</a:t>
             </a:fld>
             <a:endParaRPr lang="en-US"/>
@@ -5287,11 +5075,11 @@
           <a:bodyPr wrap="square" lIns="0" tIns="0" rIns="0" bIns="0" rtlCol="0" anchor="ctr"/>
           <a:lstStyle/>
           <a:p>
-            <a:pPr indent="0" marL="0">
-              <a:buNone/>
-            </a:pPr>
-            <a:r>
-              <a:rPr lang="en-US" sz="1200" spc="120" kern="0" dirty="0">
+            <a:pPr marL="0" indent="0">
+              <a:buNone/>
+            </a:pPr>
+            <a:r>
+              <a:rPr lang="en-US" sz="1200" kern="0" spc="120" dirty="0">
                 <a:solidFill>
                   <a:srgbClr val="8A5A10"/>
                 </a:solidFill>
@@ -5308,9 +5096,11 @@
       <p:sp>
         <p:nvSpPr>
           <p:cNvPr id="3" name="Text 0"/>
-          <p:cNvSpPr/>
+          <p:cNvSpPr>
+            <a:spLocks noGrp="1"/>
+          </p:cNvSpPr>
           <p:nvPr>
-            <p:ph idx="100" type="title" hasCustomPrompt="1"/>
+            <p:ph type="title" idx="100" hasCustomPrompt="1"/>
           </p:nvPr>
         </p:nvSpPr>
         <p:spPr>
@@ -5328,7 +5118,7 @@
           <a:bodyPr wrap="square" lIns="0" tIns="0" rIns="0" bIns="0" rtlCol="0" anchor="t"/>
           <a:lstStyle/>
           <a:p>
-            <a:pPr indent="0" marL="0">
+            <a:pPr marL="0" indent="0">
               <a:buNone/>
             </a:pPr>
             <a:r>
@@ -5369,11 +5159,41 @@
             <a:tbl>
               <a:tblPr/>
               <a:tblGrid>
-                <a:gridCol w="2011680"/>
-                <a:gridCol w="2011680"/>
-                <a:gridCol w="2194560"/>
-                <a:gridCol w="2377440"/>
-                <a:gridCol w="2560320"/>
+                <a:gridCol w="2011680">
+                  <a:extLst>
+                    <a:ext uri="{9D8B030D-6E8A-4147-A177-3AD203B41FA5}">
+                      <a16:colId xmlns:a16="http://schemas.microsoft.com/office/drawing/2014/main" val="20000"/>
+                    </a:ext>
+                  </a:extLst>
+                </a:gridCol>
+                <a:gridCol w="2011680">
+                  <a:extLst>
+                    <a:ext uri="{9D8B030D-6E8A-4147-A177-3AD203B41FA5}">
+                      <a16:colId xmlns:a16="http://schemas.microsoft.com/office/drawing/2014/main" val="20001"/>
+                    </a:ext>
+                  </a:extLst>
+                </a:gridCol>
+                <a:gridCol w="2194560">
+                  <a:extLst>
+                    <a:ext uri="{9D8B030D-6E8A-4147-A177-3AD203B41FA5}">
+                      <a16:colId xmlns:a16="http://schemas.microsoft.com/office/drawing/2014/main" val="20002"/>
+                    </a:ext>
+                  </a:extLst>
+                </a:gridCol>
+                <a:gridCol w="2377440">
+                  <a:extLst>
+                    <a:ext uri="{9D8B030D-6E8A-4147-A177-3AD203B41FA5}">
+                      <a16:colId xmlns:a16="http://schemas.microsoft.com/office/drawing/2014/main" val="20003"/>
+                    </a:ext>
+                  </a:extLst>
+                </a:gridCol>
+                <a:gridCol w="2560320">
+                  <a:extLst>
+                    <a:ext uri="{9D8B030D-6E8A-4147-A177-3AD203B41FA5}">
+                      <a16:colId xmlns:a16="http://schemas.microsoft.com/office/drawing/2014/main" val="20004"/>
+                    </a:ext>
+                  </a:extLst>
+                </a:gridCol>
               </a:tblGrid>
               <a:tr h="487680">
                 <a:tc>
@@ -5381,7 +5201,7 @@
                     <a:bodyPr/>
                     <a:lstStyle/>
                     <a:p>
-                      <a:pPr algn="l" indent="0" marL="0">
+                      <a:pPr marL="0" indent="0" algn="l">
                         <a:buNone/>
                       </a:pPr>
                       <a:r>
@@ -5402,7 +5222,7 @@
                       </a:endParaRPr>
                     </a:p>
                   </a:txBody>
-                  <a:tcPr marL="91440" marR="91440" marT="45720" marB="45720" anchor="ctr">
+                  <a:tcPr anchor="ctr">
                     <a:lnL w="6350" cap="flat" cmpd="sng" algn="ctr">
                       <a:solidFill>
                         <a:srgbClr val="DDD6C8"/>
@@ -5449,7 +5269,7 @@
                     <a:bodyPr/>
                     <a:lstStyle/>
                     <a:p>
-                      <a:pPr algn="l" indent="0" marL="0">
+                      <a:pPr marL="0" indent="0" algn="l">
                         <a:buNone/>
                       </a:pPr>
                       <a:r>
@@ -5470,7 +5290,7 @@
                       </a:endParaRPr>
                     </a:p>
                   </a:txBody>
-                  <a:tcPr marL="91440" marR="91440" marT="45720" marB="45720" anchor="ctr">
+                  <a:tcPr anchor="ctr">
                     <a:lnL w="6350" cap="flat" cmpd="sng" algn="ctr">
                       <a:solidFill>
                         <a:srgbClr val="DDD6C8"/>
@@ -5517,7 +5337,7 @@
                     <a:bodyPr/>
                     <a:lstStyle/>
                     <a:p>
-                      <a:pPr algn="l" indent="0" marL="0">
+                      <a:pPr marL="0" indent="0" algn="l">
                         <a:buNone/>
                       </a:pPr>
                       <a:r>
@@ -5538,7 +5358,7 @@
                       </a:endParaRPr>
                     </a:p>
                   </a:txBody>
-                  <a:tcPr marL="91440" marR="91440" marT="45720" marB="45720" anchor="ctr">
+                  <a:tcPr anchor="ctr">
                     <a:lnL w="6350" cap="flat" cmpd="sng" algn="ctr">
                       <a:solidFill>
                         <a:srgbClr val="DDD6C8"/>
@@ -5585,7 +5405,7 @@
                     <a:bodyPr/>
                     <a:lstStyle/>
                     <a:p>
-                      <a:pPr algn="l" indent="0" marL="0">
+                      <a:pPr marL="0" indent="0" algn="l">
                         <a:buNone/>
                       </a:pPr>
                       <a:r>
@@ -5606,7 +5426,7 @@
                       </a:endParaRPr>
                     </a:p>
                   </a:txBody>
-                  <a:tcPr marL="91440" marR="91440" marT="45720" marB="45720" anchor="ctr">
+                  <a:tcPr anchor="ctr">
                     <a:lnL w="6350" cap="flat" cmpd="sng" algn="ctr">
                       <a:solidFill>
                         <a:srgbClr val="DDD6C8"/>
@@ -5653,7 +5473,7 @@
                     <a:bodyPr/>
                     <a:lstStyle/>
                     <a:p>
-                      <a:pPr algn="l" indent="0" marL="0">
+                      <a:pPr marL="0" indent="0" algn="l">
                         <a:buNone/>
                       </a:pPr>
                       <a:r>
@@ -5674,7 +5494,7 @@
                       </a:endParaRPr>
                     </a:p>
                   </a:txBody>
-                  <a:tcPr marL="91440" marR="91440" marT="45720" marB="45720" anchor="ctr">
+                  <a:tcPr anchor="ctr">
                     <a:lnL w="6350" cap="flat" cmpd="sng" algn="ctr">
                       <a:solidFill>
                         <a:srgbClr val="DDD6C8"/>
@@ -5716,6 +5536,11 @@
                     </a:solidFill>
                   </a:tcPr>
                 </a:tc>
+                <a:extLst>
+                  <a:ext uri="{0D108BD9-81ED-4DB2-BD59-A6C34878D82A}">
+                    <a16:rowId xmlns:a16="http://schemas.microsoft.com/office/drawing/2014/main" val="10000"/>
+                  </a:ext>
+                </a:extLst>
               </a:tr>
               <a:tr h="487680">
                 <a:tc>
@@ -5723,7 +5548,7 @@
                     <a:bodyPr/>
                     <a:lstStyle/>
                     <a:p>
-                      <a:pPr algn="l" indent="0" marL="0">
+                      <a:pPr marL="0" indent="0" algn="l">
                         <a:buNone/>
                       </a:pPr>
                       <a:r>
@@ -5744,7 +5569,7 @@
                       </a:endParaRPr>
                     </a:p>
                   </a:txBody>
-                  <a:tcPr marL="91440" marR="91440" marT="45720" marB="45720" anchor="ctr">
+                  <a:tcPr anchor="ctr">
                     <a:lnL w="6350" cap="flat" cmpd="sng" algn="ctr">
                       <a:solidFill>
                         <a:srgbClr val="DDD6C8"/>
@@ -5791,7 +5616,7 @@
                     <a:bodyPr/>
                     <a:lstStyle/>
                     <a:p>
-                      <a:pPr algn="l" indent="0" marL="0">
+                      <a:pPr marL="0" indent="0" algn="l">
                         <a:buNone/>
                       </a:pPr>
                       <a:r>
@@ -5812,7 +5637,7 @@
                       </a:endParaRPr>
                     </a:p>
                   </a:txBody>
-                  <a:tcPr marL="91440" marR="91440" marT="45720" marB="45720" anchor="ctr">
+                  <a:tcPr anchor="ctr">
                     <a:lnL w="6350" cap="flat" cmpd="sng" algn="ctr">
                       <a:solidFill>
                         <a:srgbClr val="DDD6C8"/>
@@ -5859,7 +5684,7 @@
                     <a:bodyPr/>
                     <a:lstStyle/>
                     <a:p>
-                      <a:pPr algn="l" indent="0" marL="0">
+                      <a:pPr marL="0" indent="0" algn="l">
                         <a:buNone/>
                       </a:pPr>
                       <a:r>
@@ -5880,7 +5705,7 @@
                       </a:endParaRPr>
                     </a:p>
                   </a:txBody>
-                  <a:tcPr marL="91440" marR="91440" marT="45720" marB="45720" anchor="ctr">
+                  <a:tcPr anchor="ctr">
                     <a:lnL w="6350" cap="flat" cmpd="sng" algn="ctr">
                       <a:solidFill>
                         <a:srgbClr val="DDD6C8"/>
@@ -5927,7 +5752,7 @@
                     <a:bodyPr/>
                     <a:lstStyle/>
                     <a:p>
-                      <a:pPr algn="l" indent="0" marL="0">
+                      <a:pPr marL="0" indent="0" algn="l">
                         <a:buNone/>
                       </a:pPr>
                       <a:r>
@@ -5948,7 +5773,7 @@
                       </a:endParaRPr>
                     </a:p>
                   </a:txBody>
-                  <a:tcPr marL="91440" marR="91440" marT="45720" marB="45720" anchor="ctr">
+                  <a:tcPr anchor="ctr">
                     <a:lnL w="6350" cap="flat" cmpd="sng" algn="ctr">
                       <a:solidFill>
                         <a:srgbClr val="DDD6C8"/>
@@ -5995,7 +5820,7 @@
                     <a:bodyPr/>
                     <a:lstStyle/>
                     <a:p>
-                      <a:pPr algn="l" indent="0" marL="0">
+                      <a:pPr marL="0" indent="0" algn="l">
                         <a:buNone/>
                       </a:pPr>
                       <a:r>
@@ -6016,7 +5841,7 @@
                       </a:endParaRPr>
                     </a:p>
                   </a:txBody>
-                  <a:tcPr marL="91440" marR="91440" marT="45720" marB="45720" anchor="ctr">
+                  <a:tcPr anchor="ctr">
                     <a:lnL w="6350" cap="flat" cmpd="sng" algn="ctr">
                       <a:solidFill>
                         <a:srgbClr val="DDD6C8"/>
@@ -6058,6 +5883,11 @@
                     </a:solidFill>
                   </a:tcPr>
                 </a:tc>
+                <a:extLst>
+                  <a:ext uri="{0D108BD9-81ED-4DB2-BD59-A6C34878D82A}">
+                    <a16:rowId xmlns:a16="http://schemas.microsoft.com/office/drawing/2014/main" val="10001"/>
+                  </a:ext>
+                </a:extLst>
               </a:tr>
               <a:tr h="487680">
                 <a:tc>
@@ -6065,7 +5895,7 @@
                     <a:bodyPr/>
                     <a:lstStyle/>
                     <a:p>
-                      <a:pPr algn="l" indent="0" marL="0">
+                      <a:pPr marL="0" indent="0" algn="l">
                         <a:buNone/>
                       </a:pPr>
                       <a:r>
@@ -6086,7 +5916,7 @@
                       </a:endParaRPr>
                     </a:p>
                   </a:txBody>
-                  <a:tcPr marL="91440" marR="91440" marT="45720" marB="45720" anchor="ctr">
+                  <a:tcPr anchor="ctr">
                     <a:lnL w="6350" cap="flat" cmpd="sng" algn="ctr">
                       <a:solidFill>
                         <a:srgbClr val="DDD6C8"/>
@@ -6133,7 +5963,7 @@
                     <a:bodyPr/>
                     <a:lstStyle/>
                     <a:p>
-                      <a:pPr algn="l" indent="0" marL="0">
+                      <a:pPr marL="0" indent="0" algn="l">
                         <a:buNone/>
                       </a:pPr>
                       <a:r>
@@ -6154,7 +5984,7 @@
                       </a:endParaRPr>
                     </a:p>
                   </a:txBody>
-                  <a:tcPr marL="91440" marR="91440" marT="45720" marB="45720" anchor="ctr">
+                  <a:tcPr anchor="ctr">
                     <a:lnL w="6350" cap="flat" cmpd="sng" algn="ctr">
                       <a:solidFill>
                         <a:srgbClr val="DDD6C8"/>
@@ -6201,7 +6031,7 @@
                     <a:bodyPr/>
                     <a:lstStyle/>
                     <a:p>
-                      <a:pPr algn="l" indent="0" marL="0">
+                      <a:pPr marL="0" indent="0" algn="l">
                         <a:buNone/>
                       </a:pPr>
                       <a:r>
@@ -6222,7 +6052,7 @@
                       </a:endParaRPr>
                     </a:p>
                   </a:txBody>
-                  <a:tcPr marL="91440" marR="91440" marT="45720" marB="45720" anchor="ctr">
+                  <a:tcPr anchor="ctr">
                     <a:lnL w="6350" cap="flat" cmpd="sng" algn="ctr">
                       <a:solidFill>
                         <a:srgbClr val="DDD6C8"/>
@@ -6269,7 +6099,7 @@
                     <a:bodyPr/>
                     <a:lstStyle/>
                     <a:p>
-                      <a:pPr algn="l" indent="0" marL="0">
+                      <a:pPr marL="0" indent="0" algn="l">
                         <a:buNone/>
                       </a:pPr>
                       <a:r>
@@ -6290,7 +6120,7 @@
                       </a:endParaRPr>
                     </a:p>
                   </a:txBody>
-                  <a:tcPr marL="91440" marR="91440" marT="45720" marB="45720" anchor="ctr">
+                  <a:tcPr anchor="ctr">
                     <a:lnL w="6350" cap="flat" cmpd="sng" algn="ctr">
                       <a:solidFill>
                         <a:srgbClr val="DDD6C8"/>
@@ -6337,7 +6167,7 @@
                     <a:bodyPr/>
                     <a:lstStyle/>
                     <a:p>
-                      <a:pPr algn="l" indent="0" marL="0">
+                      <a:pPr marL="0" indent="0" algn="l">
                         <a:buNone/>
                       </a:pPr>
                       <a:r>
@@ -6358,7 +6188,7 @@
                       </a:endParaRPr>
                     </a:p>
                   </a:txBody>
-                  <a:tcPr marL="91440" marR="91440" marT="45720" marB="45720" anchor="ctr">
+                  <a:tcPr anchor="ctr">
                     <a:lnL w="6350" cap="flat" cmpd="sng" algn="ctr">
                       <a:solidFill>
                         <a:srgbClr val="DDD6C8"/>
@@ -6400,6 +6230,11 @@
                     </a:solidFill>
                   </a:tcPr>
                 </a:tc>
+                <a:extLst>
+                  <a:ext uri="{0D108BD9-81ED-4DB2-BD59-A6C34878D82A}">
+                    <a16:rowId xmlns:a16="http://schemas.microsoft.com/office/drawing/2014/main" val="10002"/>
+                  </a:ext>
+                </a:extLst>
               </a:tr>
               <a:tr h="487680">
                 <a:tc>
@@ -6407,7 +6242,7 @@
                     <a:bodyPr/>
                     <a:lstStyle/>
                     <a:p>
-                      <a:pPr algn="l" indent="0" marL="0">
+                      <a:pPr marL="0" indent="0" algn="l">
                         <a:buNone/>
                       </a:pPr>
                       <a:r>
@@ -6428,7 +6263,7 @@
                       </a:endParaRPr>
                     </a:p>
                   </a:txBody>
-                  <a:tcPr marL="91440" marR="91440" marT="45720" marB="45720" anchor="ctr">
+                  <a:tcPr anchor="ctr">
                     <a:lnL w="6350" cap="flat" cmpd="sng" algn="ctr">
                       <a:solidFill>
                         <a:srgbClr val="DDD6C8"/>
@@ -6475,7 +6310,7 @@
                     <a:bodyPr/>
                     <a:lstStyle/>
                     <a:p>
-                      <a:pPr algn="l" indent="0" marL="0">
+                      <a:pPr marL="0" indent="0" algn="l">
                         <a:buNone/>
                       </a:pPr>
                       <a:r>
@@ -6496,7 +6331,7 @@
                       </a:endParaRPr>
                     </a:p>
                   </a:txBody>
-                  <a:tcPr marL="91440" marR="91440" marT="45720" marB="45720" anchor="ctr">
+                  <a:tcPr anchor="ctr">
                     <a:lnL w="6350" cap="flat" cmpd="sng" algn="ctr">
                       <a:solidFill>
                         <a:srgbClr val="DDD6C8"/>
@@ -6543,7 +6378,7 @@
                     <a:bodyPr/>
                     <a:lstStyle/>
                     <a:p>
-                      <a:pPr algn="l" indent="0" marL="0">
+                      <a:pPr marL="0" indent="0" algn="l">
                         <a:buNone/>
                       </a:pPr>
                       <a:r>
@@ -6564,7 +6399,7 @@
                       </a:endParaRPr>
                     </a:p>
                   </a:txBody>
-                  <a:tcPr marL="91440" marR="91440" marT="45720" marB="45720" anchor="ctr">
+                  <a:tcPr anchor="ctr">
                     <a:lnL w="6350" cap="flat" cmpd="sng" algn="ctr">
                       <a:solidFill>
                         <a:srgbClr val="DDD6C8"/>
@@ -6611,7 +6446,7 @@
                     <a:bodyPr/>
                     <a:lstStyle/>
                     <a:p>
-                      <a:pPr algn="l" indent="0" marL="0">
+                      <a:pPr marL="0" indent="0" algn="l">
                         <a:buNone/>
                       </a:pPr>
                       <a:r>
@@ -6632,7 +6467,7 @@
                       </a:endParaRPr>
                     </a:p>
                   </a:txBody>
-                  <a:tcPr marL="91440" marR="91440" marT="45720" marB="45720" anchor="ctr">
+                  <a:tcPr anchor="ctr">
                     <a:lnL w="6350" cap="flat" cmpd="sng" algn="ctr">
                       <a:solidFill>
                         <a:srgbClr val="DDD6C8"/>
@@ -6679,7 +6514,7 @@
                     <a:bodyPr/>
                     <a:lstStyle/>
                     <a:p>
-                      <a:pPr algn="l" indent="0" marL="0">
+                      <a:pPr marL="0" indent="0" algn="l">
                         <a:buNone/>
                       </a:pPr>
                       <a:r>
@@ -6700,7 +6535,7 @@
                       </a:endParaRPr>
                     </a:p>
                   </a:txBody>
-                  <a:tcPr marL="91440" marR="91440" marT="45720" marB="45720" anchor="ctr">
+                  <a:tcPr anchor="ctr">
                     <a:lnL w="6350" cap="flat" cmpd="sng" algn="ctr">
                       <a:solidFill>
                         <a:srgbClr val="DDD6C8"/>
@@ -6742,6 +6577,11 @@
                     </a:solidFill>
                   </a:tcPr>
                 </a:tc>
+                <a:extLst>
+                  <a:ext uri="{0D108BD9-81ED-4DB2-BD59-A6C34878D82A}">
+                    <a16:rowId xmlns:a16="http://schemas.microsoft.com/office/drawing/2014/main" val="10003"/>
+                  </a:ext>
+                </a:extLst>
               </a:tr>
               <a:tr h="487680">
                 <a:tc>
@@ -6749,7 +6589,7 @@
                     <a:bodyPr/>
                     <a:lstStyle/>
                     <a:p>
-                      <a:pPr algn="l" indent="0" marL="0">
+                      <a:pPr marL="0" indent="0" algn="l">
                         <a:buNone/>
                       </a:pPr>
                       <a:r>
@@ -6770,7 +6610,7 @@
                       </a:endParaRPr>
                     </a:p>
                   </a:txBody>
-                  <a:tcPr marL="91440" marR="91440" marT="45720" marB="45720" anchor="ctr">
+                  <a:tcPr anchor="ctr">
                     <a:lnL w="6350" cap="flat" cmpd="sng" algn="ctr">
                       <a:solidFill>
                         <a:srgbClr val="DDD6C8"/>
@@ -6817,7 +6657,7 @@
                     <a:bodyPr/>
                     <a:lstStyle/>
                     <a:p>
-                      <a:pPr algn="l" indent="0" marL="0">
+                      <a:pPr marL="0" indent="0" algn="l">
                         <a:buNone/>
                       </a:pPr>
                       <a:r>
@@ -6838,7 +6678,7 @@
                       </a:endParaRPr>
                     </a:p>
                   </a:txBody>
-                  <a:tcPr marL="91440" marR="91440" marT="45720" marB="45720" anchor="ctr">
+                  <a:tcPr anchor="ctr">
                     <a:lnL w="6350" cap="flat" cmpd="sng" algn="ctr">
                       <a:solidFill>
                         <a:srgbClr val="DDD6C8"/>
@@ -6885,7 +6725,7 @@
                     <a:bodyPr/>
                     <a:lstStyle/>
                     <a:p>
-                      <a:pPr algn="l" indent="0" marL="0">
+                      <a:pPr marL="0" indent="0" algn="l">
                         <a:buNone/>
                       </a:pPr>
                       <a:r>
@@ -6906,7 +6746,7 @@
                       </a:endParaRPr>
                     </a:p>
                   </a:txBody>
-                  <a:tcPr marL="91440" marR="91440" marT="45720" marB="45720" anchor="ctr">
+                  <a:tcPr anchor="ctr">
                     <a:lnL w="6350" cap="flat" cmpd="sng" algn="ctr">
                       <a:solidFill>
                         <a:srgbClr val="DDD6C8"/>
@@ -6953,7 +6793,7 @@
                     <a:bodyPr/>
                     <a:lstStyle/>
                     <a:p>
-                      <a:pPr algn="l" indent="0" marL="0">
+                      <a:pPr marL="0" indent="0" algn="l">
                         <a:buNone/>
                       </a:pPr>
                       <a:r>
@@ -6974,7 +6814,7 @@
                       </a:endParaRPr>
                     </a:p>
                   </a:txBody>
-                  <a:tcPr marL="91440" marR="91440" marT="45720" marB="45720" anchor="ctr">
+                  <a:tcPr anchor="ctr">
                     <a:lnL w="6350" cap="flat" cmpd="sng" algn="ctr">
                       <a:solidFill>
                         <a:srgbClr val="DDD6C8"/>
@@ -7021,7 +6861,7 @@
                     <a:bodyPr/>
                     <a:lstStyle/>
                     <a:p>
-                      <a:pPr algn="l" indent="0" marL="0">
+                      <a:pPr marL="0" indent="0" algn="l">
                         <a:buNone/>
                       </a:pPr>
                       <a:r>
@@ -7042,7 +6882,7 @@
                       </a:endParaRPr>
                     </a:p>
                   </a:txBody>
-                  <a:tcPr marL="91440" marR="91440" marT="45720" marB="45720" anchor="ctr">
+                  <a:tcPr anchor="ctr">
                     <a:lnL w="6350" cap="flat" cmpd="sng" algn="ctr">
                       <a:solidFill>
                         <a:srgbClr val="DDD6C8"/>
@@ -7084,6 +6924,11 @@
                     </a:solidFill>
                   </a:tcPr>
                 </a:tc>
+                <a:extLst>
+                  <a:ext uri="{0D108BD9-81ED-4DB2-BD59-A6C34878D82A}">
+                    <a16:rowId xmlns:a16="http://schemas.microsoft.com/office/drawing/2014/main" val="10004"/>
+                  </a:ext>
+                </a:extLst>
               </a:tr>
               <a:tr h="487680">
                 <a:tc>
@@ -7091,7 +6936,7 @@
                     <a:bodyPr/>
                     <a:lstStyle/>
                     <a:p>
-                      <a:pPr algn="l" indent="0" marL="0">
+                      <a:pPr marL="0" indent="0" algn="l">
                         <a:buNone/>
                       </a:pPr>
                       <a:r>
@@ -7112,7 +6957,7 @@
                       </a:endParaRPr>
                     </a:p>
                   </a:txBody>
-                  <a:tcPr marL="91440" marR="91440" marT="45720" marB="45720" anchor="ctr">
+                  <a:tcPr anchor="ctr">
                     <a:lnL w="6350" cap="flat" cmpd="sng" algn="ctr">
                       <a:solidFill>
                         <a:srgbClr val="DDD6C8"/>
@@ -7159,7 +7004,7 @@
                     <a:bodyPr/>
                     <a:lstStyle/>
                     <a:p>
-                      <a:pPr algn="l" indent="0" marL="0">
+                      <a:pPr marL="0" indent="0" algn="l">
                         <a:buNone/>
                       </a:pPr>
                       <a:r>
@@ -7180,7 +7025,7 @@
                       </a:endParaRPr>
                     </a:p>
                   </a:txBody>
-                  <a:tcPr marL="91440" marR="91440" marT="45720" marB="45720" anchor="ctr">
+                  <a:tcPr anchor="ctr">
                     <a:lnL w="6350" cap="flat" cmpd="sng" algn="ctr">
                       <a:solidFill>
                         <a:srgbClr val="DDD6C8"/>
@@ -7227,7 +7072,7 @@
                     <a:bodyPr/>
                     <a:lstStyle/>
                     <a:p>
-                      <a:pPr algn="l" indent="0" marL="0">
+                      <a:pPr marL="0" indent="0" algn="l">
                         <a:buNone/>
                       </a:pPr>
                       <a:r>
@@ -7248,7 +7093,7 @@
                       </a:endParaRPr>
                     </a:p>
                   </a:txBody>
-                  <a:tcPr marL="91440" marR="91440" marT="45720" marB="45720" anchor="ctr">
+                  <a:tcPr anchor="ctr">
                     <a:lnL w="6350" cap="flat" cmpd="sng" algn="ctr">
                       <a:solidFill>
                         <a:srgbClr val="DDD6C8"/>
@@ -7295,7 +7140,7 @@
                     <a:bodyPr/>
                     <a:lstStyle/>
                     <a:p>
-                      <a:pPr algn="l" indent="0" marL="0">
+                      <a:pPr marL="0" indent="0" algn="l">
                         <a:buNone/>
                       </a:pPr>
                       <a:r>
@@ -7316,7 +7161,7 @@
                       </a:endParaRPr>
                     </a:p>
                   </a:txBody>
-                  <a:tcPr marL="91440" marR="91440" marT="45720" marB="45720" anchor="ctr">
+                  <a:tcPr anchor="ctr">
                     <a:lnL w="6350" cap="flat" cmpd="sng" algn="ctr">
                       <a:solidFill>
                         <a:srgbClr val="DDD6C8"/>
@@ -7363,7 +7208,7 @@
                     <a:bodyPr/>
                     <a:lstStyle/>
                     <a:p>
-                      <a:pPr algn="l" indent="0" marL="0">
+                      <a:pPr marL="0" indent="0" algn="l">
                         <a:buNone/>
                       </a:pPr>
                       <a:r>
@@ -7384,7 +7229,7 @@
                       </a:endParaRPr>
                     </a:p>
                   </a:txBody>
-                  <a:tcPr marL="91440" marR="91440" marT="45720" marB="45720" anchor="ctr">
+                  <a:tcPr anchor="ctr">
                     <a:lnL w="6350" cap="flat" cmpd="sng" algn="ctr">
                       <a:solidFill>
                         <a:srgbClr val="DDD6C8"/>
@@ -7426,6 +7271,11 @@
                     </a:solidFill>
                   </a:tcPr>
                 </a:tc>
+                <a:extLst>
+                  <a:ext uri="{0D108BD9-81ED-4DB2-BD59-A6C34878D82A}">
+                    <a16:rowId xmlns:a16="http://schemas.microsoft.com/office/drawing/2014/main" val="10005"/>
+                  </a:ext>
+                </a:extLst>
               </a:tr>
               <a:tr h="487680">
                 <a:tc>
@@ -7433,7 +7283,7 @@
                     <a:bodyPr/>
                     <a:lstStyle/>
                     <a:p>
-                      <a:pPr algn="l" indent="0" marL="0">
+                      <a:pPr marL="0" indent="0" algn="l">
                         <a:buNone/>
                       </a:pPr>
                       <a:r>
@@ -7454,7 +7304,7 @@
                       </a:endParaRPr>
                     </a:p>
                   </a:txBody>
-                  <a:tcPr marL="91440" marR="91440" marT="45720" marB="45720" anchor="ctr">
+                  <a:tcPr anchor="ctr">
                     <a:lnL w="6350" cap="flat" cmpd="sng" algn="ctr">
                       <a:solidFill>
                         <a:srgbClr val="DDD6C8"/>
@@ -7501,7 +7351,7 @@
                     <a:bodyPr/>
                     <a:lstStyle/>
                     <a:p>
-                      <a:pPr algn="l" indent="0" marL="0">
+                      <a:pPr marL="0" indent="0" algn="l">
                         <a:buNone/>
                       </a:pPr>
                       <a:r>
@@ -7522,7 +7372,7 @@
                       </a:endParaRPr>
                     </a:p>
                   </a:txBody>
-                  <a:tcPr marL="91440" marR="91440" marT="45720" marB="45720" anchor="ctr">
+                  <a:tcPr anchor="ctr">
                     <a:lnL w="6350" cap="flat" cmpd="sng" algn="ctr">
                       <a:solidFill>
                         <a:srgbClr val="DDD6C8"/>
@@ -7569,7 +7419,7 @@
                     <a:bodyPr/>
                     <a:lstStyle/>
                     <a:p>
-                      <a:pPr algn="l" indent="0" marL="0">
+                      <a:pPr marL="0" indent="0" algn="l">
                         <a:buNone/>
                       </a:pPr>
                       <a:r>
@@ -7590,7 +7440,7 @@
                       </a:endParaRPr>
                     </a:p>
                   </a:txBody>
-                  <a:tcPr marL="91440" marR="91440" marT="45720" marB="45720" anchor="ctr">
+                  <a:tcPr anchor="ctr">
                     <a:lnL w="6350" cap="flat" cmpd="sng" algn="ctr">
                       <a:solidFill>
                         <a:srgbClr val="DDD6C8"/>
@@ -7637,7 +7487,7 @@
                     <a:bodyPr/>
                     <a:lstStyle/>
                     <a:p>
-                      <a:pPr algn="l" indent="0" marL="0">
+                      <a:pPr marL="0" indent="0" algn="l">
                         <a:buNone/>
                       </a:pPr>
                       <a:r>
@@ -7658,7 +7508,7 @@
                       </a:endParaRPr>
                     </a:p>
                   </a:txBody>
-                  <a:tcPr marL="91440" marR="91440" marT="45720" marB="45720" anchor="ctr">
+                  <a:tcPr anchor="ctr">
                     <a:lnL w="6350" cap="flat" cmpd="sng" algn="ctr">
                       <a:solidFill>
                         <a:srgbClr val="DDD6C8"/>
@@ -7705,7 +7555,7 @@
                     <a:bodyPr/>
                     <a:lstStyle/>
                     <a:p>
-                      <a:pPr algn="l" indent="0" marL="0">
+                      <a:pPr marL="0" indent="0" algn="l">
                         <a:buNone/>
                       </a:pPr>
                       <a:r>
@@ -7726,7 +7576,7 @@
                       </a:endParaRPr>
                     </a:p>
                   </a:txBody>
-                  <a:tcPr marL="91440" marR="91440" marT="45720" marB="45720" anchor="ctr">
+                  <a:tcPr anchor="ctr">
                     <a:lnL w="6350" cap="flat" cmpd="sng" algn="ctr">
                       <a:solidFill>
                         <a:srgbClr val="DDD6C8"/>
@@ -7768,6 +7618,11 @@
                     </a:solidFill>
                   </a:tcPr>
                 </a:tc>
+                <a:extLst>
+                  <a:ext uri="{0D108BD9-81ED-4DB2-BD59-A6C34878D82A}">
+                    <a16:rowId xmlns:a16="http://schemas.microsoft.com/office/drawing/2014/main" val="10006"/>
+                  </a:ext>
+                </a:extLst>
               </a:tr>
               <a:tr h="487680">
                 <a:tc>
@@ -7775,7 +7630,7 @@
                     <a:bodyPr/>
                     <a:lstStyle/>
                     <a:p>
-                      <a:pPr algn="l" indent="0" marL="0">
+                      <a:pPr marL="0" indent="0" algn="l">
                         <a:buNone/>
                       </a:pPr>
                       <a:r>
@@ -7796,7 +7651,7 @@
                       </a:endParaRPr>
                     </a:p>
                   </a:txBody>
-                  <a:tcPr marL="91440" marR="91440" marT="45720" marB="45720" anchor="ctr">
+                  <a:tcPr anchor="ctr">
                     <a:lnL w="6350" cap="flat" cmpd="sng" algn="ctr">
                       <a:solidFill>
                         <a:srgbClr val="DDD6C8"/>
@@ -7843,7 +7698,7 @@
                     <a:bodyPr/>
                     <a:lstStyle/>
                     <a:p>
-                      <a:pPr algn="l" indent="0" marL="0">
+                      <a:pPr marL="0" indent="0" algn="l">
                         <a:buNone/>
                       </a:pPr>
                       <a:r>
@@ -7864,7 +7719,7 @@
                       </a:endParaRPr>
                     </a:p>
                   </a:txBody>
-                  <a:tcPr marL="91440" marR="91440" marT="45720" marB="45720" anchor="ctr">
+                  <a:tcPr anchor="ctr">
                     <a:lnL w="6350" cap="flat" cmpd="sng" algn="ctr">
                       <a:solidFill>
                         <a:srgbClr val="DDD6C8"/>
@@ -7911,7 +7766,7 @@
                     <a:bodyPr/>
                     <a:lstStyle/>
                     <a:p>
-                      <a:pPr algn="l" indent="0" marL="0">
+                      <a:pPr marL="0" indent="0" algn="l">
                         <a:buNone/>
                       </a:pPr>
                       <a:r>
@@ -7932,7 +7787,7 @@
                       </a:endParaRPr>
                     </a:p>
                   </a:txBody>
-                  <a:tcPr marL="91440" marR="91440" marT="45720" marB="45720" anchor="ctr">
+                  <a:tcPr anchor="ctr">
                     <a:lnL w="6350" cap="flat" cmpd="sng" algn="ctr">
                       <a:solidFill>
                         <a:srgbClr val="DDD6C8"/>
@@ -7979,7 +7834,7 @@
                     <a:bodyPr/>
                     <a:lstStyle/>
                     <a:p>
-                      <a:pPr algn="l" indent="0" marL="0">
+                      <a:pPr marL="0" indent="0" algn="l">
                         <a:buNone/>
                       </a:pPr>
                       <a:r>
@@ -8000,7 +7855,7 @@
                       </a:endParaRPr>
                     </a:p>
                   </a:txBody>
-                  <a:tcPr marL="91440" marR="91440" marT="45720" marB="45720" anchor="ctr">
+                  <a:tcPr anchor="ctr">
                     <a:lnL w="6350" cap="flat" cmpd="sng" algn="ctr">
                       <a:solidFill>
                         <a:srgbClr val="DDD6C8"/>
@@ -8047,7 +7902,7 @@
                     <a:bodyPr/>
                     <a:lstStyle/>
                     <a:p>
-                      <a:pPr algn="l" indent="0" marL="0">
+                      <a:pPr marL="0" indent="0" algn="l">
                         <a:buNone/>
                       </a:pPr>
                       <a:r>
@@ -8068,7 +7923,7 @@
                       </a:endParaRPr>
                     </a:p>
                   </a:txBody>
-                  <a:tcPr marL="91440" marR="91440" marT="45720" marB="45720" anchor="ctr">
+                  <a:tcPr anchor="ctr">
                     <a:lnL w="6350" cap="flat" cmpd="sng" algn="ctr">
                       <a:solidFill>
                         <a:srgbClr val="DDD6C8"/>
@@ -8110,6 +7965,11 @@
                     </a:solidFill>
                   </a:tcPr>
                 </a:tc>
+                <a:extLst>
+                  <a:ext uri="{0D108BD9-81ED-4DB2-BD59-A6C34878D82A}">
+                    <a16:rowId xmlns:a16="http://schemas.microsoft.com/office/drawing/2014/main" val="10007"/>
+                  </a:ext>
+                </a:extLst>
               </a:tr>
               <a:tr h="487680">
                 <a:tc>
@@ -8117,7 +7977,7 @@
                     <a:bodyPr/>
                     <a:lstStyle/>
                     <a:p>
-                      <a:pPr algn="l" indent="0" marL="0">
+                      <a:pPr marL="0" indent="0" algn="l">
                         <a:buNone/>
                       </a:pPr>
                       <a:r>
@@ -8138,7 +7998,7 @@
                       </a:endParaRPr>
                     </a:p>
                   </a:txBody>
-                  <a:tcPr marL="91440" marR="91440" marT="45720" marB="45720" anchor="ctr">
+                  <a:tcPr anchor="ctr">
                     <a:lnL w="6350" cap="flat" cmpd="sng" algn="ctr">
                       <a:solidFill>
                         <a:srgbClr val="DDD6C8"/>
@@ -8185,7 +8045,7 @@
                     <a:bodyPr/>
                     <a:lstStyle/>
                     <a:p>
-                      <a:pPr algn="l" indent="0" marL="0">
+                      <a:pPr marL="0" indent="0" algn="l">
                         <a:buNone/>
                       </a:pPr>
                       <a:r>
@@ -8206,7 +8066,7 @@
                       </a:endParaRPr>
                     </a:p>
                   </a:txBody>
-                  <a:tcPr marL="91440" marR="91440" marT="45720" marB="45720" anchor="ctr">
+                  <a:tcPr anchor="ctr">
                     <a:lnL w="6350" cap="flat" cmpd="sng" algn="ctr">
                       <a:solidFill>
                         <a:srgbClr val="DDD6C8"/>
@@ -8253,7 +8113,7 @@
                     <a:bodyPr/>
                     <a:lstStyle/>
                     <a:p>
-                      <a:pPr algn="l" indent="0" marL="0">
+                      <a:pPr marL="0" indent="0" algn="l">
                         <a:buNone/>
                       </a:pPr>
                       <a:r>
@@ -8274,7 +8134,7 @@
                       </a:endParaRPr>
                     </a:p>
                   </a:txBody>
-                  <a:tcPr marL="91440" marR="91440" marT="45720" marB="45720" anchor="ctr">
+                  <a:tcPr anchor="ctr">
                     <a:lnL w="6350" cap="flat" cmpd="sng" algn="ctr">
                       <a:solidFill>
                         <a:srgbClr val="DDD6C8"/>
@@ -8321,7 +8181,7 @@
                     <a:bodyPr/>
                     <a:lstStyle/>
                     <a:p>
-                      <a:pPr algn="l" indent="0" marL="0">
+                      <a:pPr marL="0" indent="0" algn="l">
                         <a:buNone/>
                       </a:pPr>
                       <a:r>
@@ -8342,7 +8202,7 @@
                       </a:endParaRPr>
                     </a:p>
                   </a:txBody>
-                  <a:tcPr marL="91440" marR="91440" marT="45720" marB="45720" anchor="ctr">
+                  <a:tcPr anchor="ctr">
                     <a:lnL w="6350" cap="flat" cmpd="sng" algn="ctr">
                       <a:solidFill>
                         <a:srgbClr val="DDD6C8"/>
@@ -8389,7 +8249,7 @@
                     <a:bodyPr/>
                     <a:lstStyle/>
                     <a:p>
-                      <a:pPr algn="l" indent="0" marL="0">
+                      <a:pPr marL="0" indent="0" algn="l">
                         <a:buNone/>
                       </a:pPr>
                       <a:r>
@@ -8410,7 +8270,7 @@
                       </a:endParaRPr>
                     </a:p>
                   </a:txBody>
-                  <a:tcPr marL="91440" marR="91440" marT="45720" marB="45720" anchor="ctr">
+                  <a:tcPr anchor="ctr">
                     <a:lnL w="6350" cap="flat" cmpd="sng" algn="ctr">
                       <a:solidFill>
                         <a:srgbClr val="DDD6C8"/>
@@ -8452,6 +8312,11 @@
                     </a:solidFill>
                   </a:tcPr>
                 </a:tc>
+                <a:extLst>
+                  <a:ext uri="{0D108BD9-81ED-4DB2-BD59-A6C34878D82A}">
+                    <a16:rowId xmlns:a16="http://schemas.microsoft.com/office/drawing/2014/main" val="10008"/>
+                  </a:ext>
+                </a:extLst>
               </a:tr>
             </a:tbl>
           </a:graphicData>
@@ -8478,7 +8343,7 @@
           <a:bodyPr wrap="square" lIns="0" tIns="0" rIns="0" bIns="0" rtlCol="0" anchor="ctr"/>
           <a:lstStyle/>
           <a:p>
-            <a:pPr indent="0" marL="0">
+            <a:pPr marL="0" indent="0">
               <a:buNone/>
             </a:pPr>
             <a:r>
@@ -8516,7 +8381,7 @@
           </a:prstGeom>
           <a:extLst>
             <a:ext uri="{C572A759-6A51-4108-AA02-DFA0A04FC94B}">
-              <ma14:wrappingTextBoxFlag xmlns:ma14="http://schemas.microsoft.com/office/mac/drawingml/2011/main" val="0"/>
+              <ma14:wrappingTextBoxFlag xmlns:ma14="http://schemas.microsoft.com/office/mac/drawingml/2011/main" xmlns="" val="0"/>
             </a:ext>
           </a:extLst>
         </p:spPr>
@@ -8537,7 +8402,7 @@
           <a:p>
             <a:pPr algn="l"/>
             <a:fld id="{F7021451-1387-4CA6-816F-3879F97B5CBC}" type="slidenum">
-              <a:rPr b="0" lang="en-US"/>
+              <a:rPr lang="en-US" b="0"/>
               <a:t>13</a:t>
             </a:fld>
             <a:endParaRPr lang="en-US"/>
@@ -8590,11 +8455,11 @@
           <a:bodyPr wrap="square" lIns="0" tIns="0" rIns="0" bIns="0" rtlCol="0" anchor="ctr"/>
           <a:lstStyle/>
           <a:p>
-            <a:pPr indent="0" marL="0">
-              <a:buNone/>
-            </a:pPr>
-            <a:r>
-              <a:rPr lang="en-US" sz="1200" spc="120" kern="0" dirty="0">
+            <a:pPr marL="0" indent="0">
+              <a:buNone/>
+            </a:pPr>
+            <a:r>
+              <a:rPr lang="en-US" sz="1200" kern="0" spc="120" dirty="0">
                 <a:solidFill>
                   <a:srgbClr val="8A5A10"/>
                 </a:solidFill>
@@ -8611,9 +8476,11 @@
       <p:sp>
         <p:nvSpPr>
           <p:cNvPr id="3" name="Text 0"/>
-          <p:cNvSpPr/>
+          <p:cNvSpPr>
+            <a:spLocks noGrp="1"/>
+          </p:cNvSpPr>
           <p:nvPr>
-            <p:ph idx="100" type="title" hasCustomPrompt="1"/>
+            <p:ph type="title" idx="100" hasCustomPrompt="1"/>
           </p:nvPr>
         </p:nvSpPr>
         <p:spPr>
@@ -8631,7 +8498,7 @@
           <a:bodyPr wrap="square" lIns="0" tIns="0" rIns="0" bIns="0" rtlCol="0" anchor="t"/>
           <a:lstStyle/>
           <a:p>
-            <a:pPr indent="0" marL="0">
+            <a:pPr marL="0" indent="0">
               <a:buNone/>
             </a:pPr>
             <a:r>
@@ -8670,6 +8537,13 @@
           </a:solidFill>
           <a:ln/>
         </p:spPr>
+        <p:txBody>
+          <a:bodyPr/>
+          <a:lstStyle/>
+          <a:p>
+            <a:endParaRPr lang="en-US"/>
+          </a:p>
+        </p:txBody>
       </p:sp>
       <p:sp>
         <p:nvSpPr>
@@ -8692,7 +8566,7 @@
           <a:bodyPr wrap="square" lIns="0" tIns="0" rIns="0" bIns="0" rtlCol="0" anchor="ctr"/>
           <a:lstStyle/>
           <a:p>
-            <a:pPr indent="0" marL="0">
+            <a:pPr marL="0" indent="0">
               <a:buNone/>
             </a:pPr>
             <a:r>
@@ -8731,7 +8605,7 @@
           <a:bodyPr wrap="square" lIns="0" tIns="0" rIns="0" bIns="0" rtlCol="0" anchor="ctr"/>
           <a:lstStyle/>
           <a:p>
-            <a:pPr indent="0" marL="0">
+            <a:pPr marL="0" indent="0">
               <a:buNone/>
             </a:pPr>
             <a:r>
@@ -8770,6 +8644,13 @@
           </a:solidFill>
           <a:ln/>
         </p:spPr>
+        <p:txBody>
+          <a:bodyPr/>
+          <a:lstStyle/>
+          <a:p>
+            <a:endParaRPr lang="en-US"/>
+          </a:p>
+        </p:txBody>
       </p:sp>
       <p:sp>
         <p:nvSpPr>
@@ -8792,7 +8673,7 @@
           <a:bodyPr wrap="square" lIns="0" tIns="0" rIns="0" bIns="0" rtlCol="0" anchor="ctr"/>
           <a:lstStyle/>
           <a:p>
-            <a:pPr indent="0" marL="0">
+            <a:pPr marL="0" indent="0">
               <a:buNone/>
             </a:pPr>
             <a:r>
@@ -8831,7 +8712,7 @@
           <a:bodyPr wrap="square" lIns="0" tIns="0" rIns="0" bIns="0" rtlCol="0" anchor="ctr"/>
           <a:lstStyle/>
           <a:p>
-            <a:pPr indent="0" marL="0">
+            <a:pPr marL="0" indent="0">
               <a:buNone/>
             </a:pPr>
             <a:r>
@@ -8870,6 +8751,13 @@
           </a:solidFill>
           <a:ln/>
         </p:spPr>
+        <p:txBody>
+          <a:bodyPr/>
+          <a:lstStyle/>
+          <a:p>
+            <a:endParaRPr lang="en-US"/>
+          </a:p>
+        </p:txBody>
       </p:sp>
       <p:sp>
         <p:nvSpPr>
@@ -8892,7 +8780,7 @@
           <a:bodyPr wrap="square" lIns="0" tIns="0" rIns="0" bIns="0" rtlCol="0" anchor="ctr"/>
           <a:lstStyle/>
           <a:p>
-            <a:pPr indent="0" marL="0">
+            <a:pPr marL="0" indent="0">
               <a:buNone/>
             </a:pPr>
             <a:r>
@@ -8931,7 +8819,7 @@
           <a:bodyPr wrap="square" lIns="0" tIns="0" rIns="0" bIns="0" rtlCol="0" anchor="ctr"/>
           <a:lstStyle/>
           <a:p>
-            <a:pPr indent="0" marL="0">
+            <a:pPr marL="0" indent="0">
               <a:buNone/>
             </a:pPr>
             <a:r>
@@ -8970,6 +8858,13 @@
           </a:solidFill>
           <a:ln/>
         </p:spPr>
+        <p:txBody>
+          <a:bodyPr/>
+          <a:lstStyle/>
+          <a:p>
+            <a:endParaRPr lang="en-US"/>
+          </a:p>
+        </p:txBody>
       </p:sp>
       <p:sp>
         <p:nvSpPr>
@@ -8992,7 +8887,7 @@
           <a:bodyPr wrap="square" lIns="0" tIns="0" rIns="0" bIns="0" rtlCol="0" anchor="ctr"/>
           <a:lstStyle/>
           <a:p>
-            <a:pPr indent="0" marL="0">
+            <a:pPr marL="0" indent="0">
               <a:buNone/>
             </a:pPr>
             <a:r>
@@ -9031,7 +8926,7 @@
           <a:bodyPr wrap="square" lIns="0" tIns="0" rIns="0" bIns="0" rtlCol="0" anchor="ctr"/>
           <a:lstStyle/>
           <a:p>
-            <a:pPr indent="0" marL="0">
+            <a:pPr marL="0" indent="0">
               <a:buNone/>
             </a:pPr>
             <a:r>
@@ -9051,7 +8946,7 @@
       </p:sp>
       <p:graphicFrame>
         <p:nvGraphicFramePr>
-          <p:cNvPr id="15" name="Table 0"/>
+          <p:cNvPr id="4" name="Table 0"/>
           <p:cNvGraphicFramePr>
             <a:graphicFrameLocks noGrp="1"/>
           </p:cNvGraphicFramePr>
@@ -9072,11 +8967,41 @@
             <a:tbl>
               <a:tblPr/>
               <a:tblGrid>
-                <a:gridCol w="3017520"/>
-                <a:gridCol w="2103120"/>
-                <a:gridCol w="2103120"/>
-                <a:gridCol w="2194560"/>
-                <a:gridCol w="1737360"/>
+                <a:gridCol w="3017520">
+                  <a:extLst>
+                    <a:ext uri="{9D8B030D-6E8A-4147-A177-3AD203B41FA5}">
+                      <a16:colId xmlns:a16="http://schemas.microsoft.com/office/drawing/2014/main" val="20000"/>
+                    </a:ext>
+                  </a:extLst>
+                </a:gridCol>
+                <a:gridCol w="2103120">
+                  <a:extLst>
+                    <a:ext uri="{9D8B030D-6E8A-4147-A177-3AD203B41FA5}">
+                      <a16:colId xmlns:a16="http://schemas.microsoft.com/office/drawing/2014/main" val="20001"/>
+                    </a:ext>
+                  </a:extLst>
+                </a:gridCol>
+                <a:gridCol w="2103120">
+                  <a:extLst>
+                    <a:ext uri="{9D8B030D-6E8A-4147-A177-3AD203B41FA5}">
+                      <a16:colId xmlns:a16="http://schemas.microsoft.com/office/drawing/2014/main" val="20002"/>
+                    </a:ext>
+                  </a:extLst>
+                </a:gridCol>
+                <a:gridCol w="2194560">
+                  <a:extLst>
+                    <a:ext uri="{9D8B030D-6E8A-4147-A177-3AD203B41FA5}">
+                      <a16:colId xmlns:a16="http://schemas.microsoft.com/office/drawing/2014/main" val="20003"/>
+                    </a:ext>
+                  </a:extLst>
+                </a:gridCol>
+                <a:gridCol w="1737360">
+                  <a:extLst>
+                    <a:ext uri="{9D8B030D-6E8A-4147-A177-3AD203B41FA5}">
+                      <a16:colId xmlns:a16="http://schemas.microsoft.com/office/drawing/2014/main" val="20004"/>
+                    </a:ext>
+                  </a:extLst>
+                </a:gridCol>
               </a:tblGrid>
               <a:tr h="563880">
                 <a:tc>
@@ -9084,7 +9009,7 @@
                     <a:bodyPr/>
                     <a:lstStyle/>
                     <a:p>
-                      <a:pPr indent="0" marL="0">
+                      <a:pPr marL="0" indent="0">
                         <a:buNone/>
                       </a:pPr>
                       <a:r>
@@ -9105,7 +9030,7 @@
                       </a:endParaRPr>
                     </a:p>
                   </a:txBody>
-                  <a:tcPr marL="91440" marR="91440" marT="45720" marB="45720" anchor="ctr">
+                  <a:tcPr anchor="ctr">
                     <a:lnL w="6350" cap="flat" cmpd="sng" algn="ctr">
                       <a:solidFill>
                         <a:srgbClr val="DDD6C8"/>
@@ -9152,7 +9077,7 @@
                     <a:bodyPr/>
                     <a:lstStyle/>
                     <a:p>
-                      <a:pPr indent="0" marL="0">
+                      <a:pPr marL="0" indent="0">
                         <a:buNone/>
                       </a:pPr>
                       <a:r>
@@ -9173,7 +9098,7 @@
                       </a:endParaRPr>
                     </a:p>
                   </a:txBody>
-                  <a:tcPr marL="91440" marR="91440" marT="45720" marB="45720" anchor="ctr">
+                  <a:tcPr anchor="ctr">
                     <a:lnL w="6350" cap="flat" cmpd="sng" algn="ctr">
                       <a:solidFill>
                         <a:srgbClr val="DDD6C8"/>
@@ -9220,7 +9145,7 @@
                     <a:bodyPr/>
                     <a:lstStyle/>
                     <a:p>
-                      <a:pPr indent="0" marL="0">
+                      <a:pPr marL="0" indent="0">
                         <a:buNone/>
                       </a:pPr>
                       <a:r>
@@ -9241,7 +9166,7 @@
                       </a:endParaRPr>
                     </a:p>
                   </a:txBody>
-                  <a:tcPr marL="91440" marR="91440" marT="45720" marB="45720" anchor="ctr">
+                  <a:tcPr anchor="ctr">
                     <a:lnL w="6350" cap="flat" cmpd="sng" algn="ctr">
                       <a:solidFill>
                         <a:srgbClr val="DDD6C8"/>
@@ -9288,7 +9213,7 @@
                     <a:bodyPr/>
                     <a:lstStyle/>
                     <a:p>
-                      <a:pPr indent="0" marL="0">
+                      <a:pPr marL="0" indent="0">
                         <a:buNone/>
                       </a:pPr>
                       <a:r>
@@ -9309,7 +9234,7 @@
                       </a:endParaRPr>
                     </a:p>
                   </a:txBody>
-                  <a:tcPr marL="91440" marR="91440" marT="45720" marB="45720" anchor="ctr">
+                  <a:tcPr anchor="ctr">
                     <a:lnL w="6350" cap="flat" cmpd="sng" algn="ctr">
                       <a:solidFill>
                         <a:srgbClr val="DDD6C8"/>
@@ -9356,7 +9281,7 @@
                     <a:bodyPr/>
                     <a:lstStyle/>
                     <a:p>
-                      <a:pPr indent="0" marL="0">
+                      <a:pPr marL="0" indent="0">
                         <a:buNone/>
                       </a:pPr>
                       <a:r>
@@ -9377,7 +9302,7 @@
                       </a:endParaRPr>
                     </a:p>
                   </a:txBody>
-                  <a:tcPr marL="91440" marR="91440" marT="45720" marB="45720" anchor="ctr">
+                  <a:tcPr anchor="ctr">
                     <a:lnL w="6350" cap="flat" cmpd="sng" algn="ctr">
                       <a:solidFill>
                         <a:srgbClr val="DDD6C8"/>
@@ -9419,6 +9344,11 @@
                     </a:solidFill>
                   </a:tcPr>
                 </a:tc>
+                <a:extLst>
+                  <a:ext uri="{0D108BD9-81ED-4DB2-BD59-A6C34878D82A}">
+                    <a16:rowId xmlns:a16="http://schemas.microsoft.com/office/drawing/2014/main" val="10000"/>
+                  </a:ext>
+                </a:extLst>
               </a:tr>
               <a:tr h="563880">
                 <a:tc>
@@ -9426,7 +9356,7 @@
                     <a:bodyPr/>
                     <a:lstStyle/>
                     <a:p>
-                      <a:pPr indent="0" marL="0">
+                      <a:pPr marL="0" indent="0">
                         <a:buNone/>
                       </a:pPr>
                       <a:r>
@@ -9447,7 +9377,7 @@
                       </a:endParaRPr>
                     </a:p>
                   </a:txBody>
-                  <a:tcPr marL="91440" marR="91440" marT="45720" marB="45720" anchor="ctr">
+                  <a:tcPr anchor="ctr">
                     <a:lnL w="6350" cap="flat" cmpd="sng" algn="ctr">
                       <a:solidFill>
                         <a:srgbClr val="DDD6C8"/>
@@ -9494,7 +9424,7 @@
                     <a:bodyPr/>
                     <a:lstStyle/>
                     <a:p>
-                      <a:pPr indent="0" marL="0">
+                      <a:pPr marL="0" indent="0">
                         <a:buNone/>
                       </a:pPr>
                       <a:r>
@@ -9515,7 +9445,7 @@
                       </a:endParaRPr>
                     </a:p>
                   </a:txBody>
-                  <a:tcPr marL="91440" marR="91440" marT="45720" marB="45720" anchor="ctr">
+                  <a:tcPr anchor="ctr">
                     <a:lnL w="6350" cap="flat" cmpd="sng" algn="ctr">
                       <a:solidFill>
                         <a:srgbClr val="DDD6C8"/>
@@ -9562,7 +9492,7 @@
                     <a:bodyPr/>
                     <a:lstStyle/>
                     <a:p>
-                      <a:pPr indent="0" marL="0">
+                      <a:pPr marL="0" indent="0">
                         <a:buNone/>
                       </a:pPr>
                       <a:r>
@@ -9583,7 +9513,7 @@
                       </a:endParaRPr>
                     </a:p>
                   </a:txBody>
-                  <a:tcPr marL="91440" marR="91440" marT="45720" marB="45720" anchor="ctr">
+                  <a:tcPr anchor="ctr">
                     <a:lnL w="6350" cap="flat" cmpd="sng" algn="ctr">
                       <a:solidFill>
                         <a:srgbClr val="DDD6C8"/>
@@ -9630,7 +9560,7 @@
                     <a:bodyPr/>
                     <a:lstStyle/>
                     <a:p>
-                      <a:pPr indent="0" marL="0">
+                      <a:pPr marL="0" indent="0">
                         <a:buNone/>
                       </a:pPr>
                       <a:r>
@@ -9651,7 +9581,7 @@
                       </a:endParaRPr>
                     </a:p>
                   </a:txBody>
-                  <a:tcPr marL="91440" marR="91440" marT="45720" marB="45720" anchor="ctr">
+                  <a:tcPr anchor="ctr">
                     <a:lnL w="6350" cap="flat" cmpd="sng" algn="ctr">
                       <a:solidFill>
                         <a:srgbClr val="DDD6C8"/>
@@ -9698,7 +9628,7 @@
                     <a:bodyPr/>
                     <a:lstStyle/>
                     <a:p>
-                      <a:pPr indent="0" marL="0">
+                      <a:pPr marL="0" indent="0">
                         <a:buNone/>
                       </a:pPr>
                       <a:r>
@@ -9719,7 +9649,7 @@
                       </a:endParaRPr>
                     </a:p>
                   </a:txBody>
-                  <a:tcPr marL="91440" marR="91440" marT="45720" marB="45720" anchor="ctr">
+                  <a:tcPr anchor="ctr">
                     <a:lnL w="6350" cap="flat" cmpd="sng" algn="ctr">
                       <a:solidFill>
                         <a:srgbClr val="DDD6C8"/>
@@ -9761,6 +9691,11 @@
                     </a:solidFill>
                   </a:tcPr>
                 </a:tc>
+                <a:extLst>
+                  <a:ext uri="{0D108BD9-81ED-4DB2-BD59-A6C34878D82A}">
+                    <a16:rowId xmlns:a16="http://schemas.microsoft.com/office/drawing/2014/main" val="10001"/>
+                  </a:ext>
+                </a:extLst>
               </a:tr>
               <a:tr h="563880">
                 <a:tc>
@@ -9768,7 +9703,7 @@
                     <a:bodyPr/>
                     <a:lstStyle/>
                     <a:p>
-                      <a:pPr indent="0" marL="0">
+                      <a:pPr marL="0" indent="0">
                         <a:buNone/>
                       </a:pPr>
                       <a:r>
@@ -9789,7 +9724,7 @@
                       </a:endParaRPr>
                     </a:p>
                   </a:txBody>
-                  <a:tcPr marL="91440" marR="91440" marT="45720" marB="45720" anchor="ctr">
+                  <a:tcPr anchor="ctr">
                     <a:lnL w="6350" cap="flat" cmpd="sng" algn="ctr">
                       <a:solidFill>
                         <a:srgbClr val="DDD6C8"/>
@@ -9836,7 +9771,7 @@
                     <a:bodyPr/>
                     <a:lstStyle/>
                     <a:p>
-                      <a:pPr indent="0" marL="0">
+                      <a:pPr marL="0" indent="0">
                         <a:buNone/>
                       </a:pPr>
                       <a:r>
@@ -9857,7 +9792,7 @@
                       </a:endParaRPr>
                     </a:p>
                   </a:txBody>
-                  <a:tcPr marL="91440" marR="91440" marT="45720" marB="45720" anchor="ctr">
+                  <a:tcPr anchor="ctr">
                     <a:lnL w="6350" cap="flat" cmpd="sng" algn="ctr">
                       <a:solidFill>
                         <a:srgbClr val="DDD6C8"/>
@@ -9904,7 +9839,7 @@
                     <a:bodyPr/>
                     <a:lstStyle/>
                     <a:p>
-                      <a:pPr indent="0" marL="0">
+                      <a:pPr marL="0" indent="0">
                         <a:buNone/>
                       </a:pPr>
                       <a:r>
@@ -9925,7 +9860,7 @@
                       </a:endParaRPr>
                     </a:p>
                   </a:txBody>
-                  <a:tcPr marL="91440" marR="91440" marT="45720" marB="45720" anchor="ctr">
+                  <a:tcPr anchor="ctr">
                     <a:lnL w="6350" cap="flat" cmpd="sng" algn="ctr">
                       <a:solidFill>
                         <a:srgbClr val="DDD6C8"/>
@@ -9972,7 +9907,7 @@
                     <a:bodyPr/>
                     <a:lstStyle/>
                     <a:p>
-                      <a:pPr indent="0" marL="0">
+                      <a:pPr marL="0" indent="0">
                         <a:buNone/>
                       </a:pPr>
                       <a:r>
@@ -9993,7 +9928,7 @@
                       </a:endParaRPr>
                     </a:p>
                   </a:txBody>
-                  <a:tcPr marL="91440" marR="91440" marT="45720" marB="45720" anchor="ctr">
+                  <a:tcPr anchor="ctr">
                     <a:lnL w="6350" cap="flat" cmpd="sng" algn="ctr">
                       <a:solidFill>
                         <a:srgbClr val="DDD6C8"/>
@@ -10040,7 +9975,7 @@
                     <a:bodyPr/>
                     <a:lstStyle/>
                     <a:p>
-                      <a:pPr indent="0" marL="0">
+                      <a:pPr marL="0" indent="0">
                         <a:buNone/>
                       </a:pPr>
                       <a:r>
@@ -10061,7 +9996,7 @@
                       </a:endParaRPr>
                     </a:p>
                   </a:txBody>
-                  <a:tcPr marL="91440" marR="91440" marT="45720" marB="45720" anchor="ctr">
+                  <a:tcPr anchor="ctr">
                     <a:lnL w="6350" cap="flat" cmpd="sng" algn="ctr">
                       <a:solidFill>
                         <a:srgbClr val="DDD6C8"/>
@@ -10103,6 +10038,11 @@
                     </a:solidFill>
                   </a:tcPr>
                 </a:tc>
+                <a:extLst>
+                  <a:ext uri="{0D108BD9-81ED-4DB2-BD59-A6C34878D82A}">
+                    <a16:rowId xmlns:a16="http://schemas.microsoft.com/office/drawing/2014/main" val="10002"/>
+                  </a:ext>
+                </a:extLst>
               </a:tr>
               <a:tr h="563880">
                 <a:tc>
@@ -10110,7 +10050,7 @@
                     <a:bodyPr/>
                     <a:lstStyle/>
                     <a:p>
-                      <a:pPr indent="0" marL="0">
+                      <a:pPr marL="0" indent="0">
                         <a:buNone/>
                       </a:pPr>
                       <a:r>
@@ -10131,7 +10071,7 @@
                       </a:endParaRPr>
                     </a:p>
                   </a:txBody>
-                  <a:tcPr marL="91440" marR="91440" marT="45720" marB="45720" anchor="ctr">
+                  <a:tcPr anchor="ctr">
                     <a:lnL w="6350" cap="flat" cmpd="sng" algn="ctr">
                       <a:solidFill>
                         <a:srgbClr val="DDD6C8"/>
@@ -10178,7 +10118,7 @@
                     <a:bodyPr/>
                     <a:lstStyle/>
                     <a:p>
-                      <a:pPr indent="0" marL="0">
+                      <a:pPr marL="0" indent="0">
                         <a:buNone/>
                       </a:pPr>
                       <a:r>
@@ -10199,7 +10139,7 @@
                       </a:endParaRPr>
                     </a:p>
                   </a:txBody>
-                  <a:tcPr marL="91440" marR="91440" marT="45720" marB="45720" anchor="ctr">
+                  <a:tcPr anchor="ctr">
                     <a:lnL w="6350" cap="flat" cmpd="sng" algn="ctr">
                       <a:solidFill>
                         <a:srgbClr val="DDD6C8"/>
@@ -10246,7 +10186,7 @@
                     <a:bodyPr/>
                     <a:lstStyle/>
                     <a:p>
-                      <a:pPr indent="0" marL="0">
+                      <a:pPr marL="0" indent="0">
                         <a:buNone/>
                       </a:pPr>
                       <a:r>
@@ -10267,7 +10207,7 @@
                       </a:endParaRPr>
                     </a:p>
                   </a:txBody>
-                  <a:tcPr marL="91440" marR="91440" marT="45720" marB="45720" anchor="ctr">
+                  <a:tcPr anchor="ctr">
                     <a:lnL w="6350" cap="flat" cmpd="sng" algn="ctr">
                       <a:solidFill>
                         <a:srgbClr val="DDD6C8"/>
@@ -10314,7 +10254,7 @@
                     <a:bodyPr/>
                     <a:lstStyle/>
                     <a:p>
-                      <a:pPr indent="0" marL="0">
+                      <a:pPr marL="0" indent="0">
                         <a:buNone/>
                       </a:pPr>
                       <a:r>
@@ -10335,7 +10275,7 @@
                       </a:endParaRPr>
                     </a:p>
                   </a:txBody>
-                  <a:tcPr marL="91440" marR="91440" marT="45720" marB="45720" anchor="ctr">
+                  <a:tcPr anchor="ctr">
                     <a:lnL w="6350" cap="flat" cmpd="sng" algn="ctr">
                       <a:solidFill>
                         <a:srgbClr val="DDD6C8"/>
@@ -10382,7 +10322,7 @@
                     <a:bodyPr/>
                     <a:lstStyle/>
                     <a:p>
-                      <a:pPr indent="0" marL="0">
+                      <a:pPr marL="0" indent="0">
                         <a:buNone/>
                       </a:pPr>
                       <a:r>
@@ -10403,7 +10343,7 @@
                       </a:endParaRPr>
                     </a:p>
                   </a:txBody>
-                  <a:tcPr marL="91440" marR="91440" marT="45720" marB="45720" anchor="ctr">
+                  <a:tcPr anchor="ctr">
                     <a:lnL w="6350" cap="flat" cmpd="sng" algn="ctr">
                       <a:solidFill>
                         <a:srgbClr val="DDD6C8"/>
@@ -10445,6 +10385,11 @@
                     </a:solidFill>
                   </a:tcPr>
                 </a:tc>
+                <a:extLst>
+                  <a:ext uri="{0D108BD9-81ED-4DB2-BD59-A6C34878D82A}">
+                    <a16:rowId xmlns:a16="http://schemas.microsoft.com/office/drawing/2014/main" val="10003"/>
+                  </a:ext>
+                </a:extLst>
               </a:tr>
               <a:tr h="563880">
                 <a:tc>
@@ -10452,7 +10397,7 @@
                     <a:bodyPr/>
                     <a:lstStyle/>
                     <a:p>
-                      <a:pPr indent="0" marL="0">
+                      <a:pPr marL="0" indent="0">
                         <a:buNone/>
                       </a:pPr>
                       <a:r>
@@ -10473,7 +10418,7 @@
                       </a:endParaRPr>
                     </a:p>
                   </a:txBody>
-                  <a:tcPr marL="91440" marR="91440" marT="45720" marB="45720" anchor="ctr">
+                  <a:tcPr anchor="ctr">
                     <a:lnL w="6350" cap="flat" cmpd="sng" algn="ctr">
                       <a:solidFill>
                         <a:srgbClr val="DDD6C8"/>
@@ -10520,7 +10465,7 @@
                     <a:bodyPr/>
                     <a:lstStyle/>
                     <a:p>
-                      <a:pPr indent="0" marL="0">
+                      <a:pPr marL="0" indent="0">
                         <a:buNone/>
                       </a:pPr>
                       <a:r>
@@ -10541,7 +10486,7 @@
                       </a:endParaRPr>
                     </a:p>
                   </a:txBody>
-                  <a:tcPr marL="91440" marR="91440" marT="45720" marB="45720" anchor="ctr">
+                  <a:tcPr anchor="ctr">
                     <a:lnL w="6350" cap="flat" cmpd="sng" algn="ctr">
                       <a:solidFill>
                         <a:srgbClr val="DDD6C8"/>
@@ -10588,7 +10533,7 @@
                     <a:bodyPr/>
                     <a:lstStyle/>
                     <a:p>
-                      <a:pPr indent="0" marL="0">
+                      <a:pPr marL="0" indent="0">
                         <a:buNone/>
                       </a:pPr>
                       <a:r>
@@ -10609,7 +10554,7 @@
                       </a:endParaRPr>
                     </a:p>
                   </a:txBody>
-                  <a:tcPr marL="91440" marR="91440" marT="45720" marB="45720" anchor="ctr">
+                  <a:tcPr anchor="ctr">
                     <a:lnL w="6350" cap="flat" cmpd="sng" algn="ctr">
                       <a:solidFill>
                         <a:srgbClr val="DDD6C8"/>
@@ -10656,7 +10601,7 @@
                     <a:bodyPr/>
                     <a:lstStyle/>
                     <a:p>
-                      <a:pPr indent="0" marL="0">
+                      <a:pPr marL="0" indent="0">
                         <a:buNone/>
                       </a:pPr>
                       <a:r>
@@ -10677,7 +10622,7 @@
                       </a:endParaRPr>
                     </a:p>
                   </a:txBody>
-                  <a:tcPr marL="91440" marR="91440" marT="45720" marB="45720" anchor="ctr">
+                  <a:tcPr anchor="ctr">
                     <a:lnL w="6350" cap="flat" cmpd="sng" algn="ctr">
                       <a:solidFill>
                         <a:srgbClr val="DDD6C8"/>
@@ -10724,7 +10669,7 @@
                     <a:bodyPr/>
                     <a:lstStyle/>
                     <a:p>
-                      <a:pPr indent="0" marL="0">
+                      <a:pPr marL="0" indent="0">
                         <a:buNone/>
                       </a:pPr>
                       <a:r>
@@ -10745,7 +10690,7 @@
                       </a:endParaRPr>
                     </a:p>
                   </a:txBody>
-                  <a:tcPr marL="91440" marR="91440" marT="45720" marB="45720" anchor="ctr">
+                  <a:tcPr anchor="ctr">
                     <a:lnL w="6350" cap="flat" cmpd="sng" algn="ctr">
                       <a:solidFill>
                         <a:srgbClr val="DDD6C8"/>
@@ -10787,6 +10732,11 @@
                     </a:solidFill>
                   </a:tcPr>
                 </a:tc>
+                <a:extLst>
+                  <a:ext uri="{0D108BD9-81ED-4DB2-BD59-A6C34878D82A}">
+                    <a16:rowId xmlns:a16="http://schemas.microsoft.com/office/drawing/2014/main" val="10004"/>
+                  </a:ext>
+                </a:extLst>
               </a:tr>
               <a:tr h="563880">
                 <a:tc>
@@ -10794,7 +10744,7 @@
                     <a:bodyPr/>
                     <a:lstStyle/>
                     <a:p>
-                      <a:pPr indent="0" marL="0">
+                      <a:pPr marL="0" indent="0">
                         <a:buNone/>
                       </a:pPr>
                       <a:r>
@@ -10815,7 +10765,7 @@
                       </a:endParaRPr>
                     </a:p>
                   </a:txBody>
-                  <a:tcPr marL="91440" marR="91440" marT="45720" marB="45720" anchor="ctr">
+                  <a:tcPr anchor="ctr">
                     <a:lnL w="6350" cap="flat" cmpd="sng" algn="ctr">
                       <a:solidFill>
                         <a:srgbClr val="DDD6C8"/>
@@ -10862,7 +10812,7 @@
                     <a:bodyPr/>
                     <a:lstStyle/>
                     <a:p>
-                      <a:pPr indent="0" marL="0">
+                      <a:pPr marL="0" indent="0">
                         <a:buNone/>
                       </a:pPr>
                       <a:r>
@@ -10883,7 +10833,7 @@
                       </a:endParaRPr>
                     </a:p>
                   </a:txBody>
-                  <a:tcPr marL="91440" marR="91440" marT="45720" marB="45720" anchor="ctr">
+                  <a:tcPr anchor="ctr">
                     <a:lnL w="6350" cap="flat" cmpd="sng" algn="ctr">
                       <a:solidFill>
                         <a:srgbClr val="DDD6C8"/>
@@ -10930,7 +10880,7 @@
                     <a:bodyPr/>
                     <a:lstStyle/>
                     <a:p>
-                      <a:pPr indent="0" marL="0">
+                      <a:pPr marL="0" indent="0">
                         <a:buNone/>
                       </a:pPr>
                       <a:r>
@@ -10951,7 +10901,7 @@
                       </a:endParaRPr>
                     </a:p>
                   </a:txBody>
-                  <a:tcPr marL="91440" marR="91440" marT="45720" marB="45720" anchor="ctr">
+                  <a:tcPr anchor="ctr">
                     <a:lnL w="6350" cap="flat" cmpd="sng" algn="ctr">
                       <a:solidFill>
                         <a:srgbClr val="DDD6C8"/>
@@ -10998,7 +10948,7 @@
                     <a:bodyPr/>
                     <a:lstStyle/>
                     <a:p>
-                      <a:pPr indent="0" marL="0">
+                      <a:pPr marL="0" indent="0">
                         <a:buNone/>
                       </a:pPr>
                       <a:r>
@@ -11019,7 +10969,7 @@
                       </a:endParaRPr>
                     </a:p>
                   </a:txBody>
-                  <a:tcPr marL="91440" marR="91440" marT="45720" marB="45720" anchor="ctr">
+                  <a:tcPr anchor="ctr">
                     <a:lnL w="6350" cap="flat" cmpd="sng" algn="ctr">
                       <a:solidFill>
                         <a:srgbClr val="DDD6C8"/>
@@ -11066,7 +11016,7 @@
                     <a:bodyPr/>
                     <a:lstStyle/>
                     <a:p>
-                      <a:pPr indent="0" marL="0">
+                      <a:pPr marL="0" indent="0">
                         <a:buNone/>
                       </a:pPr>
                       <a:r>
@@ -11087,7 +11037,7 @@
                       </a:endParaRPr>
                     </a:p>
                   </a:txBody>
-                  <a:tcPr marL="91440" marR="91440" marT="45720" marB="45720" anchor="ctr">
+                  <a:tcPr anchor="ctr">
                     <a:lnL w="6350" cap="flat" cmpd="sng" algn="ctr">
                       <a:solidFill>
                         <a:srgbClr val="DDD6C8"/>
@@ -11129,6 +11079,11 @@
                     </a:solidFill>
                   </a:tcPr>
                 </a:tc>
+                <a:extLst>
+                  <a:ext uri="{0D108BD9-81ED-4DB2-BD59-A6C34878D82A}">
+                    <a16:rowId xmlns:a16="http://schemas.microsoft.com/office/drawing/2014/main" val="10005"/>
+                  </a:ext>
+                </a:extLst>
               </a:tr>
             </a:tbl>
           </a:graphicData>
@@ -11155,7 +11110,7 @@
           <a:bodyPr wrap="square" lIns="0" tIns="0" rIns="0" bIns="0" rtlCol="0" anchor="ctr"/>
           <a:lstStyle/>
           <a:p>
-            <a:pPr indent="0" marL="0">
+            <a:pPr marL="0" indent="0">
               <a:buNone/>
             </a:pPr>
             <a:r>
@@ -11193,7 +11148,7 @@
           </a:prstGeom>
           <a:extLst>
             <a:ext uri="{C572A759-6A51-4108-AA02-DFA0A04FC94B}">
-              <ma14:wrappingTextBoxFlag xmlns:ma14="http://schemas.microsoft.com/office/mac/drawingml/2011/main" val="0"/>
+              <ma14:wrappingTextBoxFlag xmlns:ma14="http://schemas.microsoft.com/office/mac/drawingml/2011/main" xmlns="" val="0"/>
             </a:ext>
           </a:extLst>
         </p:spPr>
@@ -11214,7 +11169,7 @@
           <a:p>
             <a:pPr algn="l"/>
             <a:fld id="{F7021451-1387-4CA6-816F-3879F97B5CBC}" type="slidenum">
-              <a:rPr b="0" lang="en-US"/>
+              <a:rPr lang="en-US" b="0"/>
               <a:t>14</a:t>
             </a:fld>
             <a:endParaRPr lang="en-US"/>
@@ -11267,11 +11222,11 @@
           <a:bodyPr wrap="square" lIns="0" tIns="0" rIns="0" bIns="0" rtlCol="0" anchor="ctr"/>
           <a:lstStyle/>
           <a:p>
-            <a:pPr indent="0" marL="0">
-              <a:buNone/>
-            </a:pPr>
-            <a:r>
-              <a:rPr lang="en-US" sz="1200" spc="120" kern="0" dirty="0">
+            <a:pPr marL="0" indent="0">
+              <a:buNone/>
+            </a:pPr>
+            <a:r>
+              <a:rPr lang="en-US" sz="1200" kern="0" spc="120" dirty="0">
                 <a:solidFill>
                   <a:srgbClr val="8A5A10"/>
                 </a:solidFill>
@@ -11288,9 +11243,11 @@
       <p:sp>
         <p:nvSpPr>
           <p:cNvPr id="3" name="Text 0"/>
-          <p:cNvSpPr/>
+          <p:cNvSpPr>
+            <a:spLocks noGrp="1"/>
+          </p:cNvSpPr>
           <p:nvPr>
-            <p:ph idx="100" type="title" hasCustomPrompt="1"/>
+            <p:ph type="title" idx="100" hasCustomPrompt="1"/>
           </p:nvPr>
         </p:nvSpPr>
         <p:spPr>
@@ -11308,7 +11265,7 @@
           <a:bodyPr wrap="square" lIns="0" tIns="0" rIns="0" bIns="0" rtlCol="0" anchor="t"/>
           <a:lstStyle/>
           <a:p>
-            <a:pPr indent="0" marL="0">
+            <a:pPr marL="0" indent="0">
               <a:buNone/>
             </a:pPr>
             <a:r>
@@ -11347,13 +11304,20 @@
           </a:solidFill>
           <a:ln/>
           <a:effectLst>
-            <a:outerShdw sx="100000" sy="100000" kx="0" ky="0" algn="bl" rotWithShape="0" blurRad="177800" dist="38100" dir="5400000">
+            <a:outerShdw blurRad="177800" dist="38100" dir="5400000" algn="bl" rotWithShape="0">
               <a:srgbClr val="1A1E1B">
                 <a:alpha val="8000"/>
               </a:srgbClr>
             </a:outerShdw>
           </a:effectLst>
         </p:spPr>
+        <p:txBody>
+          <a:bodyPr/>
+          <a:lstStyle/>
+          <a:p>
+            <a:endParaRPr lang="en-US"/>
+          </a:p>
+        </p:txBody>
       </p:sp>
       <p:sp>
         <p:nvSpPr>
@@ -11376,7 +11340,7 @@
           <a:bodyPr wrap="square" lIns="0" tIns="0" rIns="0" bIns="0" rtlCol="0" anchor="ctr"/>
           <a:lstStyle/>
           <a:p>
-            <a:pPr indent="0" marL="0">
+            <a:pPr marL="0" indent="0">
               <a:buNone/>
             </a:pPr>
             <a:r>
@@ -11415,7 +11379,7 @@
           <a:bodyPr wrap="square" lIns="0" tIns="0" rIns="0" bIns="0" rtlCol="0" anchor="ctr"/>
           <a:lstStyle/>
           <a:p>
-            <a:pPr indent="0" marL="0">
+            <a:pPr marL="0" indent="0">
               <a:buNone/>
             </a:pPr>
             <a:r>
@@ -11454,13 +11418,20 @@
           </a:solidFill>
           <a:ln/>
           <a:effectLst>
-            <a:outerShdw sx="100000" sy="100000" kx="0" ky="0" algn="bl" rotWithShape="0" blurRad="177800" dist="38100" dir="5400000">
+            <a:outerShdw blurRad="177800" dist="38100" dir="5400000" algn="bl" rotWithShape="0">
               <a:srgbClr val="1A1E1B">
                 <a:alpha val="8000"/>
               </a:srgbClr>
             </a:outerShdw>
           </a:effectLst>
         </p:spPr>
+        <p:txBody>
+          <a:bodyPr/>
+          <a:lstStyle/>
+          <a:p>
+            <a:endParaRPr lang="en-US"/>
+          </a:p>
+        </p:txBody>
       </p:sp>
       <p:sp>
         <p:nvSpPr>
@@ -11483,7 +11454,7 @@
           <a:bodyPr wrap="square" lIns="0" tIns="0" rIns="0" bIns="0" rtlCol="0" anchor="ctr"/>
           <a:lstStyle/>
           <a:p>
-            <a:pPr indent="0" marL="0">
+            <a:pPr marL="0" indent="0">
               <a:buNone/>
             </a:pPr>
             <a:r>
@@ -11522,7 +11493,7 @@
           <a:bodyPr wrap="square" lIns="0" tIns="0" rIns="0" bIns="0" rtlCol="0" anchor="ctr"/>
           <a:lstStyle/>
           <a:p>
-            <a:pPr indent="0" marL="0">
+            <a:pPr marL="0" indent="0">
               <a:buNone/>
             </a:pPr>
             <a:r>
@@ -11542,14 +11513,14 @@
       </p:sp>
       <p:pic>
         <p:nvPicPr>
-          <p:cNvPr id="11" name="Image 0" descr="D:/bodyscout/results/fig_faults.png">    </p:cNvPr>
+          <p:cNvPr id="11" name="Image 0" descr="D:/bodyscout/results/fig_faults.png"/>
           <p:cNvPicPr>
             <a:picLocks noChangeAspect="1"/>
           </p:cNvPicPr>
           <p:nvPr/>
         </p:nvPicPr>
         <p:blipFill>
-          <a:blip r:embed="rId1"/>
+          <a:blip r:embed="rId3"/>
           <a:stretch>
             <a:fillRect/>
           </a:stretch>
@@ -11585,7 +11556,7 @@
           <a:bodyPr wrap="square" lIns="0" tIns="0" rIns="0" bIns="0" rtlCol="0" anchor="ctr"/>
           <a:lstStyle/>
           <a:p>
-            <a:pPr indent="0" marL="0">
+            <a:pPr marL="0" indent="0">
               <a:buNone/>
             </a:pPr>
             <a:r>
@@ -11623,7 +11594,7 @@
           </a:prstGeom>
           <a:extLst>
             <a:ext uri="{C572A759-6A51-4108-AA02-DFA0A04FC94B}">
-              <ma14:wrappingTextBoxFlag xmlns:ma14="http://schemas.microsoft.com/office/mac/drawingml/2011/main" val="0"/>
+              <ma14:wrappingTextBoxFlag xmlns:ma14="http://schemas.microsoft.com/office/mac/drawingml/2011/main" xmlns="" val="0"/>
             </a:ext>
           </a:extLst>
         </p:spPr>
@@ -11644,7 +11615,7 @@
           <a:p>
             <a:pPr algn="l"/>
             <a:fld id="{F7021451-1387-4CA6-816F-3879F97B5CBC}" type="slidenum">
-              <a:rPr b="0" lang="en-US"/>
+              <a:rPr lang="en-US" b="0"/>
               <a:t>15</a:t>
             </a:fld>
             <a:endParaRPr lang="en-US"/>
@@ -11697,11 +11668,11 @@
           <a:bodyPr wrap="square" lIns="0" tIns="0" rIns="0" bIns="0" rtlCol="0" anchor="ctr"/>
           <a:lstStyle/>
           <a:p>
-            <a:pPr indent="0" marL="0">
-              <a:buNone/>
-            </a:pPr>
-            <a:r>
-              <a:rPr lang="en-US" sz="1200" spc="120" kern="0" dirty="0">
+            <a:pPr marL="0" indent="0">
+              <a:buNone/>
+            </a:pPr>
+            <a:r>
+              <a:rPr lang="en-US" sz="1200" kern="0" spc="120" dirty="0">
                 <a:solidFill>
                   <a:srgbClr val="8A5A10"/>
                 </a:solidFill>
@@ -11718,9 +11689,11 @@
       <p:sp>
         <p:nvSpPr>
           <p:cNvPr id="3" name="Text 0"/>
-          <p:cNvSpPr/>
+          <p:cNvSpPr>
+            <a:spLocks noGrp="1"/>
+          </p:cNvSpPr>
           <p:nvPr>
-            <p:ph idx="100" type="title" hasCustomPrompt="1"/>
+            <p:ph type="title" idx="100" hasCustomPrompt="1"/>
           </p:nvPr>
         </p:nvSpPr>
         <p:spPr>
@@ -11738,7 +11711,7 @@
           <a:bodyPr wrap="square" lIns="0" tIns="0" rIns="0" bIns="0" rtlCol="0" anchor="t"/>
           <a:lstStyle/>
           <a:p>
-            <a:pPr indent="0" marL="0">
+            <a:pPr marL="0" indent="0">
               <a:buNone/>
             </a:pPr>
             <a:r>
@@ -11777,6 +11750,13 @@
           </a:solidFill>
           <a:ln/>
         </p:spPr>
+        <p:txBody>
+          <a:bodyPr/>
+          <a:lstStyle/>
+          <a:p>
+            <a:endParaRPr lang="en-US"/>
+          </a:p>
+        </p:txBody>
       </p:sp>
       <p:sp>
         <p:nvSpPr>
@@ -11799,7 +11779,7 @@
           <a:bodyPr wrap="square" lIns="0" tIns="0" rIns="0" bIns="0" rtlCol="0" anchor="ctr"/>
           <a:lstStyle/>
           <a:p>
-            <a:pPr indent="0" marL="0">
+            <a:pPr marL="0" indent="0">
               <a:buNone/>
             </a:pPr>
             <a:r>
@@ -11838,7 +11818,7 @@
           <a:bodyPr wrap="square" lIns="0" tIns="0" rIns="0" bIns="0" rtlCol="0" anchor="ctr"/>
           <a:lstStyle/>
           <a:p>
-            <a:pPr indent="0" marL="0">
+            <a:pPr marL="0" indent="0">
               <a:buNone/>
             </a:pPr>
             <a:r>
@@ -11877,6 +11857,13 @@
           </a:solidFill>
           <a:ln/>
         </p:spPr>
+        <p:txBody>
+          <a:bodyPr/>
+          <a:lstStyle/>
+          <a:p>
+            <a:endParaRPr lang="en-US"/>
+          </a:p>
+        </p:txBody>
       </p:sp>
       <p:sp>
         <p:nvSpPr>
@@ -11899,7 +11886,7 @@
           <a:bodyPr wrap="square" lIns="0" tIns="0" rIns="0" bIns="0" rtlCol="0" anchor="ctr"/>
           <a:lstStyle/>
           <a:p>
-            <a:pPr indent="0" marL="0">
+            <a:pPr marL="0" indent="0">
               <a:buNone/>
             </a:pPr>
             <a:r>
@@ -11938,7 +11925,7 @@
           <a:bodyPr wrap="square" lIns="0" tIns="0" rIns="0" bIns="0" rtlCol="0" anchor="ctr"/>
           <a:lstStyle/>
           <a:p>
-            <a:pPr indent="0" marL="0">
+            <a:pPr marL="0" indent="0">
               <a:buNone/>
             </a:pPr>
             <a:r>
@@ -11977,6 +11964,13 @@
           </a:solidFill>
           <a:ln/>
         </p:spPr>
+        <p:txBody>
+          <a:bodyPr/>
+          <a:lstStyle/>
+          <a:p>
+            <a:endParaRPr lang="en-US"/>
+          </a:p>
+        </p:txBody>
       </p:sp>
       <p:sp>
         <p:nvSpPr>
@@ -11999,7 +11993,7 @@
           <a:bodyPr wrap="square" lIns="0" tIns="0" rIns="0" bIns="0" rtlCol="0" anchor="ctr"/>
           <a:lstStyle/>
           <a:p>
-            <a:pPr indent="0" marL="0">
+            <a:pPr marL="0" indent="0">
               <a:buNone/>
             </a:pPr>
             <a:r>
@@ -12038,7 +12032,7 @@
           <a:bodyPr wrap="square" lIns="0" tIns="0" rIns="0" bIns="0" rtlCol="0" anchor="ctr"/>
           <a:lstStyle/>
           <a:p>
-            <a:pPr indent="0" marL="0">
+            <a:pPr marL="0" indent="0">
               <a:buNone/>
             </a:pPr>
             <a:r>
@@ -12077,6 +12071,13 @@
           </a:solidFill>
           <a:ln/>
         </p:spPr>
+        <p:txBody>
+          <a:bodyPr/>
+          <a:lstStyle/>
+          <a:p>
+            <a:endParaRPr lang="en-US"/>
+          </a:p>
+        </p:txBody>
       </p:sp>
       <p:sp>
         <p:nvSpPr>
@@ -12099,7 +12100,7 @@
           <a:bodyPr wrap="square" lIns="0" tIns="0" rIns="0" bIns="0" rtlCol="0" anchor="ctr"/>
           <a:lstStyle/>
           <a:p>
-            <a:pPr indent="0" marL="0">
+            <a:pPr marL="0" indent="0">
               <a:buNone/>
             </a:pPr>
             <a:r>
@@ -12138,7 +12139,7 @@
           <a:bodyPr wrap="square" lIns="0" tIns="0" rIns="0" bIns="0" rtlCol="0" anchor="ctr"/>
           <a:lstStyle/>
           <a:p>
-            <a:pPr indent="0" marL="0">
+            <a:pPr marL="0" indent="0">
               <a:buNone/>
             </a:pPr>
             <a:r>
@@ -12177,6 +12178,13 @@
           </a:solidFill>
           <a:ln/>
         </p:spPr>
+        <p:txBody>
+          <a:bodyPr/>
+          <a:lstStyle/>
+          <a:p>
+            <a:endParaRPr lang="en-US"/>
+          </a:p>
+        </p:txBody>
       </p:sp>
       <p:sp>
         <p:nvSpPr>
@@ -12199,7 +12207,7 @@
           <a:bodyPr wrap="square" lIns="0" tIns="0" rIns="0" bIns="0" rtlCol="0" anchor="ctr"/>
           <a:lstStyle/>
           <a:p>
-            <a:pPr indent="0" marL="0">
+            <a:pPr marL="0" indent="0">
               <a:buNone/>
             </a:pPr>
             <a:r>
@@ -12238,7 +12246,7 @@
           <a:bodyPr wrap="square" lIns="0" tIns="0" rIns="0" bIns="0" rtlCol="0" anchor="ctr"/>
           <a:lstStyle/>
           <a:p>
-            <a:pPr indent="0" marL="0">
+            <a:pPr marL="0" indent="0">
               <a:buNone/>
             </a:pPr>
             <a:r>
@@ -12277,6 +12285,13 @@
           </a:solidFill>
           <a:ln/>
         </p:spPr>
+        <p:txBody>
+          <a:bodyPr/>
+          <a:lstStyle/>
+          <a:p>
+            <a:endParaRPr lang="en-US"/>
+          </a:p>
+        </p:txBody>
       </p:sp>
       <p:sp>
         <p:nvSpPr>
@@ -12299,7 +12314,7 @@
           <a:bodyPr wrap="square" lIns="0" tIns="0" rIns="0" bIns="0" rtlCol="0" anchor="ctr"/>
           <a:lstStyle/>
           <a:p>
-            <a:pPr indent="0" marL="0">
+            <a:pPr marL="0" indent="0">
               <a:buNone/>
             </a:pPr>
             <a:r>
@@ -12338,7 +12353,7 @@
           <a:bodyPr wrap="square" lIns="0" tIns="0" rIns="0" bIns="0" rtlCol="0" anchor="ctr"/>
           <a:lstStyle/>
           <a:p>
-            <a:pPr indent="0" marL="0">
+            <a:pPr marL="0" indent="0">
               <a:buNone/>
             </a:pPr>
             <a:r>
@@ -12377,13 +12392,20 @@
           </a:solidFill>
           <a:ln/>
           <a:effectLst>
-            <a:outerShdw sx="100000" sy="100000" kx="0" ky="0" algn="bl" rotWithShape="0" blurRad="177800" dist="38100" dir="5400000">
+            <a:outerShdw blurRad="177800" dist="38100" dir="5400000" algn="bl" rotWithShape="0">
               <a:srgbClr val="1A1E1B">
                 <a:alpha val="8000"/>
               </a:srgbClr>
             </a:outerShdw>
           </a:effectLst>
         </p:spPr>
+        <p:txBody>
+          <a:bodyPr/>
+          <a:lstStyle/>
+          <a:p>
+            <a:endParaRPr lang="en-US"/>
+          </a:p>
+        </p:txBody>
       </p:sp>
       <p:sp>
         <p:nvSpPr>
@@ -12406,7 +12428,7 @@
           <a:bodyPr wrap="square" lIns="0" tIns="0" rIns="0" bIns="0" rtlCol="0" anchor="ctr"/>
           <a:lstStyle/>
           <a:p>
-            <a:pPr indent="0" marL="0">
+            <a:pPr marL="0" indent="0">
               <a:buNone/>
             </a:pPr>
             <a:r>
@@ -12445,7 +12467,7 @@
           <a:bodyPr wrap="square" lIns="0" tIns="0" rIns="0" bIns="0" rtlCol="0" anchor="ctr"/>
           <a:lstStyle/>
           <a:p>
-            <a:pPr indent="0" marL="0">
+            <a:pPr marL="0" indent="0">
               <a:buNone/>
             </a:pPr>
             <a:r>
@@ -12484,13 +12506,20 @@
           </a:solidFill>
           <a:ln/>
           <a:effectLst>
-            <a:outerShdw sx="100000" sy="100000" kx="0" ky="0" algn="bl" rotWithShape="0" blurRad="177800" dist="38100" dir="5400000">
+            <a:outerShdw blurRad="177800" dist="38100" dir="5400000" algn="bl" rotWithShape="0">
               <a:srgbClr val="1A1E1B">
                 <a:alpha val="8000"/>
               </a:srgbClr>
             </a:outerShdw>
           </a:effectLst>
         </p:spPr>
+        <p:txBody>
+          <a:bodyPr/>
+          <a:lstStyle/>
+          <a:p>
+            <a:endParaRPr lang="en-US"/>
+          </a:p>
+        </p:txBody>
       </p:sp>
       <p:sp>
         <p:nvSpPr>
@@ -12513,7 +12542,7 @@
           <a:bodyPr wrap="square" lIns="0" tIns="0" rIns="0" bIns="0" rtlCol="0" anchor="ctr"/>
           <a:lstStyle/>
           <a:p>
-            <a:pPr indent="0" marL="0">
+            <a:pPr marL="0" indent="0">
               <a:buNone/>
             </a:pPr>
             <a:r>
@@ -12552,7 +12581,7 @@
           <a:bodyPr wrap="square" lIns="0" tIns="0" rIns="0" bIns="0" rtlCol="0" anchor="ctr"/>
           <a:lstStyle/>
           <a:p>
-            <a:pPr indent="0" marL="0">
+            <a:pPr marL="0" indent="0">
               <a:buNone/>
             </a:pPr>
             <a:r>
@@ -12591,13 +12620,20 @@
           </a:solidFill>
           <a:ln/>
           <a:effectLst>
-            <a:outerShdw sx="100000" sy="100000" kx="0" ky="0" algn="bl" rotWithShape="0" blurRad="177800" dist="38100" dir="5400000">
+            <a:outerShdw blurRad="177800" dist="38100" dir="5400000" algn="bl" rotWithShape="0">
               <a:srgbClr val="1A1E1B">
                 <a:alpha val="8000"/>
               </a:srgbClr>
             </a:outerShdw>
           </a:effectLst>
         </p:spPr>
+        <p:txBody>
+          <a:bodyPr/>
+          <a:lstStyle/>
+          <a:p>
+            <a:endParaRPr lang="en-US"/>
+          </a:p>
+        </p:txBody>
       </p:sp>
       <p:sp>
         <p:nvSpPr>
@@ -12620,7 +12656,7 @@
           <a:bodyPr wrap="square" lIns="0" tIns="0" rIns="0" bIns="0" rtlCol="0" anchor="ctr"/>
           <a:lstStyle/>
           <a:p>
-            <a:pPr indent="0" marL="0">
+            <a:pPr marL="0" indent="0">
               <a:buNone/>
             </a:pPr>
             <a:r>
@@ -12659,7 +12695,7 @@
           <a:bodyPr wrap="square" lIns="0" tIns="0" rIns="0" bIns="0" rtlCol="0" anchor="ctr"/>
           <a:lstStyle/>
           <a:p>
-            <a:pPr indent="0" marL="0">
+            <a:pPr marL="0" indent="0">
               <a:buNone/>
             </a:pPr>
             <a:r>
@@ -12698,7 +12734,7 @@
           <a:bodyPr wrap="square" lIns="0" tIns="0" rIns="0" bIns="0" rtlCol="0" anchor="ctr"/>
           <a:lstStyle/>
           <a:p>
-            <a:pPr indent="0" marL="0">
+            <a:pPr marL="0" indent="0">
               <a:buNone/>
             </a:pPr>
             <a:r>
@@ -12718,7 +12754,7 @@
       </p:sp>
       <p:sp>
         <p:nvSpPr>
-          <p:cNvPr id="25" name="Slide Number Placeholder 0"/>
+          <p:cNvPr id="4" name="Slide Number Placeholder 0"/>
           <p:cNvSpPr>
             <a:spLocks noGrp="1"/>
           </p:cNvSpPr>
@@ -12736,7 +12772,7 @@
           </a:prstGeom>
           <a:extLst>
             <a:ext uri="{C572A759-6A51-4108-AA02-DFA0A04FC94B}">
-              <ma14:wrappingTextBoxFlag xmlns:ma14="http://schemas.microsoft.com/office/mac/drawingml/2011/main" val="0"/>
+              <ma14:wrappingTextBoxFlag xmlns:ma14="http://schemas.microsoft.com/office/mac/drawingml/2011/main" xmlns="" val="0"/>
             </a:ext>
           </a:extLst>
         </p:spPr>
@@ -12757,7 +12793,7 @@
           <a:p>
             <a:pPr algn="l"/>
             <a:fld id="{F7021451-1387-4CA6-816F-3879F97B5CBC}" type="slidenum">
-              <a:rPr b="0" lang="en-US"/>
+              <a:rPr lang="en-US" b="0"/>
               <a:t>16</a:t>
             </a:fld>
             <a:endParaRPr lang="en-US"/>
@@ -12810,11 +12846,11 @@
           <a:bodyPr wrap="square" lIns="0" tIns="0" rIns="0" bIns="0" rtlCol="0" anchor="ctr"/>
           <a:lstStyle/>
           <a:p>
-            <a:pPr indent="0" marL="0">
-              <a:buNone/>
-            </a:pPr>
-            <a:r>
-              <a:rPr lang="en-US" sz="1200" spc="120" kern="0" dirty="0">
+            <a:pPr marL="0" indent="0">
+              <a:buNone/>
+            </a:pPr>
+            <a:r>
+              <a:rPr lang="en-US" sz="1200" kern="0" spc="120" dirty="0">
                 <a:solidFill>
                   <a:srgbClr val="8A5A10"/>
                 </a:solidFill>
@@ -12831,9 +12867,11 @@
       <p:sp>
         <p:nvSpPr>
           <p:cNvPr id="3" name="Text 0"/>
-          <p:cNvSpPr/>
+          <p:cNvSpPr>
+            <a:spLocks noGrp="1"/>
+          </p:cNvSpPr>
           <p:nvPr>
-            <p:ph idx="100" type="title" hasCustomPrompt="1"/>
+            <p:ph type="title" idx="100" hasCustomPrompt="1"/>
           </p:nvPr>
         </p:nvSpPr>
         <p:spPr>
@@ -12851,7 +12889,7 @@
           <a:bodyPr wrap="square" lIns="0" tIns="0" rIns="0" bIns="0" rtlCol="0" anchor="t"/>
           <a:lstStyle/>
           <a:p>
-            <a:pPr indent="0" marL="0">
+            <a:pPr marL="0" indent="0">
               <a:buNone/>
             </a:pPr>
             <a:r>
@@ -12890,6 +12928,13 @@
           </a:solidFill>
           <a:ln/>
         </p:spPr>
+        <p:txBody>
+          <a:bodyPr/>
+          <a:lstStyle/>
+          <a:p>
+            <a:endParaRPr lang="en-US"/>
+          </a:p>
+        </p:txBody>
       </p:sp>
       <p:sp>
         <p:nvSpPr>
@@ -12912,7 +12957,7 @@
           <a:bodyPr wrap="square" lIns="0" tIns="0" rIns="0" bIns="0" rtlCol="0" anchor="ctr"/>
           <a:lstStyle/>
           <a:p>
-            <a:pPr indent="0" marL="0">
+            <a:pPr marL="0" indent="0">
               <a:buNone/>
             </a:pPr>
             <a:r>
@@ -12951,7 +12996,7 @@
           <a:bodyPr wrap="square" lIns="0" tIns="0" rIns="0" bIns="0" rtlCol="0" anchor="ctr"/>
           <a:lstStyle/>
           <a:p>
-            <a:pPr indent="0" marL="0">
+            <a:pPr marL="0" indent="0">
               <a:buNone/>
             </a:pPr>
             <a:r>
@@ -12990,7 +13035,7 @@
           <a:bodyPr wrap="square" lIns="0" tIns="0" rIns="0" bIns="0" rtlCol="0" anchor="ctr"/>
           <a:lstStyle/>
           <a:p>
-            <a:pPr indent="0" marL="0">
+            <a:pPr marL="0" indent="0">
               <a:buNone/>
             </a:pPr>
             <a:r>
@@ -13029,6 +13074,13 @@
           </a:solidFill>
           <a:ln/>
         </p:spPr>
+        <p:txBody>
+          <a:bodyPr/>
+          <a:lstStyle/>
+          <a:p>
+            <a:endParaRPr lang="en-US"/>
+          </a:p>
+        </p:txBody>
       </p:sp>
       <p:sp>
         <p:nvSpPr>
@@ -13051,7 +13103,7 @@
           <a:bodyPr wrap="square" lIns="0" tIns="0" rIns="0" bIns="0" rtlCol="0" anchor="ctr"/>
           <a:lstStyle/>
           <a:p>
-            <a:pPr indent="0" marL="0">
+            <a:pPr marL="0" indent="0">
               <a:buNone/>
             </a:pPr>
             <a:r>
@@ -13090,7 +13142,7 @@
           <a:bodyPr wrap="square" lIns="0" tIns="0" rIns="0" bIns="0" rtlCol="0" anchor="ctr"/>
           <a:lstStyle/>
           <a:p>
-            <a:pPr indent="0" marL="0">
+            <a:pPr marL="0" indent="0">
               <a:buNone/>
             </a:pPr>
             <a:r>
@@ -13129,7 +13181,7 @@
           <a:bodyPr wrap="square" lIns="0" tIns="0" rIns="0" bIns="0" rtlCol="0" anchor="ctr"/>
           <a:lstStyle/>
           <a:p>
-            <a:pPr indent="0" marL="0">
+            <a:pPr marL="0" indent="0">
               <a:buNone/>
             </a:pPr>
             <a:r>
@@ -13168,6 +13220,13 @@
           </a:solidFill>
           <a:ln/>
         </p:spPr>
+        <p:txBody>
+          <a:bodyPr/>
+          <a:lstStyle/>
+          <a:p>
+            <a:endParaRPr lang="en-US"/>
+          </a:p>
+        </p:txBody>
       </p:sp>
       <p:sp>
         <p:nvSpPr>
@@ -13190,7 +13249,7 @@
           <a:bodyPr wrap="square" lIns="0" tIns="0" rIns="0" bIns="0" rtlCol="0" anchor="ctr"/>
           <a:lstStyle/>
           <a:p>
-            <a:pPr indent="0" marL="0">
+            <a:pPr marL="0" indent="0">
               <a:buNone/>
             </a:pPr>
             <a:r>
@@ -13229,7 +13288,7 @@
           <a:bodyPr wrap="square" lIns="0" tIns="0" rIns="0" bIns="0" rtlCol="0" anchor="ctr"/>
           <a:lstStyle/>
           <a:p>
-            <a:pPr indent="0" marL="0">
+            <a:pPr marL="0" indent="0">
               <a:buNone/>
             </a:pPr>
             <a:r>
@@ -13268,7 +13327,7 @@
           <a:bodyPr wrap="square" lIns="0" tIns="0" rIns="0" bIns="0" rtlCol="0" anchor="ctr"/>
           <a:lstStyle/>
           <a:p>
-            <a:pPr indent="0" marL="0">
+            <a:pPr marL="0" indent="0">
               <a:buNone/>
             </a:pPr>
             <a:r>
@@ -13307,6 +13366,13 @@
           </a:solidFill>
           <a:ln/>
         </p:spPr>
+        <p:txBody>
+          <a:bodyPr/>
+          <a:lstStyle/>
+          <a:p>
+            <a:endParaRPr lang="en-US"/>
+          </a:p>
+        </p:txBody>
       </p:sp>
       <p:sp>
         <p:nvSpPr>
@@ -13329,7 +13395,7 @@
           <a:bodyPr wrap="square" lIns="0" tIns="0" rIns="0" bIns="0" rtlCol="0" anchor="ctr"/>
           <a:lstStyle/>
           <a:p>
-            <a:pPr indent="0" marL="0">
+            <a:pPr marL="0" indent="0">
               <a:buNone/>
             </a:pPr>
             <a:r>
@@ -13368,7 +13434,7 @@
           <a:bodyPr wrap="square" lIns="0" tIns="0" rIns="0" bIns="0" rtlCol="0" anchor="ctr"/>
           <a:lstStyle/>
           <a:p>
-            <a:pPr indent="0" marL="0">
+            <a:pPr marL="0" indent="0">
               <a:buNone/>
             </a:pPr>
             <a:r>
@@ -13407,7 +13473,7 @@
           <a:bodyPr wrap="square" lIns="0" tIns="0" rIns="0" bIns="0" rtlCol="0" anchor="ctr"/>
           <a:lstStyle/>
           <a:p>
-            <a:pPr indent="0" marL="0">
+            <a:pPr marL="0" indent="0">
               <a:buNone/>
             </a:pPr>
             <a:r>
@@ -13446,7 +13512,7 @@
           <a:bodyPr wrap="square" lIns="0" tIns="0" rIns="0" bIns="0" rtlCol="0" anchor="ctr"/>
           <a:lstStyle/>
           <a:p>
-            <a:pPr indent="0" marL="0">
+            <a:pPr marL="0" indent="0">
               <a:buNone/>
             </a:pPr>
             <a:r>
@@ -13484,7 +13550,7 @@
           </a:prstGeom>
           <a:extLst>
             <a:ext uri="{C572A759-6A51-4108-AA02-DFA0A04FC94B}">
-              <ma14:wrappingTextBoxFlag xmlns:ma14="http://schemas.microsoft.com/office/mac/drawingml/2011/main" val="0"/>
+              <ma14:wrappingTextBoxFlag xmlns:ma14="http://schemas.microsoft.com/office/mac/drawingml/2011/main" xmlns="" val="0"/>
             </a:ext>
           </a:extLst>
         </p:spPr>
@@ -13505,7 +13571,7 @@
           <a:p>
             <a:pPr algn="l"/>
             <a:fld id="{F7021451-1387-4CA6-816F-3879F97B5CBC}" type="slidenum">
-              <a:rPr b="0" lang="en-US"/>
+              <a:rPr lang="en-US" b="0"/>
               <a:t>17</a:t>
             </a:fld>
             <a:endParaRPr lang="en-US"/>
@@ -13558,11 +13624,11 @@
           <a:bodyPr wrap="square" lIns="0" tIns="0" rIns="0" bIns="0" rtlCol="0" anchor="ctr"/>
           <a:lstStyle/>
           <a:p>
-            <a:pPr indent="0" marL="0">
-              <a:buNone/>
-            </a:pPr>
-            <a:r>
-              <a:rPr lang="en-US" sz="1200" spc="120" kern="0" dirty="0">
+            <a:pPr marL="0" indent="0">
+              <a:buNone/>
+            </a:pPr>
+            <a:r>
+              <a:rPr lang="en-US" sz="1200" kern="0" spc="120" dirty="0">
                 <a:solidFill>
                   <a:srgbClr val="8A5A10"/>
                 </a:solidFill>
@@ -13579,9 +13645,11 @@
       <p:sp>
         <p:nvSpPr>
           <p:cNvPr id="3" name="Text 0"/>
-          <p:cNvSpPr/>
+          <p:cNvSpPr>
+            <a:spLocks noGrp="1"/>
+          </p:cNvSpPr>
           <p:nvPr>
-            <p:ph idx="100" type="title" hasCustomPrompt="1"/>
+            <p:ph type="title" idx="100" hasCustomPrompt="1"/>
           </p:nvPr>
         </p:nvSpPr>
         <p:spPr>
@@ -13599,7 +13667,7 @@
           <a:bodyPr wrap="square" lIns="0" tIns="0" rIns="0" bIns="0" rtlCol="0" anchor="t"/>
           <a:lstStyle/>
           <a:p>
-            <a:pPr indent="0" marL="0">
+            <a:pPr marL="0" indent="0">
               <a:buNone/>
             </a:pPr>
             <a:r>
@@ -13638,7 +13706,7 @@
           <a:bodyPr wrap="square" lIns="0" tIns="0" rIns="0" bIns="0" rtlCol="0" anchor="ctr"/>
           <a:lstStyle/>
           <a:p>
-            <a:pPr indent="0" marL="0">
+            <a:pPr marL="0" indent="0">
               <a:buNone/>
             </a:pPr>
             <a:r>
@@ -13677,7 +13745,7 @@
           <a:bodyPr wrap="square" lIns="0" tIns="0" rIns="0" bIns="0" rtlCol="0" anchor="ctr"/>
           <a:lstStyle/>
           <a:p>
-            <a:pPr indent="0" marL="0">
+            <a:pPr marL="0" indent="0">
               <a:buNone/>
             </a:pPr>
             <a:r>
@@ -13716,7 +13784,7 @@
           <a:bodyPr wrap="square" lIns="0" tIns="0" rIns="0" bIns="0" rtlCol="0" anchor="ctr"/>
           <a:lstStyle/>
           <a:p>
-            <a:pPr indent="0" marL="0">
+            <a:pPr marL="0" indent="0">
               <a:buNone/>
             </a:pPr>
             <a:r>
@@ -13755,7 +13823,7 @@
           <a:bodyPr wrap="square" lIns="0" tIns="0" rIns="0" bIns="0" rtlCol="0" anchor="ctr"/>
           <a:lstStyle/>
           <a:p>
-            <a:pPr indent="0" marL="0">
+            <a:pPr marL="0" indent="0">
               <a:buNone/>
             </a:pPr>
             <a:r>
@@ -13794,7 +13862,7 @@
           <a:bodyPr wrap="square" lIns="0" tIns="0" rIns="0" bIns="0" rtlCol="0" anchor="ctr"/>
           <a:lstStyle/>
           <a:p>
-            <a:pPr indent="0" marL="0">
+            <a:pPr marL="0" indent="0">
               <a:buNone/>
             </a:pPr>
             <a:r>
@@ -13833,7 +13901,7 @@
           <a:bodyPr wrap="square" lIns="0" tIns="0" rIns="0" bIns="0" rtlCol="0" anchor="ctr"/>
           <a:lstStyle/>
           <a:p>
-            <a:pPr indent="0" marL="0">
+            <a:pPr marL="0" indent="0">
               <a:buNone/>
             </a:pPr>
             <a:r>
@@ -13872,7 +13940,7 @@
           <a:bodyPr wrap="square" lIns="0" tIns="0" rIns="0" bIns="0" rtlCol="0" anchor="ctr"/>
           <a:lstStyle/>
           <a:p>
-            <a:pPr indent="0" marL="0">
+            <a:pPr marL="0" indent="0">
               <a:buNone/>
             </a:pPr>
             <a:r>
@@ -13892,14 +13960,14 @@
       </p:sp>
       <p:pic>
         <p:nvPicPr>
-          <p:cNvPr id="12" name="Image 0" descr="D:/bodyscout/results/fig_noise.png">    </p:cNvPr>
+          <p:cNvPr id="12" name="Image 0" descr="D:/bodyscout/results/fig_noise.png"/>
           <p:cNvPicPr>
             <a:picLocks noChangeAspect="1"/>
           </p:cNvPicPr>
           <p:nvPr/>
         </p:nvPicPr>
         <p:blipFill>
-          <a:blip r:embed="rId1"/>
+          <a:blip r:embed="rId3"/>
           <a:stretch>
             <a:fillRect/>
           </a:stretch>
@@ -13935,7 +14003,7 @@
           <a:bodyPr wrap="square" lIns="0" tIns="0" rIns="0" bIns="0" rtlCol="0" anchor="ctr"/>
           <a:lstStyle/>
           <a:p>
-            <a:pPr indent="0" marL="0">
+            <a:pPr marL="0" indent="0">
               <a:buNone/>
             </a:pPr>
             <a:r>
@@ -13973,7 +14041,7 @@
           </a:prstGeom>
           <a:extLst>
             <a:ext uri="{C572A759-6A51-4108-AA02-DFA0A04FC94B}">
-              <ma14:wrappingTextBoxFlag xmlns:ma14="http://schemas.microsoft.com/office/mac/drawingml/2011/main" val="0"/>
+              <ma14:wrappingTextBoxFlag xmlns:ma14="http://schemas.microsoft.com/office/mac/drawingml/2011/main" xmlns="" val="0"/>
             </a:ext>
           </a:extLst>
         </p:spPr>
@@ -13994,7 +14062,7 @@
           <a:p>
             <a:pPr algn="l"/>
             <a:fld id="{F7021451-1387-4CA6-816F-3879F97B5CBC}" type="slidenum">
-              <a:rPr b="0" lang="en-US"/>
+              <a:rPr lang="en-US" b="0"/>
               <a:t>18</a:t>
             </a:fld>
             <a:endParaRPr lang="en-US"/>
@@ -14047,11 +14115,11 @@
           <a:bodyPr wrap="square" lIns="0" tIns="0" rIns="0" bIns="0" rtlCol="0" anchor="ctr"/>
           <a:lstStyle/>
           <a:p>
-            <a:pPr indent="0" marL="0">
-              <a:buNone/>
-            </a:pPr>
-            <a:r>
-              <a:rPr lang="en-US" sz="1200" spc="120" kern="0" dirty="0">
+            <a:pPr marL="0" indent="0">
+              <a:buNone/>
+            </a:pPr>
+            <a:r>
+              <a:rPr lang="en-US" sz="1200" kern="0" spc="120" dirty="0">
                 <a:solidFill>
                   <a:srgbClr val="8A5A10"/>
                 </a:solidFill>
@@ -14068,9 +14136,11 @@
       <p:sp>
         <p:nvSpPr>
           <p:cNvPr id="3" name="Text 0"/>
-          <p:cNvSpPr/>
+          <p:cNvSpPr>
+            <a:spLocks noGrp="1"/>
+          </p:cNvSpPr>
           <p:nvPr>
-            <p:ph idx="100" type="title" hasCustomPrompt="1"/>
+            <p:ph type="title" idx="100" hasCustomPrompt="1"/>
           </p:nvPr>
         </p:nvSpPr>
         <p:spPr>
@@ -14088,7 +14158,7 @@
           <a:bodyPr wrap="square" lIns="0" tIns="0" rIns="0" bIns="0" rtlCol="0" anchor="t"/>
           <a:lstStyle/>
           <a:p>
-            <a:pPr indent="0" marL="0">
+            <a:pPr marL="0" indent="0">
               <a:buNone/>
             </a:pPr>
             <a:r>
@@ -14127,7 +14197,7 @@
           <a:bodyPr wrap="square" lIns="0" tIns="0" rIns="0" bIns="0" rtlCol="0" anchor="ctr"/>
           <a:lstStyle/>
           <a:p>
-            <a:pPr indent="0" marL="0">
+            <a:pPr marL="0" indent="0">
               <a:buNone/>
             </a:pPr>
             <a:r>
@@ -14166,7 +14236,7 @@
           <a:bodyPr wrap="square" lIns="0" tIns="0" rIns="0" bIns="0" rtlCol="0" anchor="ctr"/>
           <a:lstStyle/>
           <a:p>
-            <a:pPr indent="0" marL="0">
+            <a:pPr marL="0" indent="0">
               <a:buNone/>
             </a:pPr>
             <a:r>
@@ -14205,7 +14275,7 @@
           <a:bodyPr wrap="square" lIns="0" tIns="0" rIns="0" bIns="0" rtlCol="0" anchor="ctr"/>
           <a:lstStyle/>
           <a:p>
-            <a:pPr indent="0" marL="0">
+            <a:pPr marL="0" indent="0">
               <a:buNone/>
             </a:pPr>
             <a:r>
@@ -14244,7 +14314,7 @@
           <a:bodyPr wrap="square" lIns="0" tIns="0" rIns="0" bIns="0" rtlCol="0" anchor="ctr"/>
           <a:lstStyle/>
           <a:p>
-            <a:pPr indent="0" marL="0">
+            <a:pPr marL="0" indent="0">
               <a:buNone/>
             </a:pPr>
             <a:r>
@@ -14283,7 +14353,7 @@
           <a:bodyPr wrap="square" lIns="0" tIns="0" rIns="0" bIns="0" rtlCol="0" anchor="ctr"/>
           <a:lstStyle/>
           <a:p>
-            <a:pPr indent="0" marL="0">
+            <a:pPr marL="0" indent="0">
               <a:buNone/>
             </a:pPr>
             <a:r>
@@ -14322,7 +14392,7 @@
           <a:bodyPr wrap="square" lIns="0" tIns="0" rIns="0" bIns="0" rtlCol="0" anchor="ctr"/>
           <a:lstStyle/>
           <a:p>
-            <a:pPr indent="0" marL="0">
+            <a:pPr marL="0" indent="0">
               <a:buNone/>
             </a:pPr>
             <a:r>
@@ -14342,14 +14412,14 @@
       </p:sp>
       <p:pic>
         <p:nvPicPr>
-          <p:cNvPr id="11" name="Image 0" descr="D:/bodyscout/results/fig_extrapolation.png">    </p:cNvPr>
+          <p:cNvPr id="11" name="Image 0" descr="D:/bodyscout/results/fig_extrapolation.png"/>
           <p:cNvPicPr>
             <a:picLocks noChangeAspect="1"/>
           </p:cNvPicPr>
           <p:nvPr/>
         </p:nvPicPr>
         <p:blipFill>
-          <a:blip r:embed="rId1"/>
+          <a:blip r:embed="rId3"/>
           <a:stretch>
             <a:fillRect/>
           </a:stretch>
@@ -14385,7 +14455,7 @@
           <a:bodyPr wrap="square" lIns="0" tIns="0" rIns="0" bIns="0" rtlCol="0" anchor="ctr"/>
           <a:lstStyle/>
           <a:p>
-            <a:pPr indent="0" marL="0">
+            <a:pPr marL="0" indent="0">
               <a:buNone/>
             </a:pPr>
             <a:r>
@@ -14423,7 +14493,7 @@
           </a:prstGeom>
           <a:extLst>
             <a:ext uri="{C572A759-6A51-4108-AA02-DFA0A04FC94B}">
-              <ma14:wrappingTextBoxFlag xmlns:ma14="http://schemas.microsoft.com/office/mac/drawingml/2011/main" val="0"/>
+              <ma14:wrappingTextBoxFlag xmlns:ma14="http://schemas.microsoft.com/office/mac/drawingml/2011/main" xmlns="" val="0"/>
             </a:ext>
           </a:extLst>
         </p:spPr>
@@ -14444,7 +14514,7 @@
           <a:p>
             <a:pPr algn="l"/>
             <a:fld id="{F7021451-1387-4CA6-816F-3879F97B5CBC}" type="slidenum">
-              <a:rPr b="0" lang="en-US"/>
+              <a:rPr lang="en-US" b="0"/>
               <a:t>19</a:t>
             </a:fld>
             <a:endParaRPr lang="en-US"/>
@@ -14497,11 +14567,11 @@
           <a:bodyPr wrap="square" lIns="0" tIns="0" rIns="0" bIns="0" rtlCol="0" anchor="ctr"/>
           <a:lstStyle/>
           <a:p>
-            <a:pPr indent="0" marL="0">
-              <a:buNone/>
-            </a:pPr>
-            <a:r>
-              <a:rPr lang="en-US" sz="1200" spc="120" kern="0" dirty="0">
+            <a:pPr marL="0" indent="0">
+              <a:buNone/>
+            </a:pPr>
+            <a:r>
+              <a:rPr lang="en-US" sz="1200" kern="0" spc="120" dirty="0">
                 <a:solidFill>
                   <a:srgbClr val="8A5A10"/>
                 </a:solidFill>
@@ -14518,9 +14588,11 @@
       <p:sp>
         <p:nvSpPr>
           <p:cNvPr id="3" name="Text 0"/>
-          <p:cNvSpPr/>
+          <p:cNvSpPr>
+            <a:spLocks noGrp="1"/>
+          </p:cNvSpPr>
           <p:nvPr>
-            <p:ph idx="100" type="title" hasCustomPrompt="1"/>
+            <p:ph type="title" idx="100" hasCustomPrompt="1"/>
           </p:nvPr>
         </p:nvSpPr>
         <p:spPr>
@@ -14538,7 +14610,7 @@
           <a:bodyPr wrap="square" lIns="0" tIns="0" rIns="0" bIns="0" rtlCol="0" anchor="t"/>
           <a:lstStyle/>
           <a:p>
-            <a:pPr indent="0" marL="0">
+            <a:pPr marL="0" indent="0">
               <a:buNone/>
             </a:pPr>
             <a:r>
@@ -14577,7 +14649,7 @@
           <a:bodyPr wrap="square" lIns="0" tIns="0" rIns="0" bIns="0" rtlCol="0" anchor="ctr"/>
           <a:lstStyle/>
           <a:p>
-            <a:pPr indent="0" marL="0">
+            <a:pPr marL="0" indent="0">
               <a:buNone/>
             </a:pPr>
             <a:r>
@@ -14616,7 +14688,7 @@
           <a:bodyPr wrap="square" lIns="0" tIns="0" rIns="0" bIns="0" rtlCol="0" anchor="ctr"/>
           <a:lstStyle/>
           <a:p>
-            <a:pPr indent="0" marL="0">
+            <a:pPr marL="0" indent="0">
               <a:buNone/>
             </a:pPr>
             <a:r>
@@ -14655,7 +14727,7 @@
           <a:bodyPr wrap="square" lIns="0" tIns="0" rIns="0" bIns="0" rtlCol="0" anchor="ctr"/>
           <a:lstStyle/>
           <a:p>
-            <a:pPr indent="0" marL="0">
+            <a:pPr marL="0" indent="0">
               <a:buNone/>
             </a:pPr>
             <a:r>
@@ -14694,7 +14766,7 @@
           <a:bodyPr wrap="square" lIns="0" tIns="0" rIns="0" bIns="0" rtlCol="0" anchor="ctr"/>
           <a:lstStyle/>
           <a:p>
-            <a:pPr indent="0" marL="0">
+            <a:pPr marL="0" indent="0">
               <a:buNone/>
             </a:pPr>
             <a:r>
@@ -14733,7 +14805,7 @@
           <a:bodyPr wrap="square" lIns="0" tIns="0" rIns="0" bIns="0" rtlCol="0" anchor="ctr"/>
           <a:lstStyle/>
           <a:p>
-            <a:pPr indent="0" marL="0">
+            <a:pPr marL="0" indent="0">
               <a:buNone/>
             </a:pPr>
             <a:r>
@@ -14772,7 +14844,7 @@
           <a:bodyPr wrap="square" lIns="0" tIns="0" rIns="0" bIns="0" rtlCol="0" anchor="ctr"/>
           <a:lstStyle/>
           <a:p>
-            <a:pPr indent="0" marL="0">
+            <a:pPr marL="0" indent="0">
               <a:buNone/>
             </a:pPr>
             <a:r>
@@ -14811,7 +14883,7 @@
           <a:bodyPr wrap="square" lIns="0" tIns="0" rIns="0" bIns="0" rtlCol="0" anchor="ctr"/>
           <a:lstStyle/>
           <a:p>
-            <a:pPr indent="0" marL="0">
+            <a:pPr marL="0" indent="0">
               <a:buNone/>
             </a:pPr>
             <a:r>
@@ -14850,7 +14922,7 @@
           <a:bodyPr wrap="square" lIns="0" tIns="0" rIns="0" bIns="0" rtlCol="0" anchor="ctr"/>
           <a:lstStyle/>
           <a:p>
-            <a:pPr indent="0" marL="0">
+            <a:pPr marL="0" indent="0">
               <a:buNone/>
             </a:pPr>
             <a:r>
@@ -14889,7 +14961,7 @@
           <a:bodyPr wrap="square" lIns="0" tIns="0" rIns="0" bIns="0" rtlCol="0" anchor="ctr"/>
           <a:lstStyle/>
           <a:p>
-            <a:pPr indent="0" marL="0">
+            <a:pPr marL="0" indent="0">
               <a:buNone/>
             </a:pPr>
             <a:r>
@@ -14928,7 +15000,7 @@
           <a:bodyPr wrap="square" lIns="0" tIns="0" rIns="0" bIns="0" rtlCol="0" anchor="ctr"/>
           <a:lstStyle/>
           <a:p>
-            <a:pPr indent="0" marL="0">
+            <a:pPr marL="0" indent="0">
               <a:buNone/>
             </a:pPr>
             <a:r>
@@ -14967,7 +15039,7 @@
           <a:bodyPr wrap="square" lIns="0" tIns="0" rIns="0" bIns="0" rtlCol="0" anchor="ctr"/>
           <a:lstStyle/>
           <a:p>
-            <a:pPr indent="0" marL="0">
+            <a:pPr marL="0" indent="0">
               <a:buNone/>
             </a:pPr>
             <a:r>
@@ -15006,7 +15078,7 @@
           <a:bodyPr wrap="square" lIns="0" tIns="0" rIns="0" bIns="0" rtlCol="0" anchor="ctr"/>
           <a:lstStyle/>
           <a:p>
-            <a:pPr indent="0" marL="0">
+            <a:pPr marL="0" indent="0">
               <a:buNone/>
             </a:pPr>
             <a:r>
@@ -15044,7 +15116,7 @@
           </a:prstGeom>
           <a:extLst>
             <a:ext uri="{C572A759-6A51-4108-AA02-DFA0A04FC94B}">
-              <ma14:wrappingTextBoxFlag xmlns:ma14="http://schemas.microsoft.com/office/mac/drawingml/2011/main" val="0"/>
+              <ma14:wrappingTextBoxFlag xmlns:ma14="http://schemas.microsoft.com/office/mac/drawingml/2011/main" xmlns="" val="0"/>
             </a:ext>
           </a:extLst>
         </p:spPr>
@@ -15065,7 +15137,7 @@
           <a:p>
             <a:pPr algn="l"/>
             <a:fld id="{F7021451-1387-4CA6-816F-3879F97B5CBC}" type="slidenum">
-              <a:rPr b="0" lang="en-US"/>
+              <a:rPr lang="en-US" b="0"/>
               <a:t>2</a:t>
             </a:fld>
             <a:endParaRPr lang="en-US"/>
@@ -15118,11 +15190,11 @@
           <a:bodyPr wrap="square" lIns="0" tIns="0" rIns="0" bIns="0" rtlCol="0" anchor="ctr"/>
           <a:lstStyle/>
           <a:p>
-            <a:pPr indent="0" marL="0">
-              <a:buNone/>
-            </a:pPr>
-            <a:r>
-              <a:rPr lang="en-US" sz="1200" spc="120" kern="0" dirty="0">
+            <a:pPr marL="0" indent="0">
+              <a:buNone/>
+            </a:pPr>
+            <a:r>
+              <a:rPr lang="en-US" sz="1200" kern="0" spc="120" dirty="0">
                 <a:solidFill>
                   <a:srgbClr val="8A5A10"/>
                 </a:solidFill>
@@ -15139,9 +15211,11 @@
       <p:sp>
         <p:nvSpPr>
           <p:cNvPr id="3" name="Text 0"/>
-          <p:cNvSpPr/>
+          <p:cNvSpPr>
+            <a:spLocks noGrp="1"/>
+          </p:cNvSpPr>
           <p:nvPr>
-            <p:ph idx="100" type="title" hasCustomPrompt="1"/>
+            <p:ph type="title" idx="100" hasCustomPrompt="1"/>
           </p:nvPr>
         </p:nvSpPr>
         <p:spPr>
@@ -15159,7 +15233,7 @@
           <a:bodyPr wrap="square" lIns="0" tIns="0" rIns="0" bIns="0" rtlCol="0" anchor="t"/>
           <a:lstStyle/>
           <a:p>
-            <a:pPr indent="0" marL="0">
+            <a:pPr marL="0" indent="0">
               <a:buNone/>
             </a:pPr>
             <a:r>
@@ -15198,7 +15272,7 @@
           <a:bodyPr wrap="square" lIns="0" tIns="0" rIns="0" bIns="0" rtlCol="0" anchor="ctr"/>
           <a:lstStyle/>
           <a:p>
-            <a:pPr indent="0" marL="0">
+            <a:pPr marL="0" indent="0">
               <a:buNone/>
             </a:pPr>
             <a:r>
@@ -15237,6 +15311,13 @@
           </a:solidFill>
           <a:ln/>
         </p:spPr>
+        <p:txBody>
+          <a:bodyPr/>
+          <a:lstStyle/>
+          <a:p>
+            <a:endParaRPr lang="en-US"/>
+          </a:p>
+        </p:txBody>
       </p:sp>
       <p:sp>
         <p:nvSpPr>
@@ -15259,7 +15340,7 @@
           <a:bodyPr wrap="square" lIns="0" tIns="0" rIns="0" bIns="0" rtlCol="0" anchor="ctr"/>
           <a:lstStyle/>
           <a:p>
-            <a:pPr algn="ctr" indent="0" marL="0">
+            <a:pPr marL="0" indent="0" algn="ctr">
               <a:buNone/>
             </a:pPr>
             <a:r>
@@ -15298,6 +15379,13 @@
           </a:solidFill>
           <a:ln/>
         </p:spPr>
+        <p:txBody>
+          <a:bodyPr/>
+          <a:lstStyle/>
+          <a:p>
+            <a:endParaRPr lang="en-US"/>
+          </a:p>
+        </p:txBody>
       </p:sp>
       <p:sp>
         <p:nvSpPr>
@@ -15320,7 +15408,7 @@
           <a:bodyPr wrap="square" lIns="0" tIns="0" rIns="0" bIns="0" rtlCol="0" anchor="ctr"/>
           <a:lstStyle/>
           <a:p>
-            <a:pPr algn="ctr" indent="0" marL="0">
+            <a:pPr marL="0" indent="0" algn="ctr">
               <a:buNone/>
             </a:pPr>
             <a:r>
@@ -15359,6 +15447,13 @@
           </a:solidFill>
           <a:ln/>
         </p:spPr>
+        <p:txBody>
+          <a:bodyPr/>
+          <a:lstStyle/>
+          <a:p>
+            <a:endParaRPr lang="en-US"/>
+          </a:p>
+        </p:txBody>
       </p:sp>
       <p:sp>
         <p:nvSpPr>
@@ -15381,7 +15476,7 @@
           <a:bodyPr wrap="square" lIns="0" tIns="0" rIns="0" bIns="0" rtlCol="0" anchor="ctr"/>
           <a:lstStyle/>
           <a:p>
-            <a:pPr algn="ctr" indent="0" marL="0">
+            <a:pPr marL="0" indent="0" algn="ctr">
               <a:buNone/>
             </a:pPr>
             <a:r>
@@ -15420,6 +15515,13 @@
           </a:solidFill>
           <a:ln/>
         </p:spPr>
+        <p:txBody>
+          <a:bodyPr/>
+          <a:lstStyle/>
+          <a:p>
+            <a:endParaRPr lang="en-US"/>
+          </a:p>
+        </p:txBody>
       </p:sp>
       <p:sp>
         <p:nvSpPr>
@@ -15442,7 +15544,7 @@
           <a:bodyPr wrap="square" lIns="0" tIns="0" rIns="0" bIns="0" rtlCol="0" anchor="ctr"/>
           <a:lstStyle/>
           <a:p>
-            <a:pPr algn="ctr" indent="0" marL="0">
+            <a:pPr marL="0" indent="0" algn="ctr">
               <a:buNone/>
             </a:pPr>
             <a:r>
@@ -15481,6 +15583,13 @@
           </a:solidFill>
           <a:ln/>
         </p:spPr>
+        <p:txBody>
+          <a:bodyPr/>
+          <a:lstStyle/>
+          <a:p>
+            <a:endParaRPr lang="en-US"/>
+          </a:p>
+        </p:txBody>
       </p:sp>
       <p:sp>
         <p:nvSpPr>
@@ -15503,7 +15612,7 @@
           <a:bodyPr wrap="square" lIns="0" tIns="0" rIns="0" bIns="0" rtlCol="0" anchor="ctr"/>
           <a:lstStyle/>
           <a:p>
-            <a:pPr algn="ctr" indent="0" marL="0">
+            <a:pPr marL="0" indent="0" algn="ctr">
               <a:buNone/>
             </a:pPr>
             <a:r>
@@ -15542,6 +15651,13 @@
           </a:solidFill>
           <a:ln/>
         </p:spPr>
+        <p:txBody>
+          <a:bodyPr/>
+          <a:lstStyle/>
+          <a:p>
+            <a:endParaRPr lang="en-US"/>
+          </a:p>
+        </p:txBody>
       </p:sp>
       <p:sp>
         <p:nvSpPr>
@@ -15564,7 +15680,7 @@
           <a:bodyPr wrap="square" lIns="0" tIns="0" rIns="0" bIns="0" rtlCol="0" anchor="ctr"/>
           <a:lstStyle/>
           <a:p>
-            <a:pPr algn="ctr" indent="0" marL="0">
+            <a:pPr marL="0" indent="0" algn="ctr">
               <a:buNone/>
             </a:pPr>
             <a:r>
@@ -15603,6 +15719,13 @@
           </a:solidFill>
           <a:ln/>
         </p:spPr>
+        <p:txBody>
+          <a:bodyPr/>
+          <a:lstStyle/>
+          <a:p>
+            <a:endParaRPr lang="en-US"/>
+          </a:p>
+        </p:txBody>
       </p:sp>
       <p:sp>
         <p:nvSpPr>
@@ -15625,7 +15748,7 @@
           <a:bodyPr wrap="square" lIns="0" tIns="0" rIns="0" bIns="0" rtlCol="0" anchor="ctr"/>
           <a:lstStyle/>
           <a:p>
-            <a:pPr algn="ctr" indent="0" marL="0">
+            <a:pPr marL="0" indent="0" algn="ctr">
               <a:buNone/>
             </a:pPr>
             <a:r>
@@ -15664,6 +15787,13 @@
           </a:solidFill>
           <a:ln/>
         </p:spPr>
+        <p:txBody>
+          <a:bodyPr/>
+          <a:lstStyle/>
+          <a:p>
+            <a:endParaRPr lang="en-US"/>
+          </a:p>
+        </p:txBody>
       </p:sp>
       <p:sp>
         <p:nvSpPr>
@@ -15686,7 +15816,7 @@
           <a:bodyPr wrap="square" lIns="0" tIns="0" rIns="0" bIns="0" rtlCol="0" anchor="ctr"/>
           <a:lstStyle/>
           <a:p>
-            <a:pPr algn="ctr" indent="0" marL="0">
+            <a:pPr marL="0" indent="0" algn="ctr">
               <a:buNone/>
             </a:pPr>
             <a:r>
@@ -15725,6 +15855,13 @@
           </a:solidFill>
           <a:ln/>
         </p:spPr>
+        <p:txBody>
+          <a:bodyPr/>
+          <a:lstStyle/>
+          <a:p>
+            <a:endParaRPr lang="en-US"/>
+          </a:p>
+        </p:txBody>
       </p:sp>
       <p:sp>
         <p:nvSpPr>
@@ -15747,7 +15884,7 @@
           <a:bodyPr wrap="square" lIns="0" tIns="0" rIns="0" bIns="0" rtlCol="0" anchor="ctr"/>
           <a:lstStyle/>
           <a:p>
-            <a:pPr algn="ctr" indent="0" marL="0">
+            <a:pPr marL="0" indent="0" algn="ctr">
               <a:buNone/>
             </a:pPr>
             <a:r>
@@ -15786,6 +15923,13 @@
           </a:solidFill>
           <a:ln/>
         </p:spPr>
+        <p:txBody>
+          <a:bodyPr/>
+          <a:lstStyle/>
+          <a:p>
+            <a:endParaRPr lang="en-US"/>
+          </a:p>
+        </p:txBody>
       </p:sp>
       <p:sp>
         <p:nvSpPr>
@@ -15808,7 +15952,7 @@
           <a:bodyPr wrap="square" lIns="0" tIns="0" rIns="0" bIns="0" rtlCol="0" anchor="ctr"/>
           <a:lstStyle/>
           <a:p>
-            <a:pPr algn="ctr" indent="0" marL="0">
+            <a:pPr marL="0" indent="0" algn="ctr">
               <a:buNone/>
             </a:pPr>
             <a:r>
@@ -15847,7 +15991,7 @@
           <a:bodyPr wrap="square" lIns="0" tIns="0" rIns="0" bIns="0" rtlCol="0" anchor="ctr"/>
           <a:lstStyle/>
           <a:p>
-            <a:pPr indent="0" marL="0">
+            <a:pPr marL="0" indent="0">
               <a:buNone/>
             </a:pPr>
             <a:r>
@@ -15886,7 +16030,7 @@
           <a:bodyPr wrap="square" lIns="0" tIns="0" rIns="0" bIns="0" rtlCol="0" anchor="ctr"/>
           <a:lstStyle/>
           <a:p>
-            <a:pPr indent="0" marL="0">
+            <a:pPr marL="0" indent="0">
               <a:buNone/>
             </a:pPr>
             <a:r>
@@ -15906,7 +16050,7 @@
       </p:sp>
       <p:sp>
         <p:nvSpPr>
-          <p:cNvPr id="25" name="Slide Number Placeholder 0"/>
+          <p:cNvPr id="4" name="Slide Number Placeholder 0"/>
           <p:cNvSpPr>
             <a:spLocks noGrp="1"/>
           </p:cNvSpPr>
@@ -15924,7 +16068,7 @@
           </a:prstGeom>
           <a:extLst>
             <a:ext uri="{C572A759-6A51-4108-AA02-DFA0A04FC94B}">
-              <ma14:wrappingTextBoxFlag xmlns:ma14="http://schemas.microsoft.com/office/mac/drawingml/2011/main" val="0"/>
+              <ma14:wrappingTextBoxFlag xmlns:ma14="http://schemas.microsoft.com/office/mac/drawingml/2011/main" xmlns="" val="0"/>
             </a:ext>
           </a:extLst>
         </p:spPr>
@@ -15945,7 +16089,7 @@
           <a:p>
             <a:pPr algn="l"/>
             <a:fld id="{F7021451-1387-4CA6-816F-3879F97B5CBC}" type="slidenum">
-              <a:rPr b="0" lang="en-US"/>
+              <a:rPr lang="en-US" b="0"/>
               <a:t>20</a:t>
             </a:fld>
             <a:endParaRPr lang="en-US"/>
@@ -15998,11 +16142,11 @@
           <a:bodyPr wrap="square" lIns="0" tIns="0" rIns="0" bIns="0" rtlCol="0" anchor="ctr"/>
           <a:lstStyle/>
           <a:p>
-            <a:pPr indent="0" marL="0">
-              <a:buNone/>
-            </a:pPr>
-            <a:r>
-              <a:rPr lang="en-US" sz="1200" spc="120" kern="0" dirty="0">
+            <a:pPr marL="0" indent="0">
+              <a:buNone/>
+            </a:pPr>
+            <a:r>
+              <a:rPr lang="en-US" sz="1200" kern="0" spc="120" dirty="0">
                 <a:solidFill>
                   <a:srgbClr val="8A5A10"/>
                 </a:solidFill>
@@ -16019,9 +16163,11 @@
       <p:sp>
         <p:nvSpPr>
           <p:cNvPr id="3" name="Text 0"/>
-          <p:cNvSpPr/>
+          <p:cNvSpPr>
+            <a:spLocks noGrp="1"/>
+          </p:cNvSpPr>
           <p:nvPr>
-            <p:ph idx="100" type="title" hasCustomPrompt="1"/>
+            <p:ph type="title" idx="100" hasCustomPrompt="1"/>
           </p:nvPr>
         </p:nvSpPr>
         <p:spPr>
@@ -16039,7 +16185,7 @@
           <a:bodyPr wrap="square" lIns="0" tIns="0" rIns="0" bIns="0" rtlCol="0" anchor="t"/>
           <a:lstStyle/>
           <a:p>
-            <a:pPr indent="0" marL="0">
+            <a:pPr marL="0" indent="0">
               <a:buNone/>
             </a:pPr>
             <a:r>
@@ -16078,13 +16224,20 @@
           </a:solidFill>
           <a:ln/>
           <a:effectLst>
-            <a:outerShdw sx="100000" sy="100000" kx="0" ky="0" algn="bl" rotWithShape="0" blurRad="177800" dist="38100" dir="5400000">
+            <a:outerShdw blurRad="177800" dist="38100" dir="5400000" algn="bl" rotWithShape="0">
               <a:srgbClr val="1A1E1B">
                 <a:alpha val="8000"/>
               </a:srgbClr>
             </a:outerShdw>
           </a:effectLst>
         </p:spPr>
+        <p:txBody>
+          <a:bodyPr/>
+          <a:lstStyle/>
+          <a:p>
+            <a:endParaRPr lang="en-US"/>
+          </a:p>
+        </p:txBody>
       </p:sp>
       <p:sp>
         <p:nvSpPr>
@@ -16107,7 +16260,7 @@
           <a:bodyPr wrap="square" lIns="0" tIns="0" rIns="0" bIns="0" rtlCol="0" anchor="ctr"/>
           <a:lstStyle/>
           <a:p>
-            <a:pPr indent="0" marL="0">
+            <a:pPr marL="0" indent="0">
               <a:buNone/>
             </a:pPr>
             <a:r>
@@ -16146,7 +16299,7 @@
           <a:bodyPr wrap="square" lIns="0" tIns="0" rIns="0" bIns="0" rtlCol="0" anchor="ctr"/>
           <a:lstStyle/>
           <a:p>
-            <a:pPr indent="0" marL="0">
+            <a:pPr marL="0" indent="0">
               <a:buNone/>
             </a:pPr>
             <a:r>
@@ -16185,13 +16338,20 @@
           </a:solidFill>
           <a:ln/>
           <a:effectLst>
-            <a:outerShdw sx="100000" sy="100000" kx="0" ky="0" algn="bl" rotWithShape="0" blurRad="177800" dist="38100" dir="5400000">
+            <a:outerShdw blurRad="177800" dist="38100" dir="5400000" algn="bl" rotWithShape="0">
               <a:srgbClr val="1A1E1B">
                 <a:alpha val="8000"/>
               </a:srgbClr>
             </a:outerShdw>
           </a:effectLst>
         </p:spPr>
+        <p:txBody>
+          <a:bodyPr/>
+          <a:lstStyle/>
+          <a:p>
+            <a:endParaRPr lang="en-US"/>
+          </a:p>
+        </p:txBody>
       </p:sp>
       <p:sp>
         <p:nvSpPr>
@@ -16214,7 +16374,7 @@
           <a:bodyPr wrap="square" lIns="0" tIns="0" rIns="0" bIns="0" rtlCol="0" anchor="ctr"/>
           <a:lstStyle/>
           <a:p>
-            <a:pPr indent="0" marL="0">
+            <a:pPr marL="0" indent="0">
               <a:buNone/>
             </a:pPr>
             <a:r>
@@ -16253,7 +16413,7 @@
           <a:bodyPr wrap="square" lIns="0" tIns="0" rIns="0" bIns="0" rtlCol="0" anchor="ctr"/>
           <a:lstStyle/>
           <a:p>
-            <a:pPr indent="0" marL="0">
+            <a:pPr marL="0" indent="0">
               <a:buNone/>
             </a:pPr>
             <a:r>
@@ -16292,13 +16452,20 @@
           </a:solidFill>
           <a:ln/>
           <a:effectLst>
-            <a:outerShdw sx="100000" sy="100000" kx="0" ky="0" algn="bl" rotWithShape="0" blurRad="177800" dist="38100" dir="5400000">
+            <a:outerShdw blurRad="177800" dist="38100" dir="5400000" algn="bl" rotWithShape="0">
               <a:srgbClr val="1A1E1B">
                 <a:alpha val="8000"/>
               </a:srgbClr>
             </a:outerShdw>
           </a:effectLst>
         </p:spPr>
+        <p:txBody>
+          <a:bodyPr/>
+          <a:lstStyle/>
+          <a:p>
+            <a:endParaRPr lang="en-US"/>
+          </a:p>
+        </p:txBody>
       </p:sp>
       <p:sp>
         <p:nvSpPr>
@@ -16321,7 +16488,7 @@
           <a:bodyPr wrap="square" lIns="0" tIns="0" rIns="0" bIns="0" rtlCol="0" anchor="ctr"/>
           <a:lstStyle/>
           <a:p>
-            <a:pPr indent="0" marL="0">
+            <a:pPr marL="0" indent="0">
               <a:buNone/>
             </a:pPr>
             <a:r>
@@ -16360,7 +16527,7 @@
           <a:bodyPr wrap="square" lIns="0" tIns="0" rIns="0" bIns="0" rtlCol="0" anchor="ctr"/>
           <a:lstStyle/>
           <a:p>
-            <a:pPr indent="0" marL="0">
+            <a:pPr marL="0" indent="0">
               <a:buNone/>
             </a:pPr>
             <a:r>
@@ -16399,13 +16566,20 @@
           </a:solidFill>
           <a:ln/>
           <a:effectLst>
-            <a:outerShdw sx="100000" sy="100000" kx="0" ky="0" algn="bl" rotWithShape="0" blurRad="177800" dist="38100" dir="5400000">
+            <a:outerShdw blurRad="177800" dist="38100" dir="5400000" algn="bl" rotWithShape="0">
               <a:srgbClr val="1A1E1B">
                 <a:alpha val="8000"/>
               </a:srgbClr>
             </a:outerShdw>
           </a:effectLst>
         </p:spPr>
+        <p:txBody>
+          <a:bodyPr/>
+          <a:lstStyle/>
+          <a:p>
+            <a:endParaRPr lang="en-US"/>
+          </a:p>
+        </p:txBody>
       </p:sp>
       <p:sp>
         <p:nvSpPr>
@@ -16428,7 +16602,7 @@
           <a:bodyPr wrap="square" lIns="0" tIns="0" rIns="0" bIns="0" rtlCol="0" anchor="ctr"/>
           <a:lstStyle/>
           <a:p>
-            <a:pPr indent="0" marL="0">
+            <a:pPr marL="0" indent="0">
               <a:buNone/>
             </a:pPr>
             <a:r>
@@ -16467,7 +16641,7 @@
           <a:bodyPr wrap="square" lIns="0" tIns="0" rIns="0" bIns="0" rtlCol="0" anchor="ctr"/>
           <a:lstStyle/>
           <a:p>
-            <a:pPr indent="0" marL="0">
+            <a:pPr marL="0" indent="0">
               <a:buNone/>
             </a:pPr>
             <a:r>
@@ -16506,13 +16680,20 @@
           </a:solidFill>
           <a:ln/>
           <a:effectLst>
-            <a:outerShdw sx="100000" sy="100000" kx="0" ky="0" algn="bl" rotWithShape="0" blurRad="177800" dist="38100" dir="5400000">
+            <a:outerShdw blurRad="177800" dist="38100" dir="5400000" algn="bl" rotWithShape="0">
               <a:srgbClr val="1A1E1B">
                 <a:alpha val="8000"/>
               </a:srgbClr>
             </a:outerShdw>
           </a:effectLst>
         </p:spPr>
+        <p:txBody>
+          <a:bodyPr/>
+          <a:lstStyle/>
+          <a:p>
+            <a:endParaRPr lang="en-US"/>
+          </a:p>
+        </p:txBody>
       </p:sp>
       <p:sp>
         <p:nvSpPr>
@@ -16535,7 +16716,7 @@
           <a:bodyPr wrap="square" lIns="0" tIns="0" rIns="0" bIns="0" rtlCol="0" anchor="ctr"/>
           <a:lstStyle/>
           <a:p>
-            <a:pPr indent="0" marL="0">
+            <a:pPr marL="0" indent="0">
               <a:buNone/>
             </a:pPr>
             <a:r>
@@ -16574,7 +16755,7 @@
           <a:bodyPr wrap="square" lIns="0" tIns="0" rIns="0" bIns="0" rtlCol="0" anchor="ctr"/>
           <a:lstStyle/>
           <a:p>
-            <a:pPr indent="0" marL="0">
+            <a:pPr marL="0" indent="0">
               <a:buNone/>
             </a:pPr>
             <a:r>
@@ -16613,13 +16794,20 @@
           </a:solidFill>
           <a:ln/>
           <a:effectLst>
-            <a:outerShdw sx="100000" sy="100000" kx="0" ky="0" algn="bl" rotWithShape="0" blurRad="177800" dist="38100" dir="5400000">
+            <a:outerShdw blurRad="177800" dist="38100" dir="5400000" algn="bl" rotWithShape="0">
               <a:srgbClr val="1A1E1B">
                 <a:alpha val="8000"/>
               </a:srgbClr>
             </a:outerShdw>
           </a:effectLst>
         </p:spPr>
+        <p:txBody>
+          <a:bodyPr/>
+          <a:lstStyle/>
+          <a:p>
+            <a:endParaRPr lang="en-US"/>
+          </a:p>
+        </p:txBody>
       </p:sp>
       <p:sp>
         <p:nvSpPr>
@@ -16642,7 +16830,7 @@
           <a:bodyPr wrap="square" lIns="0" tIns="0" rIns="0" bIns="0" rtlCol="0" anchor="ctr"/>
           <a:lstStyle/>
           <a:p>
-            <a:pPr indent="0" marL="0">
+            <a:pPr marL="0" indent="0">
               <a:buNone/>
             </a:pPr>
             <a:r>
@@ -16681,7 +16869,7 @@
           <a:bodyPr wrap="square" lIns="0" tIns="0" rIns="0" bIns="0" rtlCol="0" anchor="ctr"/>
           <a:lstStyle/>
           <a:p>
-            <a:pPr indent="0" marL="0">
+            <a:pPr marL="0" indent="0">
               <a:buNone/>
             </a:pPr>
             <a:r>
@@ -16720,7 +16908,7 @@
           <a:bodyPr wrap="square" lIns="0" tIns="0" rIns="0" bIns="0" rtlCol="0" anchor="ctr"/>
           <a:lstStyle/>
           <a:p>
-            <a:pPr indent="0" marL="0">
+            <a:pPr marL="0" indent="0">
               <a:buNone/>
             </a:pPr>
             <a:r>
@@ -16758,7 +16946,7 @@
           </a:prstGeom>
           <a:extLst>
             <a:ext uri="{C572A759-6A51-4108-AA02-DFA0A04FC94B}">
-              <ma14:wrappingTextBoxFlag xmlns:ma14="http://schemas.microsoft.com/office/mac/drawingml/2011/main" val="0"/>
+              <ma14:wrappingTextBoxFlag xmlns:ma14="http://schemas.microsoft.com/office/mac/drawingml/2011/main" xmlns="" val="0"/>
             </a:ext>
           </a:extLst>
         </p:spPr>
@@ -16779,7 +16967,7 @@
           <a:p>
             <a:pPr algn="l"/>
             <a:fld id="{F7021451-1387-4CA6-816F-3879F97B5CBC}" type="slidenum">
-              <a:rPr b="0" lang="en-US"/>
+              <a:rPr lang="en-US" b="0"/>
               <a:t>21</a:t>
             </a:fld>
             <a:endParaRPr lang="en-US"/>
@@ -16832,11 +17020,11 @@
           <a:bodyPr wrap="square" lIns="0" tIns="0" rIns="0" bIns="0" rtlCol="0" anchor="ctr"/>
           <a:lstStyle/>
           <a:p>
-            <a:pPr indent="0" marL="0">
-              <a:buNone/>
-            </a:pPr>
-            <a:r>
-              <a:rPr lang="en-US" sz="1200" spc="120" kern="0" dirty="0">
+            <a:pPr marL="0" indent="0">
+              <a:buNone/>
+            </a:pPr>
+            <a:r>
+              <a:rPr lang="en-US" sz="1200" kern="0" spc="120" dirty="0">
                 <a:solidFill>
                   <a:srgbClr val="8A5A10"/>
                 </a:solidFill>
@@ -16853,9 +17041,11 @@
       <p:sp>
         <p:nvSpPr>
           <p:cNvPr id="3" name="Text 0"/>
-          <p:cNvSpPr/>
+          <p:cNvSpPr>
+            <a:spLocks noGrp="1"/>
+          </p:cNvSpPr>
           <p:nvPr>
-            <p:ph idx="100" type="title" hasCustomPrompt="1"/>
+            <p:ph type="title" idx="100" hasCustomPrompt="1"/>
           </p:nvPr>
         </p:nvSpPr>
         <p:spPr>
@@ -16873,7 +17063,7 @@
           <a:bodyPr wrap="square" lIns="0" tIns="0" rIns="0" bIns="0" rtlCol="0" anchor="t"/>
           <a:lstStyle/>
           <a:p>
-            <a:pPr indent="0" marL="0">
+            <a:pPr marL="0" indent="0">
               <a:buNone/>
             </a:pPr>
             <a:r>
@@ -16907,16 +17097,34 @@
         </p:nvGraphicFramePr>
         <p:xfrm>
           <a:off x="502920" y="1463040"/>
-          <a:ext cx="11155680" cy="4663440"/>
+          <a:ext cx="11155680" cy="4663442"/>
         </p:xfrm>
         <a:graphic>
           <a:graphicData uri="http://schemas.openxmlformats.org/drawingml/2006/table">
             <a:tbl>
               <a:tblPr/>
               <a:tblGrid>
-                <a:gridCol w="2194560"/>
-                <a:gridCol w="1828800"/>
-                <a:gridCol w="7132320"/>
+                <a:gridCol w="2194560">
+                  <a:extLst>
+                    <a:ext uri="{9D8B030D-6E8A-4147-A177-3AD203B41FA5}">
+                      <a16:colId xmlns:a16="http://schemas.microsoft.com/office/drawing/2014/main" val="20000"/>
+                    </a:ext>
+                  </a:extLst>
+                </a:gridCol>
+                <a:gridCol w="1828800">
+                  <a:extLst>
+                    <a:ext uri="{9D8B030D-6E8A-4147-A177-3AD203B41FA5}">
+                      <a16:colId xmlns:a16="http://schemas.microsoft.com/office/drawing/2014/main" val="20001"/>
+                    </a:ext>
+                  </a:extLst>
+                </a:gridCol>
+                <a:gridCol w="7132320">
+                  <a:extLst>
+                    <a:ext uri="{9D8B030D-6E8A-4147-A177-3AD203B41FA5}">
+                      <a16:colId xmlns:a16="http://schemas.microsoft.com/office/drawing/2014/main" val="20002"/>
+                    </a:ext>
+                  </a:extLst>
+                </a:gridCol>
               </a:tblGrid>
               <a:tr h="666206">
                 <a:tc>
@@ -16924,7 +17132,7 @@
                     <a:bodyPr/>
                     <a:lstStyle/>
                     <a:p>
-                      <a:pPr indent="0" marL="0">
+                      <a:pPr marL="0" indent="0">
                         <a:buNone/>
                       </a:pPr>
                       <a:r>
@@ -16945,7 +17153,7 @@
                       </a:endParaRPr>
                     </a:p>
                   </a:txBody>
-                  <a:tcPr marL="91440" marR="91440" marT="45720" marB="45720" anchor="ctr">
+                  <a:tcPr anchor="ctr">
                     <a:lnL w="6350" cap="flat" cmpd="sng" algn="ctr">
                       <a:solidFill>
                         <a:srgbClr val="DDD6C8"/>
@@ -16992,7 +17200,7 @@
                     <a:bodyPr/>
                     <a:lstStyle/>
                     <a:p>
-                      <a:pPr indent="0" marL="0">
+                      <a:pPr marL="0" indent="0">
                         <a:buNone/>
                       </a:pPr>
                       <a:r>
@@ -17013,7 +17221,7 @@
                       </a:endParaRPr>
                     </a:p>
                   </a:txBody>
-                  <a:tcPr marL="91440" marR="91440" marT="45720" marB="45720" anchor="ctr">
+                  <a:tcPr anchor="ctr">
                     <a:lnL w="6350" cap="flat" cmpd="sng" algn="ctr">
                       <a:solidFill>
                         <a:srgbClr val="DDD6C8"/>
@@ -17060,7 +17268,7 @@
                     <a:bodyPr/>
                     <a:lstStyle/>
                     <a:p>
-                      <a:pPr indent="0" marL="0">
+                      <a:pPr marL="0" indent="0">
                         <a:buNone/>
                       </a:pPr>
                       <a:r>
@@ -17081,7 +17289,7 @@
                       </a:endParaRPr>
                     </a:p>
                   </a:txBody>
-                  <a:tcPr marL="91440" marR="91440" marT="45720" marB="45720" anchor="ctr">
+                  <a:tcPr anchor="ctr">
                     <a:lnL w="6350" cap="flat" cmpd="sng" algn="ctr">
                       <a:solidFill>
                         <a:srgbClr val="DDD6C8"/>
@@ -17123,6 +17331,11 @@
                     </a:solidFill>
                   </a:tcPr>
                 </a:tc>
+                <a:extLst>
+                  <a:ext uri="{0D108BD9-81ED-4DB2-BD59-A6C34878D82A}">
+                    <a16:rowId xmlns:a16="http://schemas.microsoft.com/office/drawing/2014/main" val="10000"/>
+                  </a:ext>
+                </a:extLst>
               </a:tr>
               <a:tr h="666206">
                 <a:tc>
@@ -17130,7 +17343,7 @@
                     <a:bodyPr/>
                     <a:lstStyle/>
                     <a:p>
-                      <a:pPr indent="0" marL="0">
+                      <a:pPr marL="0" indent="0">
                         <a:buNone/>
                       </a:pPr>
                       <a:r>
@@ -17151,7 +17364,7 @@
                       </a:endParaRPr>
                     </a:p>
                   </a:txBody>
-                  <a:tcPr marL="91440" marR="91440" marT="45720" marB="45720" anchor="ctr">
+                  <a:tcPr anchor="ctr">
                     <a:lnL w="6350" cap="flat" cmpd="sng" algn="ctr">
                       <a:solidFill>
                         <a:srgbClr val="DDD6C8"/>
@@ -17198,7 +17411,7 @@
                     <a:bodyPr/>
                     <a:lstStyle/>
                     <a:p>
-                      <a:pPr indent="0" marL="0">
+                      <a:pPr marL="0" indent="0">
                         <a:buNone/>
                       </a:pPr>
                       <a:r>
@@ -17219,7 +17432,7 @@
                       </a:endParaRPr>
                     </a:p>
                   </a:txBody>
-                  <a:tcPr marL="91440" marR="91440" marT="45720" marB="45720" anchor="ctr">
+                  <a:tcPr anchor="ctr">
                     <a:lnL w="6350" cap="flat" cmpd="sng" algn="ctr">
                       <a:solidFill>
                         <a:srgbClr val="DDD6C8"/>
@@ -17266,7 +17479,7 @@
                     <a:bodyPr/>
                     <a:lstStyle/>
                     <a:p>
-                      <a:pPr indent="0" marL="0">
+                      <a:pPr marL="0" indent="0">
                         <a:buNone/>
                       </a:pPr>
                       <a:r>
@@ -17287,7 +17500,7 @@
                       </a:endParaRPr>
                     </a:p>
                   </a:txBody>
-                  <a:tcPr marL="91440" marR="91440" marT="45720" marB="45720" anchor="ctr">
+                  <a:tcPr anchor="ctr">
                     <a:lnL w="6350" cap="flat" cmpd="sng" algn="ctr">
                       <a:solidFill>
                         <a:srgbClr val="DDD6C8"/>
@@ -17329,6 +17542,11 @@
                     </a:solidFill>
                   </a:tcPr>
                 </a:tc>
+                <a:extLst>
+                  <a:ext uri="{0D108BD9-81ED-4DB2-BD59-A6C34878D82A}">
+                    <a16:rowId xmlns:a16="http://schemas.microsoft.com/office/drawing/2014/main" val="10001"/>
+                  </a:ext>
+                </a:extLst>
               </a:tr>
               <a:tr h="666206">
                 <a:tc>
@@ -17336,7 +17554,7 @@
                     <a:bodyPr/>
                     <a:lstStyle/>
                     <a:p>
-                      <a:pPr indent="0" marL="0">
+                      <a:pPr marL="0" indent="0">
                         <a:buNone/>
                       </a:pPr>
                       <a:r>
@@ -17357,7 +17575,7 @@
                       </a:endParaRPr>
                     </a:p>
                   </a:txBody>
-                  <a:tcPr marL="91440" marR="91440" marT="45720" marB="45720" anchor="ctr">
+                  <a:tcPr anchor="ctr">
                     <a:lnL w="6350" cap="flat" cmpd="sng" algn="ctr">
                       <a:solidFill>
                         <a:srgbClr val="DDD6C8"/>
@@ -17404,7 +17622,7 @@
                     <a:bodyPr/>
                     <a:lstStyle/>
                     <a:p>
-                      <a:pPr indent="0" marL="0">
+                      <a:pPr marL="0" indent="0">
                         <a:buNone/>
                       </a:pPr>
                       <a:r>
@@ -17425,7 +17643,7 @@
                       </a:endParaRPr>
                     </a:p>
                   </a:txBody>
-                  <a:tcPr marL="91440" marR="91440" marT="45720" marB="45720" anchor="ctr">
+                  <a:tcPr anchor="ctr">
                     <a:lnL w="6350" cap="flat" cmpd="sng" algn="ctr">
                       <a:solidFill>
                         <a:srgbClr val="DDD6C8"/>
@@ -17472,7 +17690,7 @@
                     <a:bodyPr/>
                     <a:lstStyle/>
                     <a:p>
-                      <a:pPr indent="0" marL="0">
+                      <a:pPr marL="0" indent="0">
                         <a:buNone/>
                       </a:pPr>
                       <a:r>
@@ -17493,7 +17711,7 @@
                       </a:endParaRPr>
                     </a:p>
                   </a:txBody>
-                  <a:tcPr marL="91440" marR="91440" marT="45720" marB="45720" anchor="ctr">
+                  <a:tcPr anchor="ctr">
                     <a:lnL w="6350" cap="flat" cmpd="sng" algn="ctr">
                       <a:solidFill>
                         <a:srgbClr val="DDD6C8"/>
@@ -17535,6 +17753,11 @@
                     </a:solidFill>
                   </a:tcPr>
                 </a:tc>
+                <a:extLst>
+                  <a:ext uri="{0D108BD9-81ED-4DB2-BD59-A6C34878D82A}">
+                    <a16:rowId xmlns:a16="http://schemas.microsoft.com/office/drawing/2014/main" val="10002"/>
+                  </a:ext>
+                </a:extLst>
               </a:tr>
               <a:tr h="666206">
                 <a:tc>
@@ -17542,7 +17765,7 @@
                     <a:bodyPr/>
                     <a:lstStyle/>
                     <a:p>
-                      <a:pPr indent="0" marL="0">
+                      <a:pPr marL="0" indent="0">
                         <a:buNone/>
                       </a:pPr>
                       <a:r>
@@ -17563,7 +17786,7 @@
                       </a:endParaRPr>
                     </a:p>
                   </a:txBody>
-                  <a:tcPr marL="91440" marR="91440" marT="45720" marB="45720" anchor="ctr">
+                  <a:tcPr anchor="ctr">
                     <a:lnL w="6350" cap="flat" cmpd="sng" algn="ctr">
                       <a:solidFill>
                         <a:srgbClr val="DDD6C8"/>
@@ -17610,7 +17833,7 @@
                     <a:bodyPr/>
                     <a:lstStyle/>
                     <a:p>
-                      <a:pPr indent="0" marL="0">
+                      <a:pPr marL="0" indent="0">
                         <a:buNone/>
                       </a:pPr>
                       <a:r>
@@ -17631,7 +17854,7 @@
                       </a:endParaRPr>
                     </a:p>
                   </a:txBody>
-                  <a:tcPr marL="91440" marR="91440" marT="45720" marB="45720" anchor="ctr">
+                  <a:tcPr anchor="ctr">
                     <a:lnL w="6350" cap="flat" cmpd="sng" algn="ctr">
                       <a:solidFill>
                         <a:srgbClr val="DDD6C8"/>
@@ -17678,7 +17901,7 @@
                     <a:bodyPr/>
                     <a:lstStyle/>
                     <a:p>
-                      <a:pPr indent="0" marL="0">
+                      <a:pPr marL="0" indent="0">
                         <a:buNone/>
                       </a:pPr>
                       <a:r>
@@ -17699,7 +17922,7 @@
                       </a:endParaRPr>
                     </a:p>
                   </a:txBody>
-                  <a:tcPr marL="91440" marR="91440" marT="45720" marB="45720" anchor="ctr">
+                  <a:tcPr anchor="ctr">
                     <a:lnL w="6350" cap="flat" cmpd="sng" algn="ctr">
                       <a:solidFill>
                         <a:srgbClr val="DDD6C8"/>
@@ -17741,6 +17964,11 @@
                     </a:solidFill>
                   </a:tcPr>
                 </a:tc>
+                <a:extLst>
+                  <a:ext uri="{0D108BD9-81ED-4DB2-BD59-A6C34878D82A}">
+                    <a16:rowId xmlns:a16="http://schemas.microsoft.com/office/drawing/2014/main" val="10003"/>
+                  </a:ext>
+                </a:extLst>
               </a:tr>
               <a:tr h="666206">
                 <a:tc>
@@ -17748,7 +17976,7 @@
                     <a:bodyPr/>
                     <a:lstStyle/>
                     <a:p>
-                      <a:pPr indent="0" marL="0">
+                      <a:pPr marL="0" indent="0">
                         <a:buNone/>
                       </a:pPr>
                       <a:r>
@@ -17769,7 +17997,7 @@
                       </a:endParaRPr>
                     </a:p>
                   </a:txBody>
-                  <a:tcPr marL="91440" marR="91440" marT="45720" marB="45720" anchor="ctr">
+                  <a:tcPr anchor="ctr">
                     <a:lnL w="6350" cap="flat" cmpd="sng" algn="ctr">
                       <a:solidFill>
                         <a:srgbClr val="DDD6C8"/>
@@ -17816,7 +18044,7 @@
                     <a:bodyPr/>
                     <a:lstStyle/>
                     <a:p>
-                      <a:pPr indent="0" marL="0">
+                      <a:pPr marL="0" indent="0">
                         <a:buNone/>
                       </a:pPr>
                       <a:r>
@@ -17837,7 +18065,7 @@
                       </a:endParaRPr>
                     </a:p>
                   </a:txBody>
-                  <a:tcPr marL="91440" marR="91440" marT="45720" marB="45720" anchor="ctr">
+                  <a:tcPr anchor="ctr">
                     <a:lnL w="6350" cap="flat" cmpd="sng" algn="ctr">
                       <a:solidFill>
                         <a:srgbClr val="DDD6C8"/>
@@ -17884,7 +18112,7 @@
                     <a:bodyPr/>
                     <a:lstStyle/>
                     <a:p>
-                      <a:pPr indent="0" marL="0">
+                      <a:pPr marL="0" indent="0">
                         <a:buNone/>
                       </a:pPr>
                       <a:r>
@@ -17905,7 +18133,7 @@
                       </a:endParaRPr>
                     </a:p>
                   </a:txBody>
-                  <a:tcPr marL="91440" marR="91440" marT="45720" marB="45720" anchor="ctr">
+                  <a:tcPr anchor="ctr">
                     <a:lnL w="6350" cap="flat" cmpd="sng" algn="ctr">
                       <a:solidFill>
                         <a:srgbClr val="DDD6C8"/>
@@ -17947,6 +18175,11 @@
                     </a:solidFill>
                   </a:tcPr>
                 </a:tc>
+                <a:extLst>
+                  <a:ext uri="{0D108BD9-81ED-4DB2-BD59-A6C34878D82A}">
+                    <a16:rowId xmlns:a16="http://schemas.microsoft.com/office/drawing/2014/main" val="10004"/>
+                  </a:ext>
+                </a:extLst>
               </a:tr>
               <a:tr h="666206">
                 <a:tc>
@@ -17954,7 +18187,7 @@
                     <a:bodyPr/>
                     <a:lstStyle/>
                     <a:p>
-                      <a:pPr indent="0" marL="0">
+                      <a:pPr marL="0" indent="0">
                         <a:buNone/>
                       </a:pPr>
                       <a:r>
@@ -17975,7 +18208,7 @@
                       </a:endParaRPr>
                     </a:p>
                   </a:txBody>
-                  <a:tcPr marL="91440" marR="91440" marT="45720" marB="45720" anchor="ctr">
+                  <a:tcPr anchor="ctr">
                     <a:lnL w="6350" cap="flat" cmpd="sng" algn="ctr">
                       <a:solidFill>
                         <a:srgbClr val="DDD6C8"/>
@@ -18022,7 +18255,7 @@
                     <a:bodyPr/>
                     <a:lstStyle/>
                     <a:p>
-                      <a:pPr indent="0" marL="0">
+                      <a:pPr marL="0" indent="0">
                         <a:buNone/>
                       </a:pPr>
                       <a:r>
@@ -18043,7 +18276,7 @@
                       </a:endParaRPr>
                     </a:p>
                   </a:txBody>
-                  <a:tcPr marL="91440" marR="91440" marT="45720" marB="45720" anchor="ctr">
+                  <a:tcPr anchor="ctr">
                     <a:lnL w="6350" cap="flat" cmpd="sng" algn="ctr">
                       <a:solidFill>
                         <a:srgbClr val="DDD6C8"/>
@@ -18090,7 +18323,7 @@
                     <a:bodyPr/>
                     <a:lstStyle/>
                     <a:p>
-                      <a:pPr indent="0" marL="0">
+                      <a:pPr marL="0" indent="0">
                         <a:buNone/>
                       </a:pPr>
                       <a:r>
@@ -18111,7 +18344,7 @@
                       </a:endParaRPr>
                     </a:p>
                   </a:txBody>
-                  <a:tcPr marL="91440" marR="91440" marT="45720" marB="45720" anchor="ctr">
+                  <a:tcPr anchor="ctr">
                     <a:lnL w="6350" cap="flat" cmpd="sng" algn="ctr">
                       <a:solidFill>
                         <a:srgbClr val="DDD6C8"/>
@@ -18153,6 +18386,11 @@
                     </a:solidFill>
                   </a:tcPr>
                 </a:tc>
+                <a:extLst>
+                  <a:ext uri="{0D108BD9-81ED-4DB2-BD59-A6C34878D82A}">
+                    <a16:rowId xmlns:a16="http://schemas.microsoft.com/office/drawing/2014/main" val="10005"/>
+                  </a:ext>
+                </a:extLst>
               </a:tr>
               <a:tr h="666206">
                 <a:tc>
@@ -18160,7 +18398,7 @@
                     <a:bodyPr/>
                     <a:lstStyle/>
                     <a:p>
-                      <a:pPr indent="0" marL="0">
+                      <a:pPr marL="0" indent="0">
                         <a:buNone/>
                       </a:pPr>
                       <a:r>
@@ -18181,7 +18419,7 @@
                       </a:endParaRPr>
                     </a:p>
                   </a:txBody>
-                  <a:tcPr marL="91440" marR="91440" marT="45720" marB="45720" anchor="ctr">
+                  <a:tcPr anchor="ctr">
                     <a:lnL w="6350" cap="flat" cmpd="sng" algn="ctr">
                       <a:solidFill>
                         <a:srgbClr val="DDD6C8"/>
@@ -18228,7 +18466,7 @@
                     <a:bodyPr/>
                     <a:lstStyle/>
                     <a:p>
-                      <a:pPr indent="0" marL="0">
+                      <a:pPr marL="0" indent="0">
                         <a:buNone/>
                       </a:pPr>
                       <a:r>
@@ -18249,7 +18487,7 @@
                       </a:endParaRPr>
                     </a:p>
                   </a:txBody>
-                  <a:tcPr marL="91440" marR="91440" marT="45720" marB="45720" anchor="ctr">
+                  <a:tcPr anchor="ctr">
                     <a:lnL w="6350" cap="flat" cmpd="sng" algn="ctr">
                       <a:solidFill>
                         <a:srgbClr val="DDD6C8"/>
@@ -18296,7 +18534,7 @@
                     <a:bodyPr/>
                     <a:lstStyle/>
                     <a:p>
-                      <a:pPr indent="0" marL="0">
+                      <a:pPr marL="0" indent="0">
                         <a:buNone/>
                       </a:pPr>
                       <a:r>
@@ -18317,7 +18555,7 @@
                       </a:endParaRPr>
                     </a:p>
                   </a:txBody>
-                  <a:tcPr marL="91440" marR="91440" marT="45720" marB="45720" anchor="ctr">
+                  <a:tcPr anchor="ctr">
                     <a:lnL w="6350" cap="flat" cmpd="sng" algn="ctr">
                       <a:solidFill>
                         <a:srgbClr val="DDD6C8"/>
@@ -18359,6 +18597,11 @@
                     </a:solidFill>
                   </a:tcPr>
                 </a:tc>
+                <a:extLst>
+                  <a:ext uri="{0D108BD9-81ED-4DB2-BD59-A6C34878D82A}">
+                    <a16:rowId xmlns:a16="http://schemas.microsoft.com/office/drawing/2014/main" val="10006"/>
+                  </a:ext>
+                </a:extLst>
               </a:tr>
             </a:tbl>
           </a:graphicData>
@@ -18384,7 +18627,7 @@
           </a:prstGeom>
           <a:extLst>
             <a:ext uri="{C572A759-6A51-4108-AA02-DFA0A04FC94B}">
-              <ma14:wrappingTextBoxFlag xmlns:ma14="http://schemas.microsoft.com/office/mac/drawingml/2011/main" val="0"/>
+              <ma14:wrappingTextBoxFlag xmlns:ma14="http://schemas.microsoft.com/office/mac/drawingml/2011/main" xmlns="" val="0"/>
             </a:ext>
           </a:extLst>
         </p:spPr>
@@ -18405,7 +18648,7 @@
           <a:p>
             <a:pPr algn="l"/>
             <a:fld id="{F7021451-1387-4CA6-816F-3879F97B5CBC}" type="slidenum">
-              <a:rPr b="0" lang="en-US"/>
+              <a:rPr lang="en-US" b="0"/>
               <a:t>22</a:t>
             </a:fld>
             <a:endParaRPr lang="en-US"/>
@@ -18458,11 +18701,11 @@
           <a:bodyPr wrap="square" lIns="0" tIns="0" rIns="0" bIns="0" rtlCol="0" anchor="ctr"/>
           <a:lstStyle/>
           <a:p>
-            <a:pPr indent="0" marL="0">
-              <a:buNone/>
-            </a:pPr>
-            <a:r>
-              <a:rPr lang="en-US" sz="1200" spc="120" kern="0" dirty="0">
+            <a:pPr marL="0" indent="0">
+              <a:buNone/>
+            </a:pPr>
+            <a:r>
+              <a:rPr lang="en-US" sz="1200" kern="0" spc="120" dirty="0">
                 <a:solidFill>
                   <a:srgbClr val="8A5A10"/>
                 </a:solidFill>
@@ -18479,9 +18722,11 @@
       <p:sp>
         <p:nvSpPr>
           <p:cNvPr id="3" name="Text 0"/>
-          <p:cNvSpPr/>
+          <p:cNvSpPr>
+            <a:spLocks noGrp="1"/>
+          </p:cNvSpPr>
           <p:nvPr>
-            <p:ph idx="100" type="title" hasCustomPrompt="1"/>
+            <p:ph type="title" idx="100" hasCustomPrompt="1"/>
           </p:nvPr>
         </p:nvSpPr>
         <p:spPr>
@@ -18499,7 +18744,7 @@
           <a:bodyPr wrap="square" lIns="0" tIns="0" rIns="0" bIns="0" rtlCol="0" anchor="t"/>
           <a:lstStyle/>
           <a:p>
-            <a:pPr indent="0" marL="0">
+            <a:pPr marL="0" indent="0">
               <a:buNone/>
             </a:pPr>
             <a:r>
@@ -18538,7 +18783,7 @@
           <a:bodyPr wrap="square" lIns="0" tIns="0" rIns="0" bIns="0" rtlCol="0" anchor="ctr"/>
           <a:lstStyle/>
           <a:p>
-            <a:pPr indent="0" marL="0">
+            <a:pPr marL="0" indent="0">
               <a:buNone/>
             </a:pPr>
             <a:r>
@@ -18577,7 +18822,7 @@
           <a:bodyPr wrap="square" lIns="0" tIns="0" rIns="0" bIns="0" rtlCol="0" anchor="ctr"/>
           <a:lstStyle/>
           <a:p>
-            <a:pPr indent="0" marL="0">
+            <a:pPr marL="0" indent="0">
               <a:buNone/>
             </a:pPr>
             <a:r>
@@ -18616,7 +18861,7 @@
           <a:bodyPr wrap="square" lIns="0" tIns="0" rIns="0" bIns="0" rtlCol="0" anchor="ctr"/>
           <a:lstStyle/>
           <a:p>
-            <a:pPr indent="0" marL="0">
+            <a:pPr marL="0" indent="0">
               <a:buNone/>
             </a:pPr>
             <a:r>
@@ -18655,7 +18900,7 @@
           <a:bodyPr wrap="square" lIns="0" tIns="0" rIns="0" bIns="0" rtlCol="0" anchor="ctr"/>
           <a:lstStyle/>
           <a:p>
-            <a:pPr indent="0" marL="0">
+            <a:pPr marL="0" indent="0">
               <a:buNone/>
             </a:pPr>
             <a:r>
@@ -18694,13 +18939,20 @@
           </a:solidFill>
           <a:ln/>
           <a:effectLst>
-            <a:outerShdw sx="100000" sy="100000" kx="0" ky="0" algn="bl" rotWithShape="0" blurRad="177800" dist="38100" dir="5400000">
+            <a:outerShdw blurRad="177800" dist="38100" dir="5400000" algn="bl" rotWithShape="0">
               <a:srgbClr val="1A1E1B">
                 <a:alpha val="8000"/>
               </a:srgbClr>
             </a:outerShdw>
           </a:effectLst>
         </p:spPr>
+        <p:txBody>
+          <a:bodyPr/>
+          <a:lstStyle/>
+          <a:p>
+            <a:endParaRPr lang="en-US"/>
+          </a:p>
+        </p:txBody>
       </p:sp>
       <p:sp>
         <p:nvSpPr>
@@ -18723,7 +18975,7 @@
           <a:bodyPr wrap="square" lIns="0" tIns="0" rIns="0" bIns="0" rtlCol="0" anchor="ctr"/>
           <a:lstStyle/>
           <a:p>
-            <a:pPr indent="0" marL="0">
+            <a:pPr marL="0" indent="0">
               <a:buNone/>
             </a:pPr>
             <a:r>
@@ -18762,7 +19014,7 @@
           <a:bodyPr wrap="square" lIns="0" tIns="0" rIns="0" bIns="0" rtlCol="0" anchor="ctr"/>
           <a:lstStyle/>
           <a:p>
-            <a:pPr indent="0" marL="0">
+            <a:pPr marL="0" indent="0">
               <a:buNone/>
             </a:pPr>
             <a:r>
@@ -18801,13 +19053,20 @@
           </a:solidFill>
           <a:ln/>
           <a:effectLst>
-            <a:outerShdw sx="100000" sy="100000" kx="0" ky="0" algn="bl" rotWithShape="0" blurRad="177800" dist="38100" dir="5400000">
+            <a:outerShdw blurRad="177800" dist="38100" dir="5400000" algn="bl" rotWithShape="0">
               <a:srgbClr val="1A1E1B">
                 <a:alpha val="8000"/>
               </a:srgbClr>
             </a:outerShdw>
           </a:effectLst>
         </p:spPr>
+        <p:txBody>
+          <a:bodyPr/>
+          <a:lstStyle/>
+          <a:p>
+            <a:endParaRPr lang="en-US"/>
+          </a:p>
+        </p:txBody>
       </p:sp>
       <p:sp>
         <p:nvSpPr>
@@ -18830,7 +19089,7 @@
           <a:bodyPr wrap="square" lIns="0" tIns="0" rIns="0" bIns="0" rtlCol="0" anchor="ctr"/>
           <a:lstStyle/>
           <a:p>
-            <a:pPr indent="0" marL="0">
+            <a:pPr marL="0" indent="0">
               <a:buNone/>
             </a:pPr>
             <a:r>
@@ -18869,7 +19128,7 @@
           <a:bodyPr wrap="square" lIns="0" tIns="0" rIns="0" bIns="0" rtlCol="0" anchor="ctr"/>
           <a:lstStyle/>
           <a:p>
-            <a:pPr indent="0" marL="0">
+            <a:pPr marL="0" indent="0">
               <a:buNone/>
             </a:pPr>
             <a:r>
@@ -18908,13 +19167,20 @@
           </a:solidFill>
           <a:ln/>
           <a:effectLst>
-            <a:outerShdw sx="100000" sy="100000" kx="0" ky="0" algn="bl" rotWithShape="0" blurRad="177800" dist="38100" dir="5400000">
+            <a:outerShdw blurRad="177800" dist="38100" dir="5400000" algn="bl" rotWithShape="0">
               <a:srgbClr val="1A1E1B">
                 <a:alpha val="8000"/>
               </a:srgbClr>
             </a:outerShdw>
           </a:effectLst>
         </p:spPr>
+        <p:txBody>
+          <a:bodyPr/>
+          <a:lstStyle/>
+          <a:p>
+            <a:endParaRPr lang="en-US"/>
+          </a:p>
+        </p:txBody>
       </p:sp>
       <p:sp>
         <p:nvSpPr>
@@ -18937,7 +19203,7 @@
           <a:bodyPr wrap="square" lIns="0" tIns="0" rIns="0" bIns="0" rtlCol="0" anchor="ctr"/>
           <a:lstStyle/>
           <a:p>
-            <a:pPr indent="0" marL="0">
+            <a:pPr marL="0" indent="0">
               <a:buNone/>
             </a:pPr>
             <a:r>
@@ -18976,7 +19242,7 @@
           <a:bodyPr wrap="square" lIns="0" tIns="0" rIns="0" bIns="0" rtlCol="0" anchor="ctr"/>
           <a:lstStyle/>
           <a:p>
-            <a:pPr indent="0" marL="0">
+            <a:pPr marL="0" indent="0">
               <a:buNone/>
             </a:pPr>
             <a:r>
@@ -19015,7 +19281,7 @@
           <a:bodyPr wrap="square" lIns="0" tIns="0" rIns="0" bIns="0" rtlCol="0" anchor="ctr"/>
           <a:lstStyle/>
           <a:p>
-            <a:pPr indent="0" marL="0">
+            <a:pPr marL="0" indent="0">
               <a:buNone/>
             </a:pPr>
             <a:r>
@@ -19053,7 +19319,7 @@
           </a:prstGeom>
           <a:extLst>
             <a:ext uri="{C572A759-6A51-4108-AA02-DFA0A04FC94B}">
-              <ma14:wrappingTextBoxFlag xmlns:ma14="http://schemas.microsoft.com/office/mac/drawingml/2011/main" val="0"/>
+              <ma14:wrappingTextBoxFlag xmlns:ma14="http://schemas.microsoft.com/office/mac/drawingml/2011/main" xmlns="" val="0"/>
             </a:ext>
           </a:extLst>
         </p:spPr>
@@ -19074,7 +19340,7 @@
           <a:p>
             <a:pPr algn="l"/>
             <a:fld id="{F7021451-1387-4CA6-816F-3879F97B5CBC}" type="slidenum">
-              <a:rPr b="0" lang="en-US"/>
+              <a:rPr lang="en-US" b="0"/>
               <a:t>23</a:t>
             </a:fld>
             <a:endParaRPr lang="en-US"/>
@@ -19127,11 +19393,11 @@
           <a:bodyPr wrap="square" lIns="0" tIns="0" rIns="0" bIns="0" rtlCol="0" anchor="ctr"/>
           <a:lstStyle/>
           <a:p>
-            <a:pPr indent="0" marL="0">
-              <a:buNone/>
-            </a:pPr>
-            <a:r>
-              <a:rPr lang="en-US" sz="1300" spc="120" kern="0" dirty="0">
+            <a:pPr marL="0" indent="0">
+              <a:buNone/>
+            </a:pPr>
+            <a:r>
+              <a:rPr lang="en-US" sz="1300" kern="0" spc="120" dirty="0">
                 <a:solidFill>
                   <a:srgbClr val="F0C56A"/>
                 </a:solidFill>
@@ -19148,9 +19414,11 @@
       <p:sp>
         <p:nvSpPr>
           <p:cNvPr id="3" name="Text 0"/>
-          <p:cNvSpPr/>
+          <p:cNvSpPr>
+            <a:spLocks noGrp="1"/>
+          </p:cNvSpPr>
           <p:nvPr>
-            <p:ph idx="100" type="title" hasCustomPrompt="1"/>
+            <p:ph type="title" idx="100" hasCustomPrompt="1"/>
           </p:nvPr>
         </p:nvSpPr>
         <p:spPr>
@@ -19168,7 +19436,7 @@
           <a:bodyPr wrap="square" lIns="0" tIns="0" rIns="0" bIns="0" rtlCol="0"/>
           <a:lstStyle/>
           <a:p>
-            <a:pPr indent="0" marL="0">
+            <a:pPr marL="0" indent="0">
               <a:buNone/>
             </a:pPr>
             <a:r>
@@ -19207,6 +19475,13 @@
           </a:solidFill>
           <a:ln/>
         </p:spPr>
+        <p:txBody>
+          <a:bodyPr/>
+          <a:lstStyle/>
+          <a:p>
+            <a:endParaRPr lang="en-US"/>
+          </a:p>
+        </p:txBody>
       </p:sp>
       <p:sp>
         <p:nvSpPr>
@@ -19229,7 +19504,7 @@
           <a:bodyPr wrap="square" lIns="0" tIns="0" rIns="0" bIns="0" rtlCol="0" anchor="ctr"/>
           <a:lstStyle/>
           <a:p>
-            <a:pPr indent="0" marL="0">
+            <a:pPr marL="0" indent="0">
               <a:buNone/>
             </a:pPr>
             <a:r>
@@ -19268,7 +19543,7 @@
           <a:bodyPr wrap="square" lIns="0" tIns="0" rIns="0" bIns="0" rtlCol="0" anchor="ctr"/>
           <a:lstStyle/>
           <a:p>
-            <a:pPr indent="0" marL="0">
+            <a:pPr marL="0" indent="0">
               <a:buNone/>
             </a:pPr>
             <a:r>
@@ -19307,6 +19582,13 @@
           </a:solidFill>
           <a:ln/>
         </p:spPr>
+        <p:txBody>
+          <a:bodyPr/>
+          <a:lstStyle/>
+          <a:p>
+            <a:endParaRPr lang="en-US"/>
+          </a:p>
+        </p:txBody>
       </p:sp>
       <p:sp>
         <p:nvSpPr>
@@ -19329,7 +19611,7 @@
           <a:bodyPr wrap="square" lIns="0" tIns="0" rIns="0" bIns="0" rtlCol="0" anchor="ctr"/>
           <a:lstStyle/>
           <a:p>
-            <a:pPr indent="0" marL="0">
+            <a:pPr marL="0" indent="0">
               <a:buNone/>
             </a:pPr>
             <a:r>
@@ -19368,7 +19650,7 @@
           <a:bodyPr wrap="square" lIns="0" tIns="0" rIns="0" bIns="0" rtlCol="0" anchor="ctr"/>
           <a:lstStyle/>
           <a:p>
-            <a:pPr indent="0" marL="0">
+            <a:pPr marL="0" indent="0">
               <a:buNone/>
             </a:pPr>
             <a:r>
@@ -19407,6 +19689,13 @@
           </a:solidFill>
           <a:ln/>
         </p:spPr>
+        <p:txBody>
+          <a:bodyPr/>
+          <a:lstStyle/>
+          <a:p>
+            <a:endParaRPr lang="en-US"/>
+          </a:p>
+        </p:txBody>
       </p:sp>
       <p:sp>
         <p:nvSpPr>
@@ -19429,7 +19718,7 @@
           <a:bodyPr wrap="square" lIns="0" tIns="0" rIns="0" bIns="0" rtlCol="0" anchor="ctr"/>
           <a:lstStyle/>
           <a:p>
-            <a:pPr indent="0" marL="0">
+            <a:pPr marL="0" indent="0">
               <a:buNone/>
             </a:pPr>
             <a:r>
@@ -19468,7 +19757,7 @@
           <a:bodyPr wrap="square" lIns="0" tIns="0" rIns="0" bIns="0" rtlCol="0" anchor="ctr"/>
           <a:lstStyle/>
           <a:p>
-            <a:pPr indent="0" marL="0">
+            <a:pPr marL="0" indent="0">
               <a:buNone/>
             </a:pPr>
             <a:r>
@@ -19506,7 +19795,7 @@
           </a:prstGeom>
           <a:extLst>
             <a:ext uri="{C572A759-6A51-4108-AA02-DFA0A04FC94B}">
-              <ma14:wrappingTextBoxFlag xmlns:ma14="http://schemas.microsoft.com/office/mac/drawingml/2011/main" val="0"/>
+              <ma14:wrappingTextBoxFlag xmlns:ma14="http://schemas.microsoft.com/office/mac/drawingml/2011/main" xmlns="" val="0"/>
             </a:ext>
           </a:extLst>
         </p:spPr>
@@ -19527,7 +19816,7 @@
           <a:p>
             <a:pPr algn="l"/>
             <a:fld id="{F7021451-1387-4CA6-816F-3879F97B5CBC}" type="slidenum">
-              <a:rPr b="0" lang="en-US"/>
+              <a:rPr lang="en-US" b="0"/>
               <a:t>24</a:t>
             </a:fld>
             <a:endParaRPr lang="en-US"/>
@@ -19580,11 +19869,11 @@
           <a:bodyPr wrap="square" lIns="0" tIns="0" rIns="0" bIns="0" rtlCol="0" anchor="ctr"/>
           <a:lstStyle/>
           <a:p>
-            <a:pPr indent="0" marL="0">
-              <a:buNone/>
-            </a:pPr>
-            <a:r>
-              <a:rPr lang="en-US" sz="1200" spc="120" kern="0" dirty="0">
+            <a:pPr marL="0" indent="0">
+              <a:buNone/>
+            </a:pPr>
+            <a:r>
+              <a:rPr lang="en-US" sz="1200" kern="0" spc="120" dirty="0">
                 <a:solidFill>
                   <a:srgbClr val="8A5A10"/>
                 </a:solidFill>
@@ -19601,9 +19890,11 @@
       <p:sp>
         <p:nvSpPr>
           <p:cNvPr id="3" name="Text 0"/>
-          <p:cNvSpPr/>
+          <p:cNvSpPr>
+            <a:spLocks noGrp="1"/>
+          </p:cNvSpPr>
           <p:nvPr>
-            <p:ph idx="100" type="title" hasCustomPrompt="1"/>
+            <p:ph type="title" idx="100" hasCustomPrompt="1"/>
           </p:nvPr>
         </p:nvSpPr>
         <p:spPr>
@@ -19621,7 +19912,7 @@
           <a:bodyPr wrap="square" lIns="0" tIns="0" rIns="0" bIns="0" rtlCol="0" anchor="t"/>
           <a:lstStyle/>
           <a:p>
-            <a:pPr indent="0" marL="0">
+            <a:pPr marL="0" indent="0">
               <a:buNone/>
             </a:pPr>
             <a:r>
@@ -19660,6 +19951,13 @@
           </a:solidFill>
           <a:ln/>
         </p:spPr>
+        <p:txBody>
+          <a:bodyPr/>
+          <a:lstStyle/>
+          <a:p>
+            <a:endParaRPr lang="en-US"/>
+          </a:p>
+        </p:txBody>
       </p:sp>
       <p:sp>
         <p:nvSpPr>
@@ -19682,7 +19980,7 @@
           <a:bodyPr wrap="square" lIns="0" tIns="0" rIns="0" bIns="0" rtlCol="0" anchor="ctr"/>
           <a:lstStyle/>
           <a:p>
-            <a:pPr indent="0" marL="0">
+            <a:pPr marL="0" indent="0">
               <a:buNone/>
             </a:pPr>
             <a:r>
@@ -19699,7 +19997,7 @@
             <a:endParaRPr lang="en-US" sz="1400" dirty="0"/>
           </a:p>
           <a:p>
-            <a:pPr indent="0" marL="0">
+            <a:pPr marL="0" indent="0">
               <a:buNone/>
             </a:pPr>
             <a:r>
@@ -19716,7 +20014,7 @@
             <a:endParaRPr lang="en-US" sz="1400" dirty="0"/>
           </a:p>
           <a:p>
-            <a:pPr indent="0" marL="0">
+            <a:pPr marL="0" indent="0">
               <a:buNone/>
             </a:pPr>
             <a:r>
@@ -19733,7 +20031,7 @@
             <a:endParaRPr lang="en-US" sz="1400" dirty="0"/>
           </a:p>
           <a:p>
-            <a:pPr indent="0" marL="0">
+            <a:pPr marL="0" indent="0">
               <a:buNone/>
             </a:pPr>
             <a:r>
@@ -19750,7 +20048,7 @@
             <a:endParaRPr lang="en-US" sz="1400" dirty="0"/>
           </a:p>
           <a:p>
-            <a:pPr indent="0" marL="0">
+            <a:pPr marL="0" indent="0">
               <a:buNone/>
             </a:pPr>
             <a:r>
@@ -19767,7 +20065,7 @@
             <a:endParaRPr lang="en-US" sz="1400" dirty="0"/>
           </a:p>
           <a:p>
-            <a:pPr indent="0" marL="0">
+            <a:pPr marL="0" indent="0">
               <a:buNone/>
             </a:pPr>
             <a:r>
@@ -19784,7 +20082,7 @@
             <a:endParaRPr lang="en-US" sz="1400" dirty="0"/>
           </a:p>
           <a:p>
-            <a:pPr indent="0" marL="0">
+            <a:pPr marL="0" indent="0">
               <a:buNone/>
             </a:pPr>
             <a:r>
@@ -19801,7 +20099,7 @@
             <a:endParaRPr lang="en-US" sz="1400" dirty="0"/>
           </a:p>
           <a:p>
-            <a:pPr indent="0" marL="0">
+            <a:pPr marL="0" indent="0">
               <a:buNone/>
             </a:pPr>
             <a:r>
@@ -19818,7 +20116,7 @@
             <a:endParaRPr lang="en-US" sz="1400" dirty="0"/>
           </a:p>
           <a:p>
-            <a:pPr indent="0" marL="0">
+            <a:pPr marL="0" indent="0">
               <a:buNone/>
             </a:pPr>
             <a:r>
@@ -19835,7 +20133,7 @@
             <a:endParaRPr lang="en-US" sz="1400" dirty="0"/>
           </a:p>
           <a:p>
-            <a:pPr indent="0" marL="0">
+            <a:pPr marL="0" indent="0">
               <a:buNone/>
             </a:pPr>
             <a:r>
@@ -19874,13 +20172,20 @@
           </a:solidFill>
           <a:ln/>
           <a:effectLst>
-            <a:outerShdw sx="100000" sy="100000" kx="0" ky="0" algn="bl" rotWithShape="0" blurRad="177800" dist="38100" dir="5400000">
+            <a:outerShdw blurRad="177800" dist="38100" dir="5400000" algn="bl" rotWithShape="0">
               <a:srgbClr val="1A1E1B">
                 <a:alpha val="8000"/>
               </a:srgbClr>
             </a:outerShdw>
           </a:effectLst>
         </p:spPr>
+        <p:txBody>
+          <a:bodyPr/>
+          <a:lstStyle/>
+          <a:p>
+            <a:endParaRPr lang="en-US"/>
+          </a:p>
+        </p:txBody>
       </p:sp>
       <p:sp>
         <p:nvSpPr>
@@ -19903,7 +20208,7 @@
           <a:bodyPr wrap="square" lIns="0" tIns="0" rIns="0" bIns="0" rtlCol="0" anchor="ctr"/>
           <a:lstStyle/>
           <a:p>
-            <a:pPr indent="0" marL="0">
+            <a:pPr marL="0" indent="0">
               <a:buNone/>
             </a:pPr>
             <a:r>
@@ -19942,7 +20247,7 @@
           <a:bodyPr wrap="square" lIns="0" tIns="0" rIns="0" bIns="0" rtlCol="0" anchor="ctr"/>
           <a:lstStyle/>
           <a:p>
-            <a:pPr indent="0" marL="0">
+            <a:pPr marL="0" indent="0">
               <a:buNone/>
             </a:pPr>
             <a:r>
@@ -19981,13 +20286,20 @@
           </a:solidFill>
           <a:ln/>
           <a:effectLst>
-            <a:outerShdw sx="100000" sy="100000" kx="0" ky="0" algn="bl" rotWithShape="0" blurRad="177800" dist="38100" dir="5400000">
+            <a:outerShdw blurRad="177800" dist="38100" dir="5400000" algn="bl" rotWithShape="0">
               <a:srgbClr val="1A1E1B">
                 <a:alpha val="8000"/>
               </a:srgbClr>
             </a:outerShdw>
           </a:effectLst>
         </p:spPr>
+        <p:txBody>
+          <a:bodyPr/>
+          <a:lstStyle/>
+          <a:p>
+            <a:endParaRPr lang="en-US"/>
+          </a:p>
+        </p:txBody>
       </p:sp>
       <p:sp>
         <p:nvSpPr>
@@ -20010,7 +20322,7 @@
           <a:bodyPr wrap="square" lIns="0" tIns="0" rIns="0" bIns="0" rtlCol="0" anchor="ctr"/>
           <a:lstStyle/>
           <a:p>
-            <a:pPr indent="0" marL="0">
+            <a:pPr marL="0" indent="0">
               <a:buNone/>
             </a:pPr>
             <a:r>
@@ -20049,7 +20361,7 @@
           <a:bodyPr wrap="square" lIns="0" tIns="0" rIns="0" bIns="0" rtlCol="0" anchor="ctr"/>
           <a:lstStyle/>
           <a:p>
-            <a:pPr indent="0" marL="0">
+            <a:pPr marL="0" indent="0">
               <a:buNone/>
             </a:pPr>
             <a:r>
@@ -20088,13 +20400,20 @@
           </a:solidFill>
           <a:ln/>
           <a:effectLst>
-            <a:outerShdw sx="100000" sy="100000" kx="0" ky="0" algn="bl" rotWithShape="0" blurRad="177800" dist="38100" dir="5400000">
+            <a:outerShdw blurRad="177800" dist="38100" dir="5400000" algn="bl" rotWithShape="0">
               <a:srgbClr val="1A1E1B">
                 <a:alpha val="8000"/>
               </a:srgbClr>
             </a:outerShdw>
           </a:effectLst>
         </p:spPr>
+        <p:txBody>
+          <a:bodyPr/>
+          <a:lstStyle/>
+          <a:p>
+            <a:endParaRPr lang="en-US"/>
+          </a:p>
+        </p:txBody>
       </p:sp>
       <p:sp>
         <p:nvSpPr>
@@ -20117,7 +20436,7 @@
           <a:bodyPr wrap="square" lIns="0" tIns="0" rIns="0" bIns="0" rtlCol="0" anchor="ctr"/>
           <a:lstStyle/>
           <a:p>
-            <a:pPr indent="0" marL="0">
+            <a:pPr marL="0" indent="0">
               <a:buNone/>
             </a:pPr>
             <a:r>
@@ -20156,7 +20475,7 @@
           <a:bodyPr wrap="square" lIns="0" tIns="0" rIns="0" bIns="0" rtlCol="0" anchor="ctr"/>
           <a:lstStyle/>
           <a:p>
-            <a:pPr indent="0" marL="0">
+            <a:pPr marL="0" indent="0">
               <a:buNone/>
             </a:pPr>
             <a:r>
@@ -20194,7 +20513,7 @@
           </a:prstGeom>
           <a:extLst>
             <a:ext uri="{C572A759-6A51-4108-AA02-DFA0A04FC94B}">
-              <ma14:wrappingTextBoxFlag xmlns:ma14="http://schemas.microsoft.com/office/mac/drawingml/2011/main" val="0"/>
+              <ma14:wrappingTextBoxFlag xmlns:ma14="http://schemas.microsoft.com/office/mac/drawingml/2011/main" xmlns="" val="0"/>
             </a:ext>
           </a:extLst>
         </p:spPr>
@@ -20215,7 +20534,7 @@
           <a:p>
             <a:pPr algn="l"/>
             <a:fld id="{F7021451-1387-4CA6-816F-3879F97B5CBC}" type="slidenum">
-              <a:rPr b="0" lang="en-US"/>
+              <a:rPr lang="en-US" b="0"/>
               <a:t>25</a:t>
             </a:fld>
             <a:endParaRPr lang="en-US"/>
@@ -20268,11 +20587,11 @@
           <a:bodyPr wrap="square" lIns="0" tIns="0" rIns="0" bIns="0" rtlCol="0" anchor="ctr"/>
           <a:lstStyle/>
           <a:p>
-            <a:pPr indent="0" marL="0">
-              <a:buNone/>
-            </a:pPr>
-            <a:r>
-              <a:rPr lang="en-US" sz="1200" spc="120" kern="0" dirty="0">
+            <a:pPr marL="0" indent="0">
+              <a:buNone/>
+            </a:pPr>
+            <a:r>
+              <a:rPr lang="en-US" sz="1200" kern="0" spc="120" dirty="0">
                 <a:solidFill>
                   <a:srgbClr val="8A5A10"/>
                 </a:solidFill>
@@ -20289,9 +20608,11 @@
       <p:sp>
         <p:nvSpPr>
           <p:cNvPr id="3" name="Text 0"/>
-          <p:cNvSpPr/>
+          <p:cNvSpPr>
+            <a:spLocks noGrp="1"/>
+          </p:cNvSpPr>
           <p:nvPr>
-            <p:ph idx="100" type="title" hasCustomPrompt="1"/>
+            <p:ph type="title" idx="100" hasCustomPrompt="1"/>
           </p:nvPr>
         </p:nvSpPr>
         <p:spPr>
@@ -20309,7 +20630,7 @@
           <a:bodyPr wrap="square" lIns="0" tIns="0" rIns="0" bIns="0" rtlCol="0" anchor="t"/>
           <a:lstStyle/>
           <a:p>
-            <a:pPr indent="0" marL="0">
+            <a:pPr marL="0" indent="0">
               <a:buNone/>
             </a:pPr>
             <a:r>
@@ -20348,13 +20669,20 @@
           </a:solidFill>
           <a:ln/>
           <a:effectLst>
-            <a:outerShdw sx="100000" sy="100000" kx="0" ky="0" algn="bl" rotWithShape="0" blurRad="177800" dist="38100" dir="5400000">
+            <a:outerShdw blurRad="177800" dist="38100" dir="5400000" algn="bl" rotWithShape="0">
               <a:srgbClr val="1A1E1B">
                 <a:alpha val="8000"/>
               </a:srgbClr>
             </a:outerShdw>
           </a:effectLst>
         </p:spPr>
+        <p:txBody>
+          <a:bodyPr/>
+          <a:lstStyle/>
+          <a:p>
+            <a:endParaRPr lang="en-US"/>
+          </a:p>
+        </p:txBody>
       </p:sp>
       <p:sp>
         <p:nvSpPr>
@@ -20377,7 +20705,7 @@
           <a:bodyPr wrap="square" lIns="0" tIns="0" rIns="0" bIns="0" rtlCol="0" anchor="ctr"/>
           <a:lstStyle/>
           <a:p>
-            <a:pPr indent="0" marL="0">
+            <a:pPr marL="0" indent="0">
               <a:buNone/>
             </a:pPr>
             <a:r>
@@ -20416,7 +20744,7 @@
           <a:bodyPr wrap="square" lIns="0" tIns="0" rIns="0" bIns="0" rtlCol="0" anchor="ctr"/>
           <a:lstStyle/>
           <a:p>
-            <a:pPr indent="0" marL="0">
+            <a:pPr marL="0" indent="0">
               <a:buNone/>
             </a:pPr>
             <a:r>
@@ -20455,13 +20783,20 @@
           </a:solidFill>
           <a:ln/>
           <a:effectLst>
-            <a:outerShdw sx="100000" sy="100000" kx="0" ky="0" algn="bl" rotWithShape="0" blurRad="177800" dist="38100" dir="5400000">
+            <a:outerShdw blurRad="177800" dist="38100" dir="5400000" algn="bl" rotWithShape="0">
               <a:srgbClr val="1A1E1B">
                 <a:alpha val="8000"/>
               </a:srgbClr>
             </a:outerShdw>
           </a:effectLst>
         </p:spPr>
+        <p:txBody>
+          <a:bodyPr/>
+          <a:lstStyle/>
+          <a:p>
+            <a:endParaRPr lang="en-US"/>
+          </a:p>
+        </p:txBody>
       </p:sp>
       <p:sp>
         <p:nvSpPr>
@@ -20484,7 +20819,7 @@
           <a:bodyPr wrap="square" lIns="0" tIns="0" rIns="0" bIns="0" rtlCol="0" anchor="ctr"/>
           <a:lstStyle/>
           <a:p>
-            <a:pPr indent="0" marL="0">
+            <a:pPr marL="0" indent="0">
               <a:buNone/>
             </a:pPr>
             <a:r>
@@ -20523,7 +20858,7 @@
           <a:bodyPr wrap="square" lIns="0" tIns="0" rIns="0" bIns="0" rtlCol="0" anchor="ctr"/>
           <a:lstStyle/>
           <a:p>
-            <a:pPr indent="0" marL="0">
+            <a:pPr marL="0" indent="0">
               <a:buNone/>
             </a:pPr>
             <a:r>
@@ -20562,13 +20897,20 @@
           </a:solidFill>
           <a:ln/>
           <a:effectLst>
-            <a:outerShdw sx="100000" sy="100000" kx="0" ky="0" algn="bl" rotWithShape="0" blurRad="177800" dist="38100" dir="5400000">
+            <a:outerShdw blurRad="177800" dist="38100" dir="5400000" algn="bl" rotWithShape="0">
               <a:srgbClr val="1A1E1B">
                 <a:alpha val="8000"/>
               </a:srgbClr>
             </a:outerShdw>
           </a:effectLst>
         </p:spPr>
+        <p:txBody>
+          <a:bodyPr/>
+          <a:lstStyle/>
+          <a:p>
+            <a:endParaRPr lang="en-US"/>
+          </a:p>
+        </p:txBody>
       </p:sp>
       <p:sp>
         <p:nvSpPr>
@@ -20591,7 +20933,7 @@
           <a:bodyPr wrap="square" lIns="0" tIns="0" rIns="0" bIns="0" rtlCol="0" anchor="ctr"/>
           <a:lstStyle/>
           <a:p>
-            <a:pPr indent="0" marL="0">
+            <a:pPr marL="0" indent="0">
               <a:buNone/>
             </a:pPr>
             <a:r>
@@ -20630,7 +20972,7 @@
           <a:bodyPr wrap="square" lIns="0" tIns="0" rIns="0" bIns="0" rtlCol="0" anchor="ctr"/>
           <a:lstStyle/>
           <a:p>
-            <a:pPr indent="0" marL="0">
+            <a:pPr marL="0" indent="0">
               <a:buNone/>
             </a:pPr>
             <a:r>
@@ -20669,13 +21011,20 @@
           </a:solidFill>
           <a:ln/>
           <a:effectLst>
-            <a:outerShdw sx="100000" sy="100000" kx="0" ky="0" algn="bl" rotWithShape="0" blurRad="177800" dist="38100" dir="5400000">
+            <a:outerShdw blurRad="177800" dist="38100" dir="5400000" algn="bl" rotWithShape="0">
               <a:srgbClr val="1A1E1B">
                 <a:alpha val="8000"/>
               </a:srgbClr>
             </a:outerShdw>
           </a:effectLst>
         </p:spPr>
+        <p:txBody>
+          <a:bodyPr/>
+          <a:lstStyle/>
+          <a:p>
+            <a:endParaRPr lang="en-US"/>
+          </a:p>
+        </p:txBody>
       </p:sp>
       <p:sp>
         <p:nvSpPr>
@@ -20698,7 +21047,7 @@
           <a:bodyPr wrap="square" lIns="0" tIns="0" rIns="0" bIns="0" rtlCol="0" anchor="ctr"/>
           <a:lstStyle/>
           <a:p>
-            <a:pPr indent="0" marL="0">
+            <a:pPr marL="0" indent="0">
               <a:buNone/>
             </a:pPr>
             <a:r>
@@ -20737,7 +21086,7 @@
           <a:bodyPr wrap="square" lIns="0" tIns="0" rIns="0" bIns="0" rtlCol="0" anchor="ctr"/>
           <a:lstStyle/>
           <a:p>
-            <a:pPr indent="0" marL="0">
+            <a:pPr marL="0" indent="0">
               <a:buNone/>
             </a:pPr>
             <a:r>
@@ -20776,7 +21125,7 @@
           <a:bodyPr wrap="square" lIns="0" tIns="0" rIns="0" bIns="0" rtlCol="0" anchor="ctr"/>
           <a:lstStyle/>
           <a:p>
-            <a:pPr indent="0" marL="0">
+            <a:pPr marL="0" indent="0">
               <a:buNone/>
             </a:pPr>
             <a:r>
@@ -20815,7 +21164,7 @@
           <a:bodyPr wrap="square" lIns="0" tIns="0" rIns="0" bIns="0" rtlCol="0" anchor="ctr"/>
           <a:lstStyle/>
           <a:p>
-            <a:pPr indent="0" marL="0">
+            <a:pPr marL="0" indent="0">
               <a:buNone/>
             </a:pPr>
             <a:r>
@@ -20832,7 +21181,7 @@
             <a:endParaRPr lang="en-US" sz="1300" dirty="0"/>
           </a:p>
           <a:p>
-            <a:pPr indent="0" marL="0">
+            <a:pPr marL="0" indent="0">
               <a:buNone/>
             </a:pPr>
             <a:r>
@@ -20870,7 +21219,7 @@
           </a:prstGeom>
           <a:extLst>
             <a:ext uri="{C572A759-6A51-4108-AA02-DFA0A04FC94B}">
-              <ma14:wrappingTextBoxFlag xmlns:ma14="http://schemas.microsoft.com/office/mac/drawingml/2011/main" val="0"/>
+              <ma14:wrappingTextBoxFlag xmlns:ma14="http://schemas.microsoft.com/office/mac/drawingml/2011/main" xmlns="" val="0"/>
             </a:ext>
           </a:extLst>
         </p:spPr>
@@ -20891,7 +21240,7 @@
           <a:p>
             <a:pPr algn="l"/>
             <a:fld id="{F7021451-1387-4CA6-816F-3879F97B5CBC}" type="slidenum">
-              <a:rPr b="0" lang="en-US"/>
+              <a:rPr lang="en-US" b="0"/>
               <a:t>26</a:t>
             </a:fld>
             <a:endParaRPr lang="en-US"/>
@@ -20944,11 +21293,11 @@
           <a:bodyPr wrap="square" lIns="0" tIns="0" rIns="0" bIns="0" rtlCol="0" anchor="ctr"/>
           <a:lstStyle/>
           <a:p>
-            <a:pPr indent="0" marL="0">
-              <a:buNone/>
-            </a:pPr>
-            <a:r>
-              <a:rPr lang="en-US" sz="1200" spc="120" kern="0" dirty="0">
+            <a:pPr marL="0" indent="0">
+              <a:buNone/>
+            </a:pPr>
+            <a:r>
+              <a:rPr lang="en-US" sz="1200" kern="0" spc="120" dirty="0">
                 <a:solidFill>
                   <a:srgbClr val="8A5A10"/>
                 </a:solidFill>
@@ -20965,9 +21314,11 @@
       <p:sp>
         <p:nvSpPr>
           <p:cNvPr id="3" name="Text 0"/>
-          <p:cNvSpPr/>
+          <p:cNvSpPr>
+            <a:spLocks noGrp="1"/>
+          </p:cNvSpPr>
           <p:nvPr>
-            <p:ph idx="100" type="title" hasCustomPrompt="1"/>
+            <p:ph type="title" idx="100" hasCustomPrompt="1"/>
           </p:nvPr>
         </p:nvSpPr>
         <p:spPr>
@@ -20985,7 +21336,7 @@
           <a:bodyPr wrap="square" lIns="0" tIns="0" rIns="0" bIns="0" rtlCol="0" anchor="t"/>
           <a:lstStyle/>
           <a:p>
-            <a:pPr indent="0" marL="0">
+            <a:pPr marL="0" indent="0">
               <a:buNone/>
             </a:pPr>
             <a:r>
@@ -21024,13 +21375,20 @@
           </a:solidFill>
           <a:ln/>
           <a:effectLst>
-            <a:outerShdw sx="100000" sy="100000" kx="0" ky="0" algn="bl" rotWithShape="0" blurRad="177800" dist="38100" dir="5400000">
+            <a:outerShdw blurRad="177800" dist="38100" dir="5400000" algn="bl" rotWithShape="0">
               <a:srgbClr val="1A1E1B">
                 <a:alpha val="8000"/>
               </a:srgbClr>
             </a:outerShdw>
           </a:effectLst>
         </p:spPr>
+        <p:txBody>
+          <a:bodyPr/>
+          <a:lstStyle/>
+          <a:p>
+            <a:endParaRPr lang="en-US"/>
+          </a:p>
+        </p:txBody>
       </p:sp>
       <p:sp>
         <p:nvSpPr>
@@ -21053,7 +21411,7 @@
           <a:bodyPr wrap="square" lIns="0" tIns="0" rIns="0" bIns="0" rtlCol="0" anchor="ctr"/>
           <a:lstStyle/>
           <a:p>
-            <a:pPr indent="0" marL="0">
+            <a:pPr marL="0" indent="0">
               <a:buNone/>
             </a:pPr>
             <a:r>
@@ -21092,7 +21450,7 @@
           <a:bodyPr wrap="square" lIns="0" tIns="0" rIns="0" bIns="0" rtlCol="0" anchor="ctr"/>
           <a:lstStyle/>
           <a:p>
-            <a:pPr indent="0" marL="0">
+            <a:pPr marL="0" indent="0">
               <a:buNone/>
             </a:pPr>
             <a:r>
@@ -21131,13 +21489,20 @@
           </a:solidFill>
           <a:ln/>
           <a:effectLst>
-            <a:outerShdw sx="100000" sy="100000" kx="0" ky="0" algn="bl" rotWithShape="0" blurRad="177800" dist="38100" dir="5400000">
+            <a:outerShdw blurRad="177800" dist="38100" dir="5400000" algn="bl" rotWithShape="0">
               <a:srgbClr val="1A1E1B">
                 <a:alpha val="8000"/>
               </a:srgbClr>
             </a:outerShdw>
           </a:effectLst>
         </p:spPr>
+        <p:txBody>
+          <a:bodyPr/>
+          <a:lstStyle/>
+          <a:p>
+            <a:endParaRPr lang="en-US"/>
+          </a:p>
+        </p:txBody>
       </p:sp>
       <p:sp>
         <p:nvSpPr>
@@ -21160,7 +21525,7 @@
           <a:bodyPr wrap="square" lIns="0" tIns="0" rIns="0" bIns="0" rtlCol="0" anchor="ctr"/>
           <a:lstStyle/>
           <a:p>
-            <a:pPr indent="0" marL="0">
+            <a:pPr marL="0" indent="0">
               <a:buNone/>
             </a:pPr>
             <a:r>
@@ -21199,7 +21564,7 @@
           <a:bodyPr wrap="square" lIns="0" tIns="0" rIns="0" bIns="0" rtlCol="0" anchor="ctr"/>
           <a:lstStyle/>
           <a:p>
-            <a:pPr indent="0" marL="0">
+            <a:pPr marL="0" indent="0">
               <a:buNone/>
             </a:pPr>
             <a:r>
@@ -21238,13 +21603,20 @@
           </a:solidFill>
           <a:ln/>
           <a:effectLst>
-            <a:outerShdw sx="100000" sy="100000" kx="0" ky="0" algn="bl" rotWithShape="0" blurRad="177800" dist="38100" dir="5400000">
+            <a:outerShdw blurRad="177800" dist="38100" dir="5400000" algn="bl" rotWithShape="0">
               <a:srgbClr val="1A1E1B">
                 <a:alpha val="8000"/>
               </a:srgbClr>
             </a:outerShdw>
           </a:effectLst>
         </p:spPr>
+        <p:txBody>
+          <a:bodyPr/>
+          <a:lstStyle/>
+          <a:p>
+            <a:endParaRPr lang="en-US"/>
+          </a:p>
+        </p:txBody>
       </p:sp>
       <p:sp>
         <p:nvSpPr>
@@ -21267,7 +21639,7 @@
           <a:bodyPr wrap="square" lIns="0" tIns="0" rIns="0" bIns="0" rtlCol="0" anchor="ctr"/>
           <a:lstStyle/>
           <a:p>
-            <a:pPr indent="0" marL="0">
+            <a:pPr marL="0" indent="0">
               <a:buNone/>
             </a:pPr>
             <a:r>
@@ -21306,7 +21678,7 @@
           <a:bodyPr wrap="square" lIns="0" tIns="0" rIns="0" bIns="0" rtlCol="0" anchor="ctr"/>
           <a:lstStyle/>
           <a:p>
-            <a:pPr indent="0" marL="0">
+            <a:pPr marL="0" indent="0">
               <a:buNone/>
             </a:pPr>
             <a:r>
@@ -21345,13 +21717,20 @@
           </a:solidFill>
           <a:ln/>
           <a:effectLst>
-            <a:outerShdw sx="100000" sy="100000" kx="0" ky="0" algn="bl" rotWithShape="0" blurRad="177800" dist="38100" dir="5400000">
+            <a:outerShdw blurRad="177800" dist="38100" dir="5400000" algn="bl" rotWithShape="0">
               <a:srgbClr val="1A1E1B">
                 <a:alpha val="8000"/>
               </a:srgbClr>
             </a:outerShdw>
           </a:effectLst>
         </p:spPr>
+        <p:txBody>
+          <a:bodyPr/>
+          <a:lstStyle/>
+          <a:p>
+            <a:endParaRPr lang="en-US"/>
+          </a:p>
+        </p:txBody>
       </p:sp>
       <p:sp>
         <p:nvSpPr>
@@ -21374,7 +21753,7 @@
           <a:bodyPr wrap="square" lIns="0" tIns="0" rIns="0" bIns="0" rtlCol="0" anchor="ctr"/>
           <a:lstStyle/>
           <a:p>
-            <a:pPr indent="0" marL="0">
+            <a:pPr marL="0" indent="0">
               <a:buNone/>
             </a:pPr>
             <a:r>
@@ -21413,7 +21792,7 @@
           <a:bodyPr wrap="square" lIns="0" tIns="0" rIns="0" bIns="0" rtlCol="0" anchor="ctr"/>
           <a:lstStyle/>
           <a:p>
-            <a:pPr indent="0" marL="0">
+            <a:pPr marL="0" indent="0">
               <a:buNone/>
             </a:pPr>
             <a:r>
@@ -21452,13 +21831,20 @@
           </a:solidFill>
           <a:ln/>
           <a:effectLst>
-            <a:outerShdw sx="100000" sy="100000" kx="0" ky="0" algn="bl" rotWithShape="0" blurRad="177800" dist="38100" dir="5400000">
+            <a:outerShdw blurRad="177800" dist="38100" dir="5400000" algn="bl" rotWithShape="0">
               <a:srgbClr val="1A1E1B">
                 <a:alpha val="8000"/>
               </a:srgbClr>
             </a:outerShdw>
           </a:effectLst>
         </p:spPr>
+        <p:txBody>
+          <a:bodyPr/>
+          <a:lstStyle/>
+          <a:p>
+            <a:endParaRPr lang="en-US"/>
+          </a:p>
+        </p:txBody>
       </p:sp>
       <p:sp>
         <p:nvSpPr>
@@ -21481,7 +21867,7 @@
           <a:bodyPr wrap="square" lIns="0" tIns="0" rIns="0" bIns="0" rtlCol="0" anchor="ctr"/>
           <a:lstStyle/>
           <a:p>
-            <a:pPr indent="0" marL="0">
+            <a:pPr marL="0" indent="0">
               <a:buNone/>
             </a:pPr>
             <a:r>
@@ -21520,7 +21906,7 @@
           <a:bodyPr wrap="square" lIns="0" tIns="0" rIns="0" bIns="0" rtlCol="0" anchor="ctr"/>
           <a:lstStyle/>
           <a:p>
-            <a:pPr indent="0" marL="0">
+            <a:pPr marL="0" indent="0">
               <a:buNone/>
             </a:pPr>
             <a:r>
@@ -21559,13 +21945,20 @@
           </a:solidFill>
           <a:ln/>
           <a:effectLst>
-            <a:outerShdw sx="100000" sy="100000" kx="0" ky="0" algn="bl" rotWithShape="0" blurRad="177800" dist="38100" dir="5400000">
+            <a:outerShdw blurRad="177800" dist="38100" dir="5400000" algn="bl" rotWithShape="0">
               <a:srgbClr val="1A1E1B">
                 <a:alpha val="8000"/>
               </a:srgbClr>
             </a:outerShdw>
           </a:effectLst>
         </p:spPr>
+        <p:txBody>
+          <a:bodyPr/>
+          <a:lstStyle/>
+          <a:p>
+            <a:endParaRPr lang="en-US"/>
+          </a:p>
+        </p:txBody>
       </p:sp>
       <p:sp>
         <p:nvSpPr>
@@ -21588,7 +21981,7 @@
           <a:bodyPr wrap="square" lIns="0" tIns="0" rIns="0" bIns="0" rtlCol="0" anchor="ctr"/>
           <a:lstStyle/>
           <a:p>
-            <a:pPr indent="0" marL="0">
+            <a:pPr marL="0" indent="0">
               <a:buNone/>
             </a:pPr>
             <a:r>
@@ -21627,7 +22020,7 @@
           <a:bodyPr wrap="square" lIns="0" tIns="0" rIns="0" bIns="0" rtlCol="0" anchor="ctr"/>
           <a:lstStyle/>
           <a:p>
-            <a:pPr indent="0" marL="0">
+            <a:pPr marL="0" indent="0">
               <a:buNone/>
             </a:pPr>
             <a:r>
@@ -21665,7 +22058,7 @@
           </a:prstGeom>
           <a:extLst>
             <a:ext uri="{C572A759-6A51-4108-AA02-DFA0A04FC94B}">
-              <ma14:wrappingTextBoxFlag xmlns:ma14="http://schemas.microsoft.com/office/mac/drawingml/2011/main" val="0"/>
+              <ma14:wrappingTextBoxFlag xmlns:ma14="http://schemas.microsoft.com/office/mac/drawingml/2011/main" xmlns="" val="0"/>
             </a:ext>
           </a:extLst>
         </p:spPr>
@@ -21686,7 +22079,7 @@
           <a:p>
             <a:pPr algn="l"/>
             <a:fld id="{F7021451-1387-4CA6-816F-3879F97B5CBC}" type="slidenum">
-              <a:rPr b="0" lang="en-US"/>
+              <a:rPr lang="en-US" b="0"/>
               <a:t>27</a:t>
             </a:fld>
             <a:endParaRPr lang="en-US"/>
@@ -21739,11 +22132,11 @@
           <a:bodyPr wrap="square" lIns="0" tIns="0" rIns="0" bIns="0" rtlCol="0" anchor="ctr"/>
           <a:lstStyle/>
           <a:p>
-            <a:pPr indent="0" marL="0">
-              <a:buNone/>
-            </a:pPr>
-            <a:r>
-              <a:rPr lang="en-US" sz="1300" spc="120" kern="0" dirty="0">
+            <a:pPr marL="0" indent="0">
+              <a:buNone/>
+            </a:pPr>
+            <a:r>
+              <a:rPr lang="en-US" sz="1300" kern="0" spc="120" dirty="0">
                 <a:solidFill>
                   <a:srgbClr val="F0C56A"/>
                 </a:solidFill>
@@ -21760,9 +22153,11 @@
       <p:sp>
         <p:nvSpPr>
           <p:cNvPr id="3" name="Text 0"/>
-          <p:cNvSpPr/>
+          <p:cNvSpPr>
+            <a:spLocks noGrp="1"/>
+          </p:cNvSpPr>
           <p:nvPr>
-            <p:ph idx="100" type="title" hasCustomPrompt="1"/>
+            <p:ph type="title" idx="100" hasCustomPrompt="1"/>
           </p:nvPr>
         </p:nvSpPr>
         <p:spPr>
@@ -21780,7 +22175,7 @@
           <a:bodyPr wrap="square" lIns="0" tIns="0" rIns="0" bIns="0" rtlCol="0"/>
           <a:lstStyle/>
           <a:p>
-            <a:pPr indent="0" marL="0">
+            <a:pPr marL="0" indent="0">
               <a:buNone/>
             </a:pPr>
             <a:r>
@@ -21819,7 +22214,7 @@
           <a:bodyPr wrap="square" lIns="0" tIns="0" rIns="0" bIns="0" rtlCol="0" anchor="ctr"/>
           <a:lstStyle/>
           <a:p>
-            <a:pPr indent="0" marL="0">
+            <a:pPr marL="0" indent="0">
               <a:buNone/>
             </a:pPr>
             <a:r>
@@ -21858,7 +22253,7 @@
           <a:bodyPr wrap="square" lIns="0" tIns="0" rIns="0" bIns="0" rtlCol="0" anchor="ctr"/>
           <a:lstStyle/>
           <a:p>
-            <a:pPr indent="0" marL="0">
+            <a:pPr marL="0" indent="0">
               <a:buNone/>
             </a:pPr>
             <a:r>
@@ -21896,7 +22291,7 @@
           </a:prstGeom>
           <a:extLst>
             <a:ext uri="{C572A759-6A51-4108-AA02-DFA0A04FC94B}">
-              <ma14:wrappingTextBoxFlag xmlns:ma14="http://schemas.microsoft.com/office/mac/drawingml/2011/main" val="0"/>
+              <ma14:wrappingTextBoxFlag xmlns:ma14="http://schemas.microsoft.com/office/mac/drawingml/2011/main" xmlns="" val="0"/>
             </a:ext>
           </a:extLst>
         </p:spPr>
@@ -21917,7 +22312,7 @@
           <a:p>
             <a:pPr algn="l"/>
             <a:fld id="{F7021451-1387-4CA6-816F-3879F97B5CBC}" type="slidenum">
-              <a:rPr b="0" lang="en-US"/>
+              <a:rPr lang="en-US" b="0"/>
               <a:t>28</a:t>
             </a:fld>
             <a:endParaRPr lang="en-US"/>
@@ -21970,11 +22365,11 @@
           <a:bodyPr wrap="square" lIns="0" tIns="0" rIns="0" bIns="0" rtlCol="0" anchor="ctr"/>
           <a:lstStyle/>
           <a:p>
-            <a:pPr indent="0" marL="0">
-              <a:buNone/>
-            </a:pPr>
-            <a:r>
-              <a:rPr lang="en-US" sz="1200" spc="120" kern="0" dirty="0">
+            <a:pPr marL="0" indent="0">
+              <a:buNone/>
+            </a:pPr>
+            <a:r>
+              <a:rPr lang="en-US" sz="1200" kern="0" spc="120" dirty="0">
                 <a:solidFill>
                   <a:srgbClr val="8A5A10"/>
                 </a:solidFill>
@@ -21991,9 +22386,11 @@
       <p:sp>
         <p:nvSpPr>
           <p:cNvPr id="3" name="Text 0"/>
-          <p:cNvSpPr/>
+          <p:cNvSpPr>
+            <a:spLocks noGrp="1"/>
+          </p:cNvSpPr>
           <p:nvPr>
-            <p:ph idx="100" type="title" hasCustomPrompt="1"/>
+            <p:ph type="title" idx="100" hasCustomPrompt="1"/>
           </p:nvPr>
         </p:nvSpPr>
         <p:spPr>
@@ -22011,7 +22408,7 @@
           <a:bodyPr wrap="square" lIns="0" tIns="0" rIns="0" bIns="0" rtlCol="0" anchor="t"/>
           <a:lstStyle/>
           <a:p>
-            <a:pPr indent="0" marL="0">
+            <a:pPr marL="0" indent="0">
               <a:buNone/>
             </a:pPr>
             <a:r>
@@ -22050,13 +22447,20 @@
           </a:solidFill>
           <a:ln/>
           <a:effectLst>
-            <a:outerShdw sx="100000" sy="100000" kx="0" ky="0" algn="bl" rotWithShape="0" blurRad="177800" dist="38100" dir="5400000">
+            <a:outerShdw blurRad="177800" dist="38100" dir="5400000" algn="bl" rotWithShape="0">
               <a:srgbClr val="1A1E1B">
                 <a:alpha val="8000"/>
               </a:srgbClr>
             </a:outerShdw>
           </a:effectLst>
         </p:spPr>
+        <p:txBody>
+          <a:bodyPr/>
+          <a:lstStyle/>
+          <a:p>
+            <a:endParaRPr lang="en-US"/>
+          </a:p>
+        </p:txBody>
       </p:sp>
       <p:sp>
         <p:nvSpPr>
@@ -22079,7 +22483,7 @@
           <a:bodyPr wrap="square" lIns="0" tIns="0" rIns="0" bIns="0" rtlCol="0" anchor="ctr"/>
           <a:lstStyle/>
           <a:p>
-            <a:pPr indent="0" marL="0">
+            <a:pPr marL="0" indent="0">
               <a:buNone/>
             </a:pPr>
             <a:r>
@@ -22118,7 +22522,7 @@
           <a:bodyPr wrap="square" lIns="0" tIns="0" rIns="0" bIns="0" rtlCol="0" anchor="ctr"/>
           <a:lstStyle/>
           <a:p>
-            <a:pPr indent="0" marL="0">
+            <a:pPr marL="0" indent="0">
               <a:buNone/>
             </a:pPr>
             <a:r>
@@ -22135,13 +22539,13 @@
             <a:endParaRPr lang="en-US" sz="1400" dirty="0"/>
           </a:p>
           <a:p>
-            <a:pPr indent="0" marL="0">
+            <a:pPr marL="0" indent="0">
               <a:buNone/>
             </a:pPr>
             <a:endParaRPr lang="en-US" sz="1400" dirty="0"/>
           </a:p>
           <a:p>
-            <a:pPr indent="0" marL="0">
+            <a:pPr marL="0" indent="0">
               <a:buNone/>
             </a:pPr>
             <a:r>
@@ -22180,13 +22584,20 @@
           </a:solidFill>
           <a:ln/>
           <a:effectLst>
-            <a:outerShdw sx="100000" sy="100000" kx="0" ky="0" algn="bl" rotWithShape="0" blurRad="177800" dist="38100" dir="5400000">
+            <a:outerShdw blurRad="177800" dist="38100" dir="5400000" algn="bl" rotWithShape="0">
               <a:srgbClr val="1A1E1B">
                 <a:alpha val="8000"/>
               </a:srgbClr>
             </a:outerShdw>
           </a:effectLst>
         </p:spPr>
+        <p:txBody>
+          <a:bodyPr/>
+          <a:lstStyle/>
+          <a:p>
+            <a:endParaRPr lang="en-US"/>
+          </a:p>
+        </p:txBody>
       </p:sp>
       <p:sp>
         <p:nvSpPr>
@@ -22209,7 +22620,7 @@
           <a:bodyPr wrap="square" lIns="0" tIns="0" rIns="0" bIns="0" rtlCol="0" anchor="ctr"/>
           <a:lstStyle/>
           <a:p>
-            <a:pPr indent="0" marL="0">
+            <a:pPr marL="0" indent="0">
               <a:buNone/>
             </a:pPr>
             <a:r>
@@ -22248,7 +22659,7 @@
           <a:bodyPr wrap="square" lIns="0" tIns="0" rIns="0" bIns="0" rtlCol="0" anchor="ctr"/>
           <a:lstStyle/>
           <a:p>
-            <a:pPr indent="0" marL="0">
+            <a:pPr marL="0" indent="0">
               <a:buNone/>
             </a:pPr>
             <a:r>
@@ -22265,13 +22676,13 @@
             <a:endParaRPr lang="en-US" sz="1400" dirty="0"/>
           </a:p>
           <a:p>
-            <a:pPr indent="0" marL="0">
+            <a:pPr marL="0" indent="0">
               <a:buNone/>
             </a:pPr>
             <a:endParaRPr lang="en-US" sz="1400" dirty="0"/>
           </a:p>
           <a:p>
-            <a:pPr indent="0" marL="0">
+            <a:pPr marL="0" indent="0">
               <a:buNone/>
             </a:pPr>
             <a:r>
@@ -22310,13 +22721,20 @@
           </a:solidFill>
           <a:ln/>
           <a:effectLst>
-            <a:outerShdw sx="100000" sy="100000" kx="0" ky="0" algn="bl" rotWithShape="0" blurRad="177800" dist="38100" dir="5400000">
+            <a:outerShdw blurRad="177800" dist="38100" dir="5400000" algn="bl" rotWithShape="0">
               <a:srgbClr val="1A1E1B">
                 <a:alpha val="8000"/>
               </a:srgbClr>
             </a:outerShdw>
           </a:effectLst>
         </p:spPr>
+        <p:txBody>
+          <a:bodyPr/>
+          <a:lstStyle/>
+          <a:p>
+            <a:endParaRPr lang="en-US"/>
+          </a:p>
+        </p:txBody>
       </p:sp>
       <p:sp>
         <p:nvSpPr>
@@ -22339,7 +22757,7 @@
           <a:bodyPr wrap="square" lIns="0" tIns="0" rIns="0" bIns="0" rtlCol="0" anchor="ctr"/>
           <a:lstStyle/>
           <a:p>
-            <a:pPr indent="0" marL="0">
+            <a:pPr marL="0" indent="0">
               <a:buNone/>
             </a:pPr>
             <a:r>
@@ -22378,7 +22796,7 @@
           <a:bodyPr wrap="square" lIns="0" tIns="0" rIns="0" bIns="0" rtlCol="0" anchor="ctr"/>
           <a:lstStyle/>
           <a:p>
-            <a:pPr indent="0" marL="0">
+            <a:pPr marL="0" indent="0">
               <a:buNone/>
             </a:pPr>
             <a:r>
@@ -22395,13 +22813,13 @@
             <a:endParaRPr lang="en-US" sz="1400" dirty="0"/>
           </a:p>
           <a:p>
-            <a:pPr indent="0" marL="0">
+            <a:pPr marL="0" indent="0">
               <a:buNone/>
             </a:pPr>
             <a:endParaRPr lang="en-US" sz="1400" dirty="0"/>
           </a:p>
           <a:p>
-            <a:pPr indent="0" marL="0">
+            <a:pPr marL="0" indent="0">
               <a:buNone/>
             </a:pPr>
             <a:r>
@@ -22440,13 +22858,20 @@
           </a:solidFill>
           <a:ln/>
           <a:effectLst>
-            <a:outerShdw sx="100000" sy="100000" kx="0" ky="0" algn="bl" rotWithShape="0" blurRad="177800" dist="38100" dir="5400000">
+            <a:outerShdw blurRad="177800" dist="38100" dir="5400000" algn="bl" rotWithShape="0">
               <a:srgbClr val="1A1E1B">
                 <a:alpha val="8000"/>
               </a:srgbClr>
             </a:outerShdw>
           </a:effectLst>
         </p:spPr>
+        <p:txBody>
+          <a:bodyPr/>
+          <a:lstStyle/>
+          <a:p>
+            <a:endParaRPr lang="en-US"/>
+          </a:p>
+        </p:txBody>
       </p:sp>
       <p:sp>
         <p:nvSpPr>
@@ -22469,7 +22894,7 @@
           <a:bodyPr wrap="square" lIns="0" tIns="0" rIns="0" bIns="0" rtlCol="0" anchor="ctr"/>
           <a:lstStyle/>
           <a:p>
-            <a:pPr indent="0" marL="0">
+            <a:pPr marL="0" indent="0">
               <a:buNone/>
             </a:pPr>
             <a:r>
@@ -22508,7 +22933,7 @@
           <a:bodyPr wrap="square" lIns="0" tIns="0" rIns="0" bIns="0" rtlCol="0" anchor="ctr"/>
           <a:lstStyle/>
           <a:p>
-            <a:pPr indent="0" marL="0">
+            <a:pPr marL="0" indent="0">
               <a:buNone/>
             </a:pPr>
             <a:r>
@@ -22525,13 +22950,13 @@
             <a:endParaRPr lang="en-US" sz="1400" dirty="0"/>
           </a:p>
           <a:p>
-            <a:pPr indent="0" marL="0">
+            <a:pPr marL="0" indent="0">
               <a:buNone/>
             </a:pPr>
             <a:endParaRPr lang="en-US" sz="1400" dirty="0"/>
           </a:p>
           <a:p>
-            <a:pPr indent="0" marL="0">
+            <a:pPr marL="0" indent="0">
               <a:buNone/>
             </a:pPr>
             <a:r>
@@ -22570,7 +22995,7 @@
           <a:bodyPr wrap="square" lIns="0" tIns="0" rIns="0" bIns="0" rtlCol="0" anchor="ctr"/>
           <a:lstStyle/>
           <a:p>
-            <a:pPr indent="0" marL="0">
+            <a:pPr marL="0" indent="0">
               <a:buNone/>
             </a:pPr>
             <a:r>
@@ -22608,7 +23033,7 @@
           </a:prstGeom>
           <a:extLst>
             <a:ext uri="{C572A759-6A51-4108-AA02-DFA0A04FC94B}">
-              <ma14:wrappingTextBoxFlag xmlns:ma14="http://schemas.microsoft.com/office/mac/drawingml/2011/main" val="0"/>
+              <ma14:wrappingTextBoxFlag xmlns:ma14="http://schemas.microsoft.com/office/mac/drawingml/2011/main" xmlns="" val="0"/>
             </a:ext>
           </a:extLst>
         </p:spPr>
@@ -22629,7 +23054,7 @@
           <a:p>
             <a:pPr algn="l"/>
             <a:fld id="{F7021451-1387-4CA6-816F-3879F97B5CBC}" type="slidenum">
-              <a:rPr b="0" lang="en-US"/>
+              <a:rPr lang="en-US" b="0"/>
               <a:t>3</a:t>
             </a:fld>
             <a:endParaRPr lang="en-US"/>
@@ -22682,11 +23107,11 @@
           <a:bodyPr wrap="square" lIns="0" tIns="0" rIns="0" bIns="0" rtlCol="0" anchor="ctr"/>
           <a:lstStyle/>
           <a:p>
-            <a:pPr indent="0" marL="0">
-              <a:buNone/>
-            </a:pPr>
-            <a:r>
-              <a:rPr lang="en-US" sz="1300" spc="120" kern="0" dirty="0">
+            <a:pPr marL="0" indent="0">
+              <a:buNone/>
+            </a:pPr>
+            <a:r>
+              <a:rPr lang="en-US" sz="1300" kern="0" spc="120" dirty="0">
                 <a:solidFill>
                   <a:srgbClr val="F0C56A"/>
                 </a:solidFill>
@@ -22703,9 +23128,11 @@
       <p:sp>
         <p:nvSpPr>
           <p:cNvPr id="3" name="Text 0"/>
-          <p:cNvSpPr/>
+          <p:cNvSpPr>
+            <a:spLocks noGrp="1"/>
+          </p:cNvSpPr>
           <p:nvPr>
-            <p:ph idx="100" type="title" hasCustomPrompt="1"/>
+            <p:ph type="title" idx="100" hasCustomPrompt="1"/>
           </p:nvPr>
         </p:nvSpPr>
         <p:spPr>
@@ -22723,7 +23150,7 @@
           <a:bodyPr wrap="square" lIns="0" tIns="0" rIns="0" bIns="0" rtlCol="0"/>
           <a:lstStyle/>
           <a:p>
-            <a:pPr indent="0" marL="0">
+            <a:pPr marL="0" indent="0">
               <a:buNone/>
             </a:pPr>
             <a:r>
@@ -22762,6 +23189,13 @@
           </a:solidFill>
           <a:ln/>
         </p:spPr>
+        <p:txBody>
+          <a:bodyPr/>
+          <a:lstStyle/>
+          <a:p>
+            <a:endParaRPr lang="en-US"/>
+          </a:p>
+        </p:txBody>
       </p:sp>
       <p:sp>
         <p:nvSpPr>
@@ -22784,7 +23218,7 @@
           <a:bodyPr wrap="square" lIns="0" tIns="0" rIns="0" bIns="0" rtlCol="0" anchor="ctr"/>
           <a:lstStyle/>
           <a:p>
-            <a:pPr indent="0" marL="0">
+            <a:pPr marL="0" indent="0">
               <a:buNone/>
             </a:pPr>
             <a:r>
@@ -22823,7 +23257,7 @@
           <a:bodyPr wrap="square" lIns="0" tIns="0" rIns="0" bIns="0" rtlCol="0" anchor="ctr"/>
           <a:lstStyle/>
           <a:p>
-            <a:pPr indent="0" marL="0">
+            <a:pPr marL="0" indent="0">
               <a:buNone/>
             </a:pPr>
             <a:r>
@@ -22862,6 +23296,13 @@
           </a:solidFill>
           <a:ln/>
         </p:spPr>
+        <p:txBody>
+          <a:bodyPr/>
+          <a:lstStyle/>
+          <a:p>
+            <a:endParaRPr lang="en-US"/>
+          </a:p>
+        </p:txBody>
       </p:sp>
       <p:sp>
         <p:nvSpPr>
@@ -22884,7 +23325,7 @@
           <a:bodyPr wrap="square" lIns="0" tIns="0" rIns="0" bIns="0" rtlCol="0" anchor="ctr"/>
           <a:lstStyle/>
           <a:p>
-            <a:pPr indent="0" marL="0">
+            <a:pPr marL="0" indent="0">
               <a:buNone/>
             </a:pPr>
             <a:r>
@@ -22923,7 +23364,7 @@
           <a:bodyPr wrap="square" lIns="0" tIns="0" rIns="0" bIns="0" rtlCol="0" anchor="ctr"/>
           <a:lstStyle/>
           <a:p>
-            <a:pPr indent="0" marL="0">
+            <a:pPr marL="0" indent="0">
               <a:buNone/>
             </a:pPr>
             <a:r>
@@ -22962,6 +23403,13 @@
           </a:solidFill>
           <a:ln/>
         </p:spPr>
+        <p:txBody>
+          <a:bodyPr/>
+          <a:lstStyle/>
+          <a:p>
+            <a:endParaRPr lang="en-US"/>
+          </a:p>
+        </p:txBody>
       </p:sp>
       <p:sp>
         <p:nvSpPr>
@@ -22984,7 +23432,7 @@
           <a:bodyPr wrap="square" lIns="0" tIns="0" rIns="0" bIns="0" rtlCol="0" anchor="ctr"/>
           <a:lstStyle/>
           <a:p>
-            <a:pPr indent="0" marL="0">
+            <a:pPr marL="0" indent="0">
               <a:buNone/>
             </a:pPr>
             <a:r>
@@ -23023,7 +23471,7 @@
           <a:bodyPr wrap="square" lIns="0" tIns="0" rIns="0" bIns="0" rtlCol="0" anchor="ctr"/>
           <a:lstStyle/>
           <a:p>
-            <a:pPr indent="0" marL="0">
+            <a:pPr marL="0" indent="0">
               <a:buNone/>
             </a:pPr>
             <a:r>
@@ -23062,6 +23510,13 @@
           </a:solidFill>
           <a:ln/>
         </p:spPr>
+        <p:txBody>
+          <a:bodyPr/>
+          <a:lstStyle/>
+          <a:p>
+            <a:endParaRPr lang="en-US"/>
+          </a:p>
+        </p:txBody>
       </p:sp>
       <p:sp>
         <p:nvSpPr>
@@ -23084,7 +23539,7 @@
           <a:bodyPr wrap="square" lIns="0" tIns="0" rIns="0" bIns="0" rtlCol="0" anchor="ctr"/>
           <a:lstStyle/>
           <a:p>
-            <a:pPr indent="0" marL="0">
+            <a:pPr marL="0" indent="0">
               <a:buNone/>
             </a:pPr>
             <a:r>
@@ -23101,13 +23556,13 @@
             <a:endParaRPr lang="en-US" sz="1500" dirty="0"/>
           </a:p>
           <a:p>
-            <a:pPr indent="0" marL="0">
+            <a:pPr marL="0" indent="0">
               <a:buNone/>
             </a:pPr>
             <a:endParaRPr lang="en-US" sz="1500" dirty="0"/>
           </a:p>
           <a:p>
-            <a:pPr indent="0" marL="0">
+            <a:pPr marL="0" indent="0">
               <a:buNone/>
             </a:pPr>
             <a:r>
@@ -23145,7 +23600,7 @@
           </a:prstGeom>
           <a:extLst>
             <a:ext uri="{C572A759-6A51-4108-AA02-DFA0A04FC94B}">
-              <ma14:wrappingTextBoxFlag xmlns:ma14="http://schemas.microsoft.com/office/mac/drawingml/2011/main" val="0"/>
+              <ma14:wrappingTextBoxFlag xmlns:ma14="http://schemas.microsoft.com/office/mac/drawingml/2011/main" xmlns="" val="0"/>
             </a:ext>
           </a:extLst>
         </p:spPr>
@@ -23166,7 +23621,7 @@
           <a:p>
             <a:pPr algn="l"/>
             <a:fld id="{F7021451-1387-4CA6-816F-3879F97B5CBC}" type="slidenum">
-              <a:rPr b="0" lang="en-US"/>
+              <a:rPr lang="en-US" b="0"/>
               <a:t>4</a:t>
             </a:fld>
             <a:endParaRPr lang="en-US"/>
@@ -23219,11 +23674,11 @@
           <a:bodyPr wrap="square" lIns="0" tIns="0" rIns="0" bIns="0" rtlCol="0" anchor="ctr"/>
           <a:lstStyle/>
           <a:p>
-            <a:pPr indent="0" marL="0">
-              <a:buNone/>
-            </a:pPr>
-            <a:r>
-              <a:rPr lang="en-US" sz="1200" spc="120" kern="0" dirty="0">
+            <a:pPr marL="0" indent="0">
+              <a:buNone/>
+            </a:pPr>
+            <a:r>
+              <a:rPr lang="en-US" sz="1200" kern="0" spc="120" dirty="0">
                 <a:solidFill>
                   <a:srgbClr val="8A5A10"/>
                 </a:solidFill>
@@ -23240,9 +23695,11 @@
       <p:sp>
         <p:nvSpPr>
           <p:cNvPr id="3" name="Text 0"/>
-          <p:cNvSpPr/>
+          <p:cNvSpPr>
+            <a:spLocks noGrp="1"/>
+          </p:cNvSpPr>
           <p:nvPr>
-            <p:ph idx="100" type="title" hasCustomPrompt="1"/>
+            <p:ph type="title" idx="100" hasCustomPrompt="1"/>
           </p:nvPr>
         </p:nvSpPr>
         <p:spPr>
@@ -23260,7 +23717,7 @@
           <a:bodyPr wrap="square" lIns="0" tIns="0" rIns="0" bIns="0" rtlCol="0" anchor="t"/>
           <a:lstStyle/>
           <a:p>
-            <a:pPr indent="0" marL="0">
+            <a:pPr marL="0" indent="0">
               <a:buNone/>
             </a:pPr>
             <a:r>
@@ -23299,13 +23756,20 @@
           </a:solidFill>
           <a:ln/>
           <a:effectLst>
-            <a:outerShdw sx="100000" sy="100000" kx="0" ky="0" algn="bl" rotWithShape="0" blurRad="177800" dist="38100" dir="5400000">
+            <a:outerShdw blurRad="177800" dist="38100" dir="5400000" algn="bl" rotWithShape="0">
               <a:srgbClr val="1A1E1B">
                 <a:alpha val="8000"/>
               </a:srgbClr>
             </a:outerShdw>
           </a:effectLst>
         </p:spPr>
+        <p:txBody>
+          <a:bodyPr/>
+          <a:lstStyle/>
+          <a:p>
+            <a:endParaRPr lang="en-US"/>
+          </a:p>
+        </p:txBody>
       </p:sp>
       <p:sp>
         <p:nvSpPr>
@@ -23328,7 +23792,7 @@
           <a:bodyPr wrap="square" lIns="0" tIns="0" rIns="0" bIns="0" rtlCol="0" anchor="ctr"/>
           <a:lstStyle/>
           <a:p>
-            <a:pPr indent="0" marL="0">
+            <a:pPr marL="0" indent="0">
               <a:buNone/>
             </a:pPr>
             <a:r>
@@ -23367,7 +23831,7 @@
           <a:bodyPr wrap="square" lIns="0" tIns="0" rIns="0" bIns="0" rtlCol="0" anchor="ctr"/>
           <a:lstStyle/>
           <a:p>
-            <a:pPr indent="0" marL="0">
+            <a:pPr marL="0" indent="0">
               <a:buNone/>
             </a:pPr>
             <a:r>
@@ -23406,13 +23870,20 @@
           </a:solidFill>
           <a:ln/>
           <a:effectLst>
-            <a:outerShdw sx="100000" sy="100000" kx="0" ky="0" algn="bl" rotWithShape="0" blurRad="177800" dist="38100" dir="5400000">
+            <a:outerShdw blurRad="177800" dist="38100" dir="5400000" algn="bl" rotWithShape="0">
               <a:srgbClr val="1A1E1B">
                 <a:alpha val="8000"/>
               </a:srgbClr>
             </a:outerShdw>
           </a:effectLst>
         </p:spPr>
+        <p:txBody>
+          <a:bodyPr/>
+          <a:lstStyle/>
+          <a:p>
+            <a:endParaRPr lang="en-US"/>
+          </a:p>
+        </p:txBody>
       </p:sp>
       <p:sp>
         <p:nvSpPr>
@@ -23435,7 +23906,7 @@
           <a:bodyPr wrap="square" lIns="0" tIns="0" rIns="0" bIns="0" rtlCol="0" anchor="ctr"/>
           <a:lstStyle/>
           <a:p>
-            <a:pPr indent="0" marL="0">
+            <a:pPr marL="0" indent="0">
               <a:buNone/>
             </a:pPr>
             <a:r>
@@ -23474,7 +23945,7 @@
           <a:bodyPr wrap="square" lIns="0" tIns="0" rIns="0" bIns="0" rtlCol="0" anchor="ctr"/>
           <a:lstStyle/>
           <a:p>
-            <a:pPr indent="0" marL="0">
+            <a:pPr marL="0" indent="0">
               <a:buNone/>
             </a:pPr>
             <a:r>
@@ -23513,13 +23984,20 @@
           </a:solidFill>
           <a:ln/>
           <a:effectLst>
-            <a:outerShdw sx="100000" sy="100000" kx="0" ky="0" algn="bl" rotWithShape="0" blurRad="177800" dist="38100" dir="5400000">
+            <a:outerShdw blurRad="177800" dist="38100" dir="5400000" algn="bl" rotWithShape="0">
               <a:srgbClr val="1A1E1B">
                 <a:alpha val="8000"/>
               </a:srgbClr>
             </a:outerShdw>
           </a:effectLst>
         </p:spPr>
+        <p:txBody>
+          <a:bodyPr/>
+          <a:lstStyle/>
+          <a:p>
+            <a:endParaRPr lang="en-US"/>
+          </a:p>
+        </p:txBody>
       </p:sp>
       <p:sp>
         <p:nvSpPr>
@@ -23542,7 +24020,7 @@
           <a:bodyPr wrap="square" lIns="0" tIns="0" rIns="0" bIns="0" rtlCol="0" anchor="ctr"/>
           <a:lstStyle/>
           <a:p>
-            <a:pPr indent="0" marL="0">
+            <a:pPr marL="0" indent="0">
               <a:buNone/>
             </a:pPr>
             <a:r>
@@ -23581,7 +24059,7 @@
           <a:bodyPr wrap="square" lIns="0" tIns="0" rIns="0" bIns="0" rtlCol="0" anchor="ctr"/>
           <a:lstStyle/>
           <a:p>
-            <a:pPr indent="0" marL="0">
+            <a:pPr marL="0" indent="0">
               <a:buNone/>
             </a:pPr>
             <a:r>
@@ -23620,13 +24098,20 @@
           </a:solidFill>
           <a:ln/>
           <a:effectLst>
-            <a:outerShdw sx="100000" sy="100000" kx="0" ky="0" algn="bl" rotWithShape="0" blurRad="177800" dist="38100" dir="5400000">
+            <a:outerShdw blurRad="177800" dist="38100" dir="5400000" algn="bl" rotWithShape="0">
               <a:srgbClr val="1A1E1B">
                 <a:alpha val="8000"/>
               </a:srgbClr>
             </a:outerShdw>
           </a:effectLst>
         </p:spPr>
+        <p:txBody>
+          <a:bodyPr/>
+          <a:lstStyle/>
+          <a:p>
+            <a:endParaRPr lang="en-US"/>
+          </a:p>
+        </p:txBody>
       </p:sp>
       <p:sp>
         <p:nvSpPr>
@@ -23649,7 +24134,7 @@
           <a:bodyPr wrap="square" lIns="0" tIns="0" rIns="0" bIns="0" rtlCol="0" anchor="ctr"/>
           <a:lstStyle/>
           <a:p>
-            <a:pPr indent="0" marL="0">
+            <a:pPr marL="0" indent="0">
               <a:buNone/>
             </a:pPr>
             <a:r>
@@ -23688,7 +24173,7 @@
           <a:bodyPr wrap="square" lIns="0" tIns="0" rIns="0" bIns="0" rtlCol="0" anchor="ctr"/>
           <a:lstStyle/>
           <a:p>
-            <a:pPr indent="0" marL="0">
+            <a:pPr marL="0" indent="0">
               <a:buNone/>
             </a:pPr>
             <a:r>
@@ -23727,13 +24212,20 @@
           </a:solidFill>
           <a:ln/>
           <a:effectLst>
-            <a:outerShdw sx="100000" sy="100000" kx="0" ky="0" algn="bl" rotWithShape="0" blurRad="177800" dist="38100" dir="5400000">
+            <a:outerShdw blurRad="177800" dist="38100" dir="5400000" algn="bl" rotWithShape="0">
               <a:srgbClr val="1A1E1B">
                 <a:alpha val="8000"/>
               </a:srgbClr>
             </a:outerShdw>
           </a:effectLst>
         </p:spPr>
+        <p:txBody>
+          <a:bodyPr/>
+          <a:lstStyle/>
+          <a:p>
+            <a:endParaRPr lang="en-US"/>
+          </a:p>
+        </p:txBody>
       </p:sp>
       <p:sp>
         <p:nvSpPr>
@@ -23756,7 +24248,7 @@
           <a:bodyPr wrap="square" lIns="0" tIns="0" rIns="0" bIns="0" rtlCol="0" anchor="ctr"/>
           <a:lstStyle/>
           <a:p>
-            <a:pPr indent="0" marL="0">
+            <a:pPr marL="0" indent="0">
               <a:buNone/>
             </a:pPr>
             <a:r>
@@ -23795,7 +24287,7 @@
           <a:bodyPr wrap="square" lIns="0" tIns="0" rIns="0" bIns="0" rtlCol="0" anchor="ctr"/>
           <a:lstStyle/>
           <a:p>
-            <a:pPr indent="0" marL="0">
+            <a:pPr marL="0" indent="0">
               <a:buNone/>
             </a:pPr>
             <a:r>
@@ -23834,13 +24326,20 @@
           </a:solidFill>
           <a:ln/>
           <a:effectLst>
-            <a:outerShdw sx="100000" sy="100000" kx="0" ky="0" algn="bl" rotWithShape="0" blurRad="177800" dist="38100" dir="5400000">
+            <a:outerShdw blurRad="177800" dist="38100" dir="5400000" algn="bl" rotWithShape="0">
               <a:srgbClr val="1A1E1B">
                 <a:alpha val="8000"/>
               </a:srgbClr>
             </a:outerShdw>
           </a:effectLst>
         </p:spPr>
+        <p:txBody>
+          <a:bodyPr/>
+          <a:lstStyle/>
+          <a:p>
+            <a:endParaRPr lang="en-US"/>
+          </a:p>
+        </p:txBody>
       </p:sp>
       <p:sp>
         <p:nvSpPr>
@@ -23863,7 +24362,7 @@
           <a:bodyPr wrap="square" lIns="0" tIns="0" rIns="0" bIns="0" rtlCol="0" anchor="ctr"/>
           <a:lstStyle/>
           <a:p>
-            <a:pPr indent="0" marL="0">
+            <a:pPr marL="0" indent="0">
               <a:buNone/>
             </a:pPr>
             <a:r>
@@ -23902,7 +24401,7 @@
           <a:bodyPr wrap="square" lIns="0" tIns="0" rIns="0" bIns="0" rtlCol="0" anchor="ctr"/>
           <a:lstStyle/>
           <a:p>
-            <a:pPr indent="0" marL="0">
+            <a:pPr marL="0" indent="0">
               <a:buNone/>
             </a:pPr>
             <a:r>
@@ -23940,7 +24439,7 @@
           </a:prstGeom>
           <a:extLst>
             <a:ext uri="{C572A759-6A51-4108-AA02-DFA0A04FC94B}">
-              <ma14:wrappingTextBoxFlag xmlns:ma14="http://schemas.microsoft.com/office/mac/drawingml/2011/main" val="0"/>
+              <ma14:wrappingTextBoxFlag xmlns:ma14="http://schemas.microsoft.com/office/mac/drawingml/2011/main" xmlns="" val="0"/>
             </a:ext>
           </a:extLst>
         </p:spPr>
@@ -23961,7 +24460,7 @@
           <a:p>
             <a:pPr algn="l"/>
             <a:fld id="{F7021451-1387-4CA6-816F-3879F97B5CBC}" type="slidenum">
-              <a:rPr b="0" lang="en-US"/>
+              <a:rPr lang="en-US" b="0"/>
               <a:t>5</a:t>
             </a:fld>
             <a:endParaRPr lang="en-US"/>
@@ -24014,11 +24513,11 @@
           <a:bodyPr wrap="square" lIns="0" tIns="0" rIns="0" bIns="0" rtlCol="0" anchor="ctr"/>
           <a:lstStyle/>
           <a:p>
-            <a:pPr indent="0" marL="0">
-              <a:buNone/>
-            </a:pPr>
-            <a:r>
-              <a:rPr lang="en-US" sz="1200" spc="120" kern="0" dirty="0">
+            <a:pPr marL="0" indent="0">
+              <a:buNone/>
+            </a:pPr>
+            <a:r>
+              <a:rPr lang="en-US" sz="1200" kern="0" spc="120" dirty="0">
                 <a:solidFill>
                   <a:srgbClr val="8A5A10"/>
                 </a:solidFill>
@@ -24035,9 +24534,11 @@
       <p:sp>
         <p:nvSpPr>
           <p:cNvPr id="3" name="Text 0"/>
-          <p:cNvSpPr/>
+          <p:cNvSpPr>
+            <a:spLocks noGrp="1"/>
+          </p:cNvSpPr>
           <p:nvPr>
-            <p:ph idx="100" type="title" hasCustomPrompt="1"/>
+            <p:ph type="title" idx="100" hasCustomPrompt="1"/>
           </p:nvPr>
         </p:nvSpPr>
         <p:spPr>
@@ -24055,7 +24556,7 @@
           <a:bodyPr wrap="square" lIns="0" tIns="0" rIns="0" bIns="0" rtlCol="0" anchor="t"/>
           <a:lstStyle/>
           <a:p>
-            <a:pPr indent="0" marL="0">
+            <a:pPr marL="0" indent="0">
               <a:buNone/>
             </a:pPr>
             <a:r>
@@ -24094,13 +24595,20 @@
           </a:solidFill>
           <a:ln/>
           <a:effectLst>
-            <a:outerShdw sx="100000" sy="100000" kx="0" ky="0" algn="bl" rotWithShape="0" blurRad="177800" dist="38100" dir="5400000">
+            <a:outerShdw blurRad="177800" dist="38100" dir="5400000" algn="bl" rotWithShape="0">
               <a:srgbClr val="1A1E1B">
                 <a:alpha val="8000"/>
               </a:srgbClr>
             </a:outerShdw>
           </a:effectLst>
         </p:spPr>
+        <p:txBody>
+          <a:bodyPr/>
+          <a:lstStyle/>
+          <a:p>
+            <a:endParaRPr lang="en-US"/>
+          </a:p>
+        </p:txBody>
       </p:sp>
       <p:sp>
         <p:nvSpPr>
@@ -24123,7 +24631,7 @@
           <a:bodyPr wrap="square" lIns="0" tIns="0" rIns="0" bIns="0" rtlCol="0" anchor="ctr"/>
           <a:lstStyle/>
           <a:p>
-            <a:pPr indent="0" marL="0">
+            <a:pPr marL="0" indent="0">
               <a:buNone/>
             </a:pPr>
             <a:r>
@@ -24162,7 +24670,7 @@
           <a:bodyPr wrap="square" lIns="0" tIns="0" rIns="0" bIns="0" rtlCol="0" anchor="ctr"/>
           <a:lstStyle/>
           <a:p>
-            <a:pPr indent="0" marL="0">
+            <a:pPr marL="0" indent="0">
               <a:buNone/>
             </a:pPr>
             <a:r>
@@ -24201,13 +24709,20 @@
           </a:solidFill>
           <a:ln/>
           <a:effectLst>
-            <a:outerShdw sx="100000" sy="100000" kx="0" ky="0" algn="bl" rotWithShape="0" blurRad="177800" dist="38100" dir="5400000">
+            <a:outerShdw blurRad="177800" dist="38100" dir="5400000" algn="bl" rotWithShape="0">
               <a:srgbClr val="1A1E1B">
                 <a:alpha val="8000"/>
               </a:srgbClr>
             </a:outerShdw>
           </a:effectLst>
         </p:spPr>
+        <p:txBody>
+          <a:bodyPr/>
+          <a:lstStyle/>
+          <a:p>
+            <a:endParaRPr lang="en-US"/>
+          </a:p>
+        </p:txBody>
       </p:sp>
       <p:sp>
         <p:nvSpPr>
@@ -24230,7 +24745,7 @@
           <a:bodyPr wrap="square" lIns="0" tIns="0" rIns="0" bIns="0" rtlCol="0" anchor="ctr"/>
           <a:lstStyle/>
           <a:p>
-            <a:pPr indent="0" marL="0">
+            <a:pPr marL="0" indent="0">
               <a:buNone/>
             </a:pPr>
             <a:r>
@@ -24269,7 +24784,7 @@
           <a:bodyPr wrap="square" lIns="0" tIns="0" rIns="0" bIns="0" rtlCol="0" anchor="ctr"/>
           <a:lstStyle/>
           <a:p>
-            <a:pPr indent="0" marL="0">
+            <a:pPr marL="0" indent="0">
               <a:buNone/>
             </a:pPr>
             <a:r>
@@ -24308,13 +24823,20 @@
           </a:solidFill>
           <a:ln/>
           <a:effectLst>
-            <a:outerShdw sx="100000" sy="100000" kx="0" ky="0" algn="bl" rotWithShape="0" blurRad="177800" dist="38100" dir="5400000">
+            <a:outerShdw blurRad="177800" dist="38100" dir="5400000" algn="bl" rotWithShape="0">
               <a:srgbClr val="1A1E1B">
                 <a:alpha val="8000"/>
               </a:srgbClr>
             </a:outerShdw>
           </a:effectLst>
         </p:spPr>
+        <p:txBody>
+          <a:bodyPr/>
+          <a:lstStyle/>
+          <a:p>
+            <a:endParaRPr lang="en-US"/>
+          </a:p>
+        </p:txBody>
       </p:sp>
       <p:sp>
         <p:nvSpPr>
@@ -24337,7 +24859,7 @@
           <a:bodyPr wrap="square" lIns="0" tIns="0" rIns="0" bIns="0" rtlCol="0" anchor="ctr"/>
           <a:lstStyle/>
           <a:p>
-            <a:pPr indent="0" marL="0">
+            <a:pPr marL="0" indent="0">
               <a:buNone/>
             </a:pPr>
             <a:r>
@@ -24376,7 +24898,7 @@
           <a:bodyPr wrap="square" lIns="0" tIns="0" rIns="0" bIns="0" rtlCol="0" anchor="ctr"/>
           <a:lstStyle/>
           <a:p>
-            <a:pPr indent="0" marL="0">
+            <a:pPr marL="0" indent="0">
               <a:buNone/>
             </a:pPr>
             <a:r>
@@ -24415,13 +24937,20 @@
           </a:solidFill>
           <a:ln/>
           <a:effectLst>
-            <a:outerShdw sx="100000" sy="100000" kx="0" ky="0" algn="bl" rotWithShape="0" blurRad="177800" dist="38100" dir="5400000">
+            <a:outerShdw blurRad="177800" dist="38100" dir="5400000" algn="bl" rotWithShape="0">
               <a:srgbClr val="1A1E1B">
                 <a:alpha val="8000"/>
               </a:srgbClr>
             </a:outerShdw>
           </a:effectLst>
         </p:spPr>
+        <p:txBody>
+          <a:bodyPr/>
+          <a:lstStyle/>
+          <a:p>
+            <a:endParaRPr lang="en-US"/>
+          </a:p>
+        </p:txBody>
       </p:sp>
       <p:sp>
         <p:nvSpPr>
@@ -24444,7 +24973,7 @@
           <a:bodyPr wrap="square" lIns="0" tIns="0" rIns="0" bIns="0" rtlCol="0" anchor="ctr"/>
           <a:lstStyle/>
           <a:p>
-            <a:pPr indent="0" marL="0">
+            <a:pPr marL="0" indent="0">
               <a:buNone/>
             </a:pPr>
             <a:r>
@@ -24483,7 +25012,7 @@
           <a:bodyPr wrap="square" lIns="0" tIns="0" rIns="0" bIns="0" rtlCol="0" anchor="ctr"/>
           <a:lstStyle/>
           <a:p>
-            <a:pPr indent="0" marL="0">
+            <a:pPr marL="0" indent="0">
               <a:buNone/>
             </a:pPr>
             <a:r>
@@ -24522,13 +25051,20 @@
           </a:solidFill>
           <a:ln/>
           <a:effectLst>
-            <a:outerShdw sx="100000" sy="100000" kx="0" ky="0" algn="bl" rotWithShape="0" blurRad="177800" dist="38100" dir="5400000">
+            <a:outerShdw blurRad="177800" dist="38100" dir="5400000" algn="bl" rotWithShape="0">
               <a:srgbClr val="1A1E1B">
                 <a:alpha val="8000"/>
               </a:srgbClr>
             </a:outerShdw>
           </a:effectLst>
         </p:spPr>
+        <p:txBody>
+          <a:bodyPr/>
+          <a:lstStyle/>
+          <a:p>
+            <a:endParaRPr lang="en-US"/>
+          </a:p>
+        </p:txBody>
       </p:sp>
       <p:sp>
         <p:nvSpPr>
@@ -24551,7 +25087,7 @@
           <a:bodyPr wrap="square" lIns="0" tIns="0" rIns="0" bIns="0" rtlCol="0" anchor="ctr"/>
           <a:lstStyle/>
           <a:p>
-            <a:pPr indent="0" marL="0">
+            <a:pPr marL="0" indent="0">
               <a:buNone/>
             </a:pPr>
             <a:r>
@@ -24590,7 +25126,7 @@
           <a:bodyPr wrap="square" lIns="0" tIns="0" rIns="0" bIns="0" rtlCol="0" anchor="ctr"/>
           <a:lstStyle/>
           <a:p>
-            <a:pPr indent="0" marL="0">
+            <a:pPr marL="0" indent="0">
               <a:buNone/>
             </a:pPr>
             <a:r>
@@ -24629,13 +25165,20 @@
           </a:solidFill>
           <a:ln/>
           <a:effectLst>
-            <a:outerShdw sx="100000" sy="100000" kx="0" ky="0" algn="bl" rotWithShape="0" blurRad="177800" dist="38100" dir="5400000">
+            <a:outerShdw blurRad="177800" dist="38100" dir="5400000" algn="bl" rotWithShape="0">
               <a:srgbClr val="1A1E1B">
                 <a:alpha val="8000"/>
               </a:srgbClr>
             </a:outerShdw>
           </a:effectLst>
         </p:spPr>
+        <p:txBody>
+          <a:bodyPr/>
+          <a:lstStyle/>
+          <a:p>
+            <a:endParaRPr lang="en-US"/>
+          </a:p>
+        </p:txBody>
       </p:sp>
       <p:sp>
         <p:nvSpPr>
@@ -24658,7 +25201,7 @@
           <a:bodyPr wrap="square" lIns="0" tIns="0" rIns="0" bIns="0" rtlCol="0" anchor="ctr"/>
           <a:lstStyle/>
           <a:p>
-            <a:pPr indent="0" marL="0">
+            <a:pPr marL="0" indent="0">
               <a:buNone/>
             </a:pPr>
             <a:r>
@@ -24697,7 +25240,7 @@
           <a:bodyPr wrap="square" lIns="0" tIns="0" rIns="0" bIns="0" rtlCol="0" anchor="ctr"/>
           <a:lstStyle/>
           <a:p>
-            <a:pPr indent="0" marL="0">
+            <a:pPr marL="0" indent="0">
               <a:buNone/>
             </a:pPr>
             <a:r>
@@ -24736,13 +25279,20 @@
           </a:solidFill>
           <a:ln/>
           <a:effectLst>
-            <a:outerShdw sx="100000" sy="100000" kx="0" ky="0" algn="bl" rotWithShape="0" blurRad="177800" dist="38100" dir="5400000">
+            <a:outerShdw blurRad="177800" dist="38100" dir="5400000" algn="bl" rotWithShape="0">
               <a:srgbClr val="1A1E1B">
                 <a:alpha val="8000"/>
               </a:srgbClr>
             </a:outerShdw>
           </a:effectLst>
         </p:spPr>
+        <p:txBody>
+          <a:bodyPr/>
+          <a:lstStyle/>
+          <a:p>
+            <a:endParaRPr lang="en-US"/>
+          </a:p>
+        </p:txBody>
       </p:sp>
       <p:sp>
         <p:nvSpPr>
@@ -24765,7 +25315,7 @@
           <a:bodyPr wrap="square" lIns="0" tIns="0" rIns="0" bIns="0" rtlCol="0" anchor="ctr"/>
           <a:lstStyle/>
           <a:p>
-            <a:pPr indent="0" marL="0">
+            <a:pPr marL="0" indent="0">
               <a:buNone/>
             </a:pPr>
             <a:r>
@@ -24804,7 +25354,7 @@
           <a:bodyPr wrap="square" lIns="0" tIns="0" rIns="0" bIns="0" rtlCol="0" anchor="ctr"/>
           <a:lstStyle/>
           <a:p>
-            <a:pPr indent="0" marL="0">
+            <a:pPr marL="0" indent="0">
               <a:buNone/>
             </a:pPr>
             <a:r>
@@ -24843,13 +25393,20 @@
           </a:solidFill>
           <a:ln/>
           <a:effectLst>
-            <a:outerShdw sx="100000" sy="100000" kx="0" ky="0" algn="bl" rotWithShape="0" blurRad="177800" dist="38100" dir="5400000">
+            <a:outerShdw blurRad="177800" dist="38100" dir="5400000" algn="bl" rotWithShape="0">
               <a:srgbClr val="1A1E1B">
                 <a:alpha val="8000"/>
               </a:srgbClr>
             </a:outerShdw>
           </a:effectLst>
         </p:spPr>
+        <p:txBody>
+          <a:bodyPr/>
+          <a:lstStyle/>
+          <a:p>
+            <a:endParaRPr lang="en-US"/>
+          </a:p>
+        </p:txBody>
       </p:sp>
       <p:sp>
         <p:nvSpPr>
@@ -24872,7 +25429,7 @@
           <a:bodyPr wrap="square" lIns="0" tIns="0" rIns="0" bIns="0" rtlCol="0" anchor="ctr"/>
           <a:lstStyle/>
           <a:p>
-            <a:pPr indent="0" marL="0">
+            <a:pPr marL="0" indent="0">
               <a:buNone/>
             </a:pPr>
             <a:r>
@@ -24911,7 +25468,7 @@
           <a:bodyPr wrap="square" lIns="0" tIns="0" rIns="0" bIns="0" rtlCol="0" anchor="ctr"/>
           <a:lstStyle/>
           <a:p>
-            <a:pPr indent="0" marL="0">
+            <a:pPr marL="0" indent="0">
               <a:buNone/>
             </a:pPr>
             <a:r>
@@ -24931,7 +25488,7 @@
       </p:sp>
       <p:sp>
         <p:nvSpPr>
-          <p:cNvPr id="25" name="Slide Number Placeholder 0"/>
+          <p:cNvPr id="4" name="Slide Number Placeholder 0"/>
           <p:cNvSpPr>
             <a:spLocks noGrp="1"/>
           </p:cNvSpPr>
@@ -24949,7 +25506,7 @@
           </a:prstGeom>
           <a:extLst>
             <a:ext uri="{C572A759-6A51-4108-AA02-DFA0A04FC94B}">
-              <ma14:wrappingTextBoxFlag xmlns:ma14="http://schemas.microsoft.com/office/mac/drawingml/2011/main" val="0"/>
+              <ma14:wrappingTextBoxFlag xmlns:ma14="http://schemas.microsoft.com/office/mac/drawingml/2011/main" xmlns="" val="0"/>
             </a:ext>
           </a:extLst>
         </p:spPr>
@@ -24970,7 +25527,7 @@
           <a:p>
             <a:pPr algn="l"/>
             <a:fld id="{F7021451-1387-4CA6-816F-3879F97B5CBC}" type="slidenum">
-              <a:rPr b="0" lang="en-US"/>
+              <a:rPr lang="en-US" b="0"/>
               <a:t>6</a:t>
             </a:fld>
             <a:endParaRPr lang="en-US"/>
@@ -25023,11 +25580,11 @@
           <a:bodyPr wrap="square" lIns="0" tIns="0" rIns="0" bIns="0" rtlCol="0" anchor="ctr"/>
           <a:lstStyle/>
           <a:p>
-            <a:pPr indent="0" marL="0">
-              <a:buNone/>
-            </a:pPr>
-            <a:r>
-              <a:rPr lang="en-US" sz="1200" spc="120" kern="0" dirty="0">
+            <a:pPr marL="0" indent="0">
+              <a:buNone/>
+            </a:pPr>
+            <a:r>
+              <a:rPr lang="en-US" sz="1200" kern="0" spc="120" dirty="0">
                 <a:solidFill>
                   <a:srgbClr val="8A5A10"/>
                 </a:solidFill>
@@ -25044,9 +25601,11 @@
       <p:sp>
         <p:nvSpPr>
           <p:cNvPr id="3" name="Text 0"/>
-          <p:cNvSpPr/>
+          <p:cNvSpPr>
+            <a:spLocks noGrp="1"/>
+          </p:cNvSpPr>
           <p:nvPr>
-            <p:ph idx="100" type="title" hasCustomPrompt="1"/>
+            <p:ph type="title" idx="100" hasCustomPrompt="1"/>
           </p:nvPr>
         </p:nvSpPr>
         <p:spPr>
@@ -25064,7 +25623,7 @@
           <a:bodyPr wrap="square" lIns="0" tIns="0" rIns="0" bIns="0" rtlCol="0" anchor="t"/>
           <a:lstStyle/>
           <a:p>
-            <a:pPr indent="0" marL="0">
+            <a:pPr marL="0" indent="0">
               <a:buNone/>
             </a:pPr>
             <a:r>
@@ -25103,13 +25662,20 @@
           </a:solidFill>
           <a:ln/>
           <a:effectLst>
-            <a:outerShdw sx="100000" sy="100000" kx="0" ky="0" algn="bl" rotWithShape="0" blurRad="177800" dist="38100" dir="5400000">
+            <a:outerShdw blurRad="177800" dist="38100" dir="5400000" algn="bl" rotWithShape="0">
               <a:srgbClr val="1A1E1B">
                 <a:alpha val="8000"/>
               </a:srgbClr>
             </a:outerShdw>
           </a:effectLst>
         </p:spPr>
+        <p:txBody>
+          <a:bodyPr/>
+          <a:lstStyle/>
+          <a:p>
+            <a:endParaRPr lang="en-US"/>
+          </a:p>
+        </p:txBody>
       </p:sp>
       <p:sp>
         <p:nvSpPr>
@@ -25132,7 +25698,7 @@
           <a:bodyPr wrap="square" lIns="0" tIns="0" rIns="0" bIns="0" rtlCol="0" anchor="ctr"/>
           <a:lstStyle/>
           <a:p>
-            <a:pPr indent="0" marL="0">
+            <a:pPr marL="0" indent="0">
               <a:buNone/>
             </a:pPr>
             <a:r>
@@ -25171,7 +25737,7 @@
           <a:bodyPr wrap="square" lIns="0" tIns="0" rIns="0" bIns="0" rtlCol="0" anchor="ctr"/>
           <a:lstStyle/>
           <a:p>
-            <a:pPr indent="0" marL="0">
+            <a:pPr marL="0" indent="0">
               <a:buNone/>
             </a:pPr>
             <a:r>
@@ -25210,13 +25776,20 @@
           </a:solidFill>
           <a:ln/>
           <a:effectLst>
-            <a:outerShdw sx="100000" sy="100000" kx="0" ky="0" algn="bl" rotWithShape="0" blurRad="177800" dist="38100" dir="5400000">
+            <a:outerShdw blurRad="177800" dist="38100" dir="5400000" algn="bl" rotWithShape="0">
               <a:srgbClr val="1A1E1B">
                 <a:alpha val="8000"/>
               </a:srgbClr>
             </a:outerShdw>
           </a:effectLst>
         </p:spPr>
+        <p:txBody>
+          <a:bodyPr/>
+          <a:lstStyle/>
+          <a:p>
+            <a:endParaRPr lang="en-US"/>
+          </a:p>
+        </p:txBody>
       </p:sp>
       <p:sp>
         <p:nvSpPr>
@@ -25239,7 +25812,7 @@
           <a:bodyPr wrap="square" lIns="0" tIns="0" rIns="0" bIns="0" rtlCol="0" anchor="ctr"/>
           <a:lstStyle/>
           <a:p>
-            <a:pPr indent="0" marL="0">
+            <a:pPr marL="0" indent="0">
               <a:buNone/>
             </a:pPr>
             <a:r>
@@ -25278,7 +25851,7 @@
           <a:bodyPr wrap="square" lIns="0" tIns="0" rIns="0" bIns="0" rtlCol="0" anchor="ctr"/>
           <a:lstStyle/>
           <a:p>
-            <a:pPr indent="0" marL="0">
+            <a:pPr marL="0" indent="0">
               <a:buNone/>
             </a:pPr>
             <a:r>
@@ -25317,13 +25890,20 @@
           </a:solidFill>
           <a:ln/>
           <a:effectLst>
-            <a:outerShdw sx="100000" sy="100000" kx="0" ky="0" algn="bl" rotWithShape="0" blurRad="177800" dist="38100" dir="5400000">
+            <a:outerShdw blurRad="177800" dist="38100" dir="5400000" algn="bl" rotWithShape="0">
               <a:srgbClr val="1A1E1B">
                 <a:alpha val="8000"/>
               </a:srgbClr>
             </a:outerShdw>
           </a:effectLst>
         </p:spPr>
+        <p:txBody>
+          <a:bodyPr/>
+          <a:lstStyle/>
+          <a:p>
+            <a:endParaRPr lang="en-US"/>
+          </a:p>
+        </p:txBody>
       </p:sp>
       <p:sp>
         <p:nvSpPr>
@@ -25346,7 +25926,7 @@
           <a:bodyPr wrap="square" lIns="0" tIns="0" rIns="0" bIns="0" rtlCol="0" anchor="ctr"/>
           <a:lstStyle/>
           <a:p>
-            <a:pPr indent="0" marL="0">
+            <a:pPr marL="0" indent="0">
               <a:buNone/>
             </a:pPr>
             <a:r>
@@ -25385,7 +25965,7 @@
           <a:bodyPr wrap="square" lIns="0" tIns="0" rIns="0" bIns="0" rtlCol="0" anchor="ctr"/>
           <a:lstStyle/>
           <a:p>
-            <a:pPr indent="0" marL="0">
+            <a:pPr marL="0" indent="0">
               <a:buNone/>
             </a:pPr>
             <a:r>
@@ -25424,13 +26004,20 @@
           </a:solidFill>
           <a:ln/>
           <a:effectLst>
-            <a:outerShdw sx="100000" sy="100000" kx="0" ky="0" algn="bl" rotWithShape="0" blurRad="177800" dist="38100" dir="5400000">
+            <a:outerShdw blurRad="177800" dist="38100" dir="5400000" algn="bl" rotWithShape="0">
               <a:srgbClr val="1A1E1B">
                 <a:alpha val="8000"/>
               </a:srgbClr>
             </a:outerShdw>
           </a:effectLst>
         </p:spPr>
+        <p:txBody>
+          <a:bodyPr/>
+          <a:lstStyle/>
+          <a:p>
+            <a:endParaRPr lang="en-US"/>
+          </a:p>
+        </p:txBody>
       </p:sp>
       <p:sp>
         <p:nvSpPr>
@@ -25453,7 +26040,7 @@
           <a:bodyPr wrap="square" lIns="0" tIns="0" rIns="0" bIns="0" rtlCol="0" anchor="ctr"/>
           <a:lstStyle/>
           <a:p>
-            <a:pPr indent="0" marL="0">
+            <a:pPr marL="0" indent="0">
               <a:buNone/>
             </a:pPr>
             <a:r>
@@ -25492,7 +26079,7 @@
           <a:bodyPr wrap="square" lIns="0" tIns="0" rIns="0" bIns="0" rtlCol="0" anchor="ctr"/>
           <a:lstStyle/>
           <a:p>
-            <a:pPr indent="0" marL="0">
+            <a:pPr marL="0" indent="0">
               <a:buNone/>
             </a:pPr>
             <a:r>
@@ -25530,7 +26117,7 @@
           </a:prstGeom>
           <a:extLst>
             <a:ext uri="{C572A759-6A51-4108-AA02-DFA0A04FC94B}">
-              <ma14:wrappingTextBoxFlag xmlns:ma14="http://schemas.microsoft.com/office/mac/drawingml/2011/main" val="0"/>
+              <ma14:wrappingTextBoxFlag xmlns:ma14="http://schemas.microsoft.com/office/mac/drawingml/2011/main" xmlns="" val="0"/>
             </a:ext>
           </a:extLst>
         </p:spPr>
@@ -25551,7 +26138,7 @@
           <a:p>
             <a:pPr algn="l"/>
             <a:fld id="{F7021451-1387-4CA6-816F-3879F97B5CBC}" type="slidenum">
-              <a:rPr b="0" lang="en-US"/>
+              <a:rPr lang="en-US" b="0"/>
               <a:t>7</a:t>
             </a:fld>
             <a:endParaRPr lang="en-US"/>
@@ -25604,11 +26191,11 @@
           <a:bodyPr wrap="square" lIns="0" tIns="0" rIns="0" bIns="0" rtlCol="0" anchor="ctr"/>
           <a:lstStyle/>
           <a:p>
-            <a:pPr indent="0" marL="0">
-              <a:buNone/>
-            </a:pPr>
-            <a:r>
-              <a:rPr lang="en-US" sz="1200" spc="120" kern="0" dirty="0">
+            <a:pPr marL="0" indent="0">
+              <a:buNone/>
+            </a:pPr>
+            <a:r>
+              <a:rPr lang="en-US" sz="1200" kern="0" spc="120" dirty="0">
                 <a:solidFill>
                   <a:srgbClr val="8A5A10"/>
                 </a:solidFill>
@@ -25625,9 +26212,11 @@
       <p:sp>
         <p:nvSpPr>
           <p:cNvPr id="3" name="Text 0"/>
-          <p:cNvSpPr/>
+          <p:cNvSpPr>
+            <a:spLocks noGrp="1"/>
+          </p:cNvSpPr>
           <p:nvPr>
-            <p:ph idx="100" type="title" hasCustomPrompt="1"/>
+            <p:ph type="title" idx="100" hasCustomPrompt="1"/>
           </p:nvPr>
         </p:nvSpPr>
         <p:spPr>
@@ -25645,7 +26234,7 @@
           <a:bodyPr wrap="square" lIns="0" tIns="0" rIns="0" bIns="0" rtlCol="0" anchor="t"/>
           <a:lstStyle/>
           <a:p>
-            <a:pPr indent="0" marL="0">
+            <a:pPr marL="0" indent="0">
               <a:buNone/>
             </a:pPr>
             <a:r>
@@ -25684,13 +26273,20 @@
           </a:solidFill>
           <a:ln/>
           <a:effectLst>
-            <a:outerShdw sx="100000" sy="100000" kx="0" ky="0" algn="bl" rotWithShape="0" blurRad="177800" dist="38100" dir="5400000">
+            <a:outerShdw blurRad="177800" dist="38100" dir="5400000" algn="bl" rotWithShape="0">
               <a:srgbClr val="1A1E1B">
                 <a:alpha val="8000"/>
               </a:srgbClr>
             </a:outerShdw>
           </a:effectLst>
         </p:spPr>
+        <p:txBody>
+          <a:bodyPr/>
+          <a:lstStyle/>
+          <a:p>
+            <a:endParaRPr lang="en-US"/>
+          </a:p>
+        </p:txBody>
       </p:sp>
       <p:sp>
         <p:nvSpPr>
@@ -25713,7 +26309,7 @@
           <a:bodyPr wrap="square" lIns="0" tIns="0" rIns="0" bIns="0" rtlCol="0" anchor="ctr"/>
           <a:lstStyle/>
           <a:p>
-            <a:pPr indent="0" marL="0">
+            <a:pPr marL="0" indent="0">
               <a:buNone/>
             </a:pPr>
             <a:r>
@@ -25752,7 +26348,7 @@
           <a:bodyPr wrap="square" lIns="0" tIns="0" rIns="0" bIns="0" rtlCol="0" anchor="ctr"/>
           <a:lstStyle/>
           <a:p>
-            <a:pPr indent="0" marL="0">
+            <a:pPr marL="0" indent="0">
               <a:buNone/>
             </a:pPr>
             <a:r>
@@ -25791,13 +26387,20 @@
           </a:solidFill>
           <a:ln/>
           <a:effectLst>
-            <a:outerShdw sx="100000" sy="100000" kx="0" ky="0" algn="bl" rotWithShape="0" blurRad="177800" dist="38100" dir="5400000">
+            <a:outerShdw blurRad="177800" dist="38100" dir="5400000" algn="bl" rotWithShape="0">
               <a:srgbClr val="1A1E1B">
                 <a:alpha val="8000"/>
               </a:srgbClr>
             </a:outerShdw>
           </a:effectLst>
         </p:spPr>
+        <p:txBody>
+          <a:bodyPr/>
+          <a:lstStyle/>
+          <a:p>
+            <a:endParaRPr lang="en-US"/>
+          </a:p>
+        </p:txBody>
       </p:sp>
       <p:sp>
         <p:nvSpPr>
@@ -25820,7 +26423,7 @@
           <a:bodyPr wrap="square" lIns="0" tIns="0" rIns="0" bIns="0" rtlCol="0" anchor="ctr"/>
           <a:lstStyle/>
           <a:p>
-            <a:pPr indent="0" marL="0">
+            <a:pPr marL="0" indent="0">
               <a:buNone/>
             </a:pPr>
             <a:r>
@@ -25859,7 +26462,7 @@
           <a:bodyPr wrap="square" lIns="0" tIns="0" rIns="0" bIns="0" rtlCol="0" anchor="ctr"/>
           <a:lstStyle/>
           <a:p>
-            <a:pPr indent="0" marL="0">
+            <a:pPr marL="0" indent="0">
               <a:buNone/>
             </a:pPr>
             <a:r>
@@ -25898,13 +26501,20 @@
           </a:solidFill>
           <a:ln/>
           <a:effectLst>
-            <a:outerShdw sx="100000" sy="100000" kx="0" ky="0" algn="bl" rotWithShape="0" blurRad="177800" dist="38100" dir="5400000">
+            <a:outerShdw blurRad="177800" dist="38100" dir="5400000" algn="bl" rotWithShape="0">
               <a:srgbClr val="1A1E1B">
                 <a:alpha val="8000"/>
               </a:srgbClr>
             </a:outerShdw>
           </a:effectLst>
         </p:spPr>
+        <p:txBody>
+          <a:bodyPr/>
+          <a:lstStyle/>
+          <a:p>
+            <a:endParaRPr lang="en-US"/>
+          </a:p>
+        </p:txBody>
       </p:sp>
       <p:sp>
         <p:nvSpPr>
@@ -25927,7 +26537,7 @@
           <a:bodyPr wrap="square" lIns="0" tIns="0" rIns="0" bIns="0" rtlCol="0" anchor="ctr"/>
           <a:lstStyle/>
           <a:p>
-            <a:pPr indent="0" marL="0">
+            <a:pPr marL="0" indent="0">
               <a:buNone/>
             </a:pPr>
             <a:r>
@@ -25966,7 +26576,7 @@
           <a:bodyPr wrap="square" lIns="0" tIns="0" rIns="0" bIns="0" rtlCol="0" anchor="ctr"/>
           <a:lstStyle/>
           <a:p>
-            <a:pPr indent="0" marL="0">
+            <a:pPr marL="0" indent="0">
               <a:buNone/>
             </a:pPr>
             <a:r>
@@ -26005,7 +26615,7 @@
           <a:bodyPr wrap="square" lIns="0" tIns="0" rIns="0" bIns="0" rtlCol="0" anchor="ctr"/>
           <a:lstStyle/>
           <a:p>
-            <a:pPr indent="0" marL="0">
+            <a:pPr marL="0" indent="0">
               <a:buNone/>
             </a:pPr>
             <a:r>
@@ -26043,7 +26653,7 @@
           </a:prstGeom>
           <a:extLst>
             <a:ext uri="{C572A759-6A51-4108-AA02-DFA0A04FC94B}">
-              <ma14:wrappingTextBoxFlag xmlns:ma14="http://schemas.microsoft.com/office/mac/drawingml/2011/main" val="0"/>
+              <ma14:wrappingTextBoxFlag xmlns:ma14="http://schemas.microsoft.com/office/mac/drawingml/2011/main" xmlns="" val="0"/>
             </a:ext>
           </a:extLst>
         </p:spPr>
@@ -26064,7 +26674,7 @@
           <a:p>
             <a:pPr algn="l"/>
             <a:fld id="{F7021451-1387-4CA6-816F-3879F97B5CBC}" type="slidenum">
-              <a:rPr b="0" lang="en-US"/>
+              <a:rPr lang="en-US" b="0"/>
               <a:t>8</a:t>
             </a:fld>
             <a:endParaRPr lang="en-US"/>
@@ -26117,11 +26727,11 @@
           <a:bodyPr wrap="square" lIns="0" tIns="0" rIns="0" bIns="0" rtlCol="0" anchor="ctr"/>
           <a:lstStyle/>
           <a:p>
-            <a:pPr indent="0" marL="0">
-              <a:buNone/>
-            </a:pPr>
-            <a:r>
-              <a:rPr lang="en-US" sz="1200" spc="120" kern="0" dirty="0">
+            <a:pPr marL="0" indent="0">
+              <a:buNone/>
+            </a:pPr>
+            <a:r>
+              <a:rPr lang="en-US" sz="1200" kern="0" spc="120" dirty="0">
                 <a:solidFill>
                   <a:srgbClr val="8A5A10"/>
                 </a:solidFill>
@@ -26138,9 +26748,11 @@
       <p:sp>
         <p:nvSpPr>
           <p:cNvPr id="3" name="Text 0"/>
-          <p:cNvSpPr/>
+          <p:cNvSpPr>
+            <a:spLocks noGrp="1"/>
+          </p:cNvSpPr>
           <p:nvPr>
-            <p:ph idx="100" type="title" hasCustomPrompt="1"/>
+            <p:ph type="title" idx="100" hasCustomPrompt="1"/>
           </p:nvPr>
         </p:nvSpPr>
         <p:spPr>
@@ -26158,7 +26770,7 @@
           <a:bodyPr wrap="square" lIns="0" tIns="0" rIns="0" bIns="0" rtlCol="0" anchor="t"/>
           <a:lstStyle/>
           <a:p>
-            <a:pPr indent="0" marL="0">
+            <a:pPr marL="0" indent="0">
               <a:buNone/>
             </a:pPr>
             <a:r>
@@ -26197,13 +26809,20 @@
           </a:solidFill>
           <a:ln/>
           <a:effectLst>
-            <a:outerShdw sx="100000" sy="100000" kx="0" ky="0" algn="bl" rotWithShape="0" blurRad="177800" dist="38100" dir="5400000">
+            <a:outerShdw blurRad="177800" dist="38100" dir="5400000" algn="bl" rotWithShape="0">
               <a:srgbClr val="1A1E1B">
                 <a:alpha val="8000"/>
               </a:srgbClr>
             </a:outerShdw>
           </a:effectLst>
         </p:spPr>
+        <p:txBody>
+          <a:bodyPr/>
+          <a:lstStyle/>
+          <a:p>
+            <a:endParaRPr lang="en-US"/>
+          </a:p>
+        </p:txBody>
       </p:sp>
       <p:sp>
         <p:nvSpPr>
@@ -26226,7 +26845,7 @@
           <a:bodyPr wrap="square" lIns="0" tIns="0" rIns="0" bIns="0" rtlCol="0" anchor="ctr"/>
           <a:lstStyle/>
           <a:p>
-            <a:pPr indent="0" marL="0">
+            <a:pPr marL="0" indent="0">
               <a:buNone/>
             </a:pPr>
             <a:r>
@@ -26265,7 +26884,7 @@
           <a:bodyPr wrap="square" lIns="0" tIns="0" rIns="0" bIns="0" rtlCol="0" anchor="ctr"/>
           <a:lstStyle/>
           <a:p>
-            <a:pPr indent="0" marL="0">
+            <a:pPr marL="0" indent="0">
               <a:buNone/>
             </a:pPr>
             <a:r>
@@ -26304,13 +26923,20 @@
           </a:solidFill>
           <a:ln/>
           <a:effectLst>
-            <a:outerShdw sx="100000" sy="100000" kx="0" ky="0" algn="bl" rotWithShape="0" blurRad="177800" dist="38100" dir="5400000">
+            <a:outerShdw blurRad="177800" dist="38100" dir="5400000" algn="bl" rotWithShape="0">
               <a:srgbClr val="1A1E1B">
                 <a:alpha val="8000"/>
               </a:srgbClr>
             </a:outerShdw>
           </a:effectLst>
         </p:spPr>
+        <p:txBody>
+          <a:bodyPr/>
+          <a:lstStyle/>
+          <a:p>
+            <a:endParaRPr lang="en-US"/>
+          </a:p>
+        </p:txBody>
       </p:sp>
       <p:sp>
         <p:nvSpPr>
@@ -26333,7 +26959,7 @@
           <a:bodyPr wrap="square" lIns="0" tIns="0" rIns="0" bIns="0" rtlCol="0" anchor="ctr"/>
           <a:lstStyle/>
           <a:p>
-            <a:pPr indent="0" marL="0">
+            <a:pPr marL="0" indent="0">
               <a:buNone/>
             </a:pPr>
             <a:r>
@@ -26372,7 +26998,7 @@
           <a:bodyPr wrap="square" lIns="0" tIns="0" rIns="0" bIns="0" rtlCol="0" anchor="ctr"/>
           <a:lstStyle/>
           <a:p>
-            <a:pPr indent="0" marL="0">
+            <a:pPr marL="0" indent="0">
               <a:buNone/>
             </a:pPr>
             <a:r>
@@ -26411,13 +27037,20 @@
           </a:solidFill>
           <a:ln/>
           <a:effectLst>
-            <a:outerShdw sx="100000" sy="100000" kx="0" ky="0" algn="bl" rotWithShape="0" blurRad="177800" dist="38100" dir="5400000">
+            <a:outerShdw blurRad="177800" dist="38100" dir="5400000" algn="bl" rotWithShape="0">
               <a:srgbClr val="1A1E1B">
                 <a:alpha val="8000"/>
               </a:srgbClr>
             </a:outerShdw>
           </a:effectLst>
         </p:spPr>
+        <p:txBody>
+          <a:bodyPr/>
+          <a:lstStyle/>
+          <a:p>
+            <a:endParaRPr lang="en-US"/>
+          </a:p>
+        </p:txBody>
       </p:sp>
       <p:sp>
         <p:nvSpPr>
@@ -26440,7 +27073,7 @@
           <a:bodyPr wrap="square" lIns="0" tIns="0" rIns="0" bIns="0" rtlCol="0" anchor="ctr"/>
           <a:lstStyle/>
           <a:p>
-            <a:pPr indent="0" marL="0">
+            <a:pPr marL="0" indent="0">
               <a:buNone/>
             </a:pPr>
             <a:r>
@@ -26479,7 +27112,7 @@
           <a:bodyPr wrap="square" lIns="0" tIns="0" rIns="0" bIns="0" rtlCol="0" anchor="ctr"/>
           <a:lstStyle/>
           <a:p>
-            <a:pPr indent="0" marL="0">
+            <a:pPr marL="0" indent="0">
               <a:buNone/>
             </a:pPr>
             <a:r>
@@ -26518,13 +27151,20 @@
           </a:solidFill>
           <a:ln/>
           <a:effectLst>
-            <a:outerShdw sx="100000" sy="100000" kx="0" ky="0" algn="bl" rotWithShape="0" blurRad="177800" dist="38100" dir="5400000">
+            <a:outerShdw blurRad="177800" dist="38100" dir="5400000" algn="bl" rotWithShape="0">
               <a:srgbClr val="1A1E1B">
                 <a:alpha val="8000"/>
               </a:srgbClr>
             </a:outerShdw>
           </a:effectLst>
         </p:spPr>
+        <p:txBody>
+          <a:bodyPr/>
+          <a:lstStyle/>
+          <a:p>
+            <a:endParaRPr lang="en-US"/>
+          </a:p>
+        </p:txBody>
       </p:sp>
       <p:sp>
         <p:nvSpPr>
@@ -26547,7 +27187,7 @@
           <a:bodyPr wrap="square" lIns="0" tIns="0" rIns="0" bIns="0" rtlCol="0" anchor="ctr"/>
           <a:lstStyle/>
           <a:p>
-            <a:pPr indent="0" marL="0">
+            <a:pPr marL="0" indent="0">
               <a:buNone/>
             </a:pPr>
             <a:r>
@@ -26586,7 +27226,7 @@
           <a:bodyPr wrap="square" lIns="0" tIns="0" rIns="0" bIns="0" rtlCol="0" anchor="ctr"/>
           <a:lstStyle/>
           <a:p>
-            <a:pPr indent="0" marL="0">
+            <a:pPr marL="0" indent="0">
               <a:buNone/>
             </a:pPr>
             <a:r>
@@ -26625,7 +27265,7 @@
           <a:bodyPr wrap="square" lIns="0" tIns="0" rIns="0" bIns="0" rtlCol="0" anchor="ctr"/>
           <a:lstStyle/>
           <a:p>
-            <a:pPr indent="0" marL="0">
+            <a:pPr marL="0" indent="0">
               <a:buNone/>
             </a:pPr>
             <a:r>
@@ -26663,7 +27303,7 @@
           </a:prstGeom>
           <a:extLst>
             <a:ext uri="{C572A759-6A51-4108-AA02-DFA0A04FC94B}">
-              <ma14:wrappingTextBoxFlag xmlns:ma14="http://schemas.microsoft.com/office/mac/drawingml/2011/main" val="0"/>
+              <ma14:wrappingTextBoxFlag xmlns:ma14="http://schemas.microsoft.com/office/mac/drawingml/2011/main" xmlns="" val="0"/>
             </a:ext>
           </a:extLst>
         </p:spPr>
@@ -26684,7 +27324,7 @@
           <a:p>
             <a:pPr algn="l"/>
             <a:fld id="{F7021451-1387-4CA6-816F-3879F97B5CBC}" type="slidenum">
-              <a:rPr b="0" lang="en-US"/>
+              <a:rPr lang="en-US" b="0"/>
               <a:t>9</a:t>
             </a:fld>
             <a:endParaRPr lang="en-US"/>
@@ -26992,4 +27632,319 @@
     </a:ext>
   </a:extLst>
 </a:theme>
+</file>
+
+<file path=ppt/theme/theme2.xml><?xml version="1.0" encoding="utf-8"?>
+<a:theme xmlns:a="http://schemas.openxmlformats.org/drawingml/2006/main" name="Office Theme">
+  <a:themeElements>
+    <a:clrScheme name="Office">
+      <a:dk1>
+        <a:sysClr val="windowText" lastClr="000000"/>
+      </a:dk1>
+      <a:lt1>
+        <a:sysClr val="window" lastClr="FFFFFF"/>
+      </a:lt1>
+      <a:dk2>
+        <a:srgbClr val="0E2841"/>
+      </a:dk2>
+      <a:lt2>
+        <a:srgbClr val="E8E8E8"/>
+      </a:lt2>
+      <a:accent1>
+        <a:srgbClr val="156082"/>
+      </a:accent1>
+      <a:accent2>
+        <a:srgbClr val="E97132"/>
+      </a:accent2>
+      <a:accent3>
+        <a:srgbClr val="196B24"/>
+      </a:accent3>
+      <a:accent4>
+        <a:srgbClr val="0F9ED5"/>
+      </a:accent4>
+      <a:accent5>
+        <a:srgbClr val="A02B93"/>
+      </a:accent5>
+      <a:accent6>
+        <a:srgbClr val="4EA72E"/>
+      </a:accent6>
+      <a:hlink>
+        <a:srgbClr val="467886"/>
+      </a:hlink>
+      <a:folHlink>
+        <a:srgbClr val="96607D"/>
+      </a:folHlink>
+    </a:clrScheme>
+    <a:fontScheme name="Office">
+      <a:majorFont>
+        <a:latin typeface="Aptos Display" panose="02110004020202020204"/>
+        <a:ea typeface=""/>
+        <a:cs typeface=""/>
+        <a:font script="Jpan" typeface="游ゴシック Light"/>
+        <a:font script="Hang" typeface="맑은 고딕"/>
+        <a:font script="Hans" typeface="等线 Light"/>
+        <a:font script="Hant" typeface="新細明體"/>
+        <a:font script="Arab" typeface="Times New Roman"/>
+        <a:font script="Hebr" typeface="Times New Roman"/>
+        <a:font script="Thai" typeface="Angsana New"/>
+        <a:font script="Ethi" typeface="Nyala"/>
+        <a:font script="Beng" typeface="Vrinda"/>
+        <a:font script="Gujr" typeface="Shruti"/>
+        <a:font script="Khmr" typeface="MoolBoran"/>
+        <a:font script="Knda" typeface="Tunga"/>
+        <a:font script="Guru" typeface="Raavi"/>
+        <a:font script="Cans" typeface="Euphemia"/>
+        <a:font script="Cher" typeface="Plantagenet Cherokee"/>
+        <a:font script="Yiii" typeface="Microsoft Yi Baiti"/>
+        <a:font script="Tibt" typeface="Microsoft Himalaya"/>
+        <a:font script="Thaa" typeface="MV Boli"/>
+        <a:font script="Deva" typeface="Mangal"/>
+        <a:font script="Telu" typeface="Gautami"/>
+        <a:font script="Taml" typeface="Latha"/>
+        <a:font script="Syrc" typeface="Estrangelo Edessa"/>
+        <a:font script="Orya" typeface="Kalinga"/>
+        <a:font script="Mlym" typeface="Kartika"/>
+        <a:font script="Laoo" typeface="DokChampa"/>
+        <a:font script="Sinh" typeface="Iskoola Pota"/>
+        <a:font script="Mong" typeface="Mongolian Baiti"/>
+        <a:font script="Viet" typeface="Times New Roman"/>
+        <a:font script="Uigh" typeface="Microsoft Uighur"/>
+        <a:font script="Geor" typeface="Sylfaen"/>
+        <a:font script="Armn" typeface="Arial"/>
+        <a:font script="Bugi" typeface="Leelawadee UI"/>
+        <a:font script="Bopo" typeface="Microsoft JhengHei"/>
+        <a:font script="Java" typeface="Javanese Text"/>
+        <a:font script="Lisu" typeface="Segoe UI"/>
+        <a:font script="Mymr" typeface="Myanmar Text"/>
+        <a:font script="Nkoo" typeface="Ebrima"/>
+        <a:font script="Olck" typeface="Nirmala UI"/>
+        <a:font script="Osma" typeface="Ebrima"/>
+        <a:font script="Phag" typeface="Phagspa"/>
+        <a:font script="Syrn" typeface="Estrangelo Edessa"/>
+        <a:font script="Syrj" typeface="Estrangelo Edessa"/>
+        <a:font script="Syre" typeface="Estrangelo Edessa"/>
+        <a:font script="Sora" typeface="Nirmala UI"/>
+        <a:font script="Tale" typeface="Microsoft Tai Le"/>
+        <a:font script="Talu" typeface="Microsoft New Tai Lue"/>
+        <a:font script="Tfng" typeface="Ebrima"/>
+      </a:majorFont>
+      <a:minorFont>
+        <a:latin typeface="Aptos" panose="02110004020202020204"/>
+        <a:ea typeface=""/>
+        <a:cs typeface=""/>
+        <a:font script="Jpan" typeface="游ゴシック"/>
+        <a:font script="Hang" typeface="맑은 고딕"/>
+        <a:font script="Hans" typeface="等线"/>
+        <a:font script="Hant" typeface="新細明體"/>
+        <a:font script="Arab" typeface="Arial"/>
+        <a:font script="Hebr" typeface="Arial"/>
+        <a:font script="Thai" typeface="Cordia New"/>
+        <a:font script="Ethi" typeface="Nyala"/>
+        <a:font script="Beng" typeface="Vrinda"/>
+        <a:font script="Gujr" typeface="Shruti"/>
+        <a:font script="Khmr" typeface="DaunPenh"/>
+        <a:font script="Knda" typeface="Tunga"/>
+        <a:font script="Guru" typeface="Raavi"/>
+        <a:font script="Cans" typeface="Euphemia"/>
+        <a:font script="Cher" typeface="Plantagenet Cherokee"/>
+        <a:font script="Yiii" typeface="Microsoft Yi Baiti"/>
+        <a:font script="Tibt" typeface="Microsoft Himalaya"/>
+        <a:font script="Thaa" typeface="MV Boli"/>
+        <a:font script="Deva" typeface="Mangal"/>
+        <a:font script="Telu" typeface="Gautami"/>
+        <a:font script="Taml" typeface="Latha"/>
+        <a:font script="Syrc" typeface="Estrangelo Edessa"/>
+        <a:font script="Orya" typeface="Kalinga"/>
+        <a:font script="Mlym" typeface="Kartika"/>
+        <a:font script="Laoo" typeface="DokChampa"/>
+        <a:font script="Sinh" typeface="Iskoola Pota"/>
+        <a:font script="Mong" typeface="Mongolian Baiti"/>
+        <a:font script="Viet" typeface="Arial"/>
+        <a:font script="Uigh" typeface="Microsoft Uighur"/>
+        <a:font script="Geor" typeface="Sylfaen"/>
+        <a:font script="Armn" typeface="Arial"/>
+        <a:font script="Bugi" typeface="Leelawadee UI"/>
+        <a:font script="Bopo" typeface="Microsoft JhengHei"/>
+        <a:font script="Java" typeface="Javanese Text"/>
+        <a:font script="Lisu" typeface="Segoe UI"/>
+        <a:font script="Mymr" typeface="Myanmar Text"/>
+        <a:font script="Nkoo" typeface="Ebrima"/>
+        <a:font script="Olck" typeface="Nirmala UI"/>
+        <a:font script="Osma" typeface="Ebrima"/>
+        <a:font script="Phag" typeface="Phagspa"/>
+        <a:font script="Syrn" typeface="Estrangelo Edessa"/>
+        <a:font script="Syrj" typeface="Estrangelo Edessa"/>
+        <a:font script="Syre" typeface="Estrangelo Edessa"/>
+        <a:font script="Sora" typeface="Nirmala UI"/>
+        <a:font script="Tale" typeface="Microsoft Tai Le"/>
+        <a:font script="Talu" typeface="Microsoft New Tai Lue"/>
+        <a:font script="Tfng" typeface="Ebrima"/>
+      </a:minorFont>
+    </a:fontScheme>
+    <a:fmtScheme name="Office">
+      <a:fillStyleLst>
+        <a:solidFill>
+          <a:schemeClr val="phClr"/>
+        </a:solidFill>
+        <a:gradFill rotWithShape="1">
+          <a:gsLst>
+            <a:gs pos="0">
+              <a:schemeClr val="phClr">
+                <a:lumMod val="110000"/>
+                <a:satMod val="105000"/>
+                <a:tint val="67000"/>
+              </a:schemeClr>
+            </a:gs>
+            <a:gs pos="50000">
+              <a:schemeClr val="phClr">
+                <a:lumMod val="105000"/>
+                <a:satMod val="103000"/>
+                <a:tint val="73000"/>
+              </a:schemeClr>
+            </a:gs>
+            <a:gs pos="100000">
+              <a:schemeClr val="phClr">
+                <a:lumMod val="105000"/>
+                <a:satMod val="109000"/>
+                <a:tint val="81000"/>
+              </a:schemeClr>
+            </a:gs>
+          </a:gsLst>
+          <a:lin ang="5400000" scaled="0"/>
+        </a:gradFill>
+        <a:gradFill rotWithShape="1">
+          <a:gsLst>
+            <a:gs pos="0">
+              <a:schemeClr val="phClr">
+                <a:satMod val="103000"/>
+                <a:lumMod val="102000"/>
+                <a:tint val="94000"/>
+              </a:schemeClr>
+            </a:gs>
+            <a:gs pos="50000">
+              <a:schemeClr val="phClr">
+                <a:satMod val="110000"/>
+                <a:lumMod val="100000"/>
+                <a:shade val="100000"/>
+              </a:schemeClr>
+            </a:gs>
+            <a:gs pos="100000">
+              <a:schemeClr val="phClr">
+                <a:lumMod val="99000"/>
+                <a:satMod val="120000"/>
+                <a:shade val="78000"/>
+              </a:schemeClr>
+            </a:gs>
+          </a:gsLst>
+          <a:lin ang="5400000" scaled="0"/>
+        </a:gradFill>
+      </a:fillStyleLst>
+      <a:lnStyleLst>
+        <a:ln w="12700" cap="flat" cmpd="sng" algn="ctr">
+          <a:solidFill>
+            <a:schemeClr val="phClr"/>
+          </a:solidFill>
+          <a:prstDash val="solid"/>
+          <a:miter lim="800000"/>
+        </a:ln>
+        <a:ln w="19050" cap="flat" cmpd="sng" algn="ctr">
+          <a:solidFill>
+            <a:schemeClr val="phClr"/>
+          </a:solidFill>
+          <a:prstDash val="solid"/>
+          <a:miter lim="800000"/>
+        </a:ln>
+        <a:ln w="25400" cap="flat" cmpd="sng" algn="ctr">
+          <a:solidFill>
+            <a:schemeClr val="phClr"/>
+          </a:solidFill>
+          <a:prstDash val="solid"/>
+          <a:miter lim="800000"/>
+        </a:ln>
+      </a:lnStyleLst>
+      <a:effectStyleLst>
+        <a:effectStyle>
+          <a:effectLst/>
+        </a:effectStyle>
+        <a:effectStyle>
+          <a:effectLst/>
+        </a:effectStyle>
+        <a:effectStyle>
+          <a:effectLst>
+            <a:outerShdw blurRad="57150" dist="19050" dir="5400000" algn="ctr" rotWithShape="0">
+              <a:srgbClr val="000000">
+                <a:alpha val="63000"/>
+              </a:srgbClr>
+            </a:outerShdw>
+          </a:effectLst>
+        </a:effectStyle>
+      </a:effectStyleLst>
+      <a:bgFillStyleLst>
+        <a:solidFill>
+          <a:schemeClr val="phClr"/>
+        </a:solidFill>
+        <a:solidFill>
+          <a:schemeClr val="phClr">
+            <a:tint val="95000"/>
+            <a:satMod val="170000"/>
+          </a:schemeClr>
+        </a:solidFill>
+        <a:gradFill rotWithShape="1">
+          <a:gsLst>
+            <a:gs pos="0">
+              <a:schemeClr val="phClr">
+                <a:tint val="93000"/>
+                <a:satMod val="150000"/>
+                <a:shade val="98000"/>
+                <a:lumMod val="102000"/>
+              </a:schemeClr>
+            </a:gs>
+            <a:gs pos="50000">
+              <a:schemeClr val="phClr">
+                <a:tint val="98000"/>
+                <a:satMod val="130000"/>
+                <a:shade val="90000"/>
+                <a:lumMod val="103000"/>
+              </a:schemeClr>
+            </a:gs>
+            <a:gs pos="100000">
+              <a:schemeClr val="phClr">
+                <a:shade val="63000"/>
+                <a:satMod val="120000"/>
+              </a:schemeClr>
+            </a:gs>
+          </a:gsLst>
+          <a:lin ang="5400000" scaled="0"/>
+        </a:gradFill>
+      </a:bgFillStyleLst>
+    </a:fmtScheme>
+  </a:themeElements>
+  <a:objectDefaults>
+    <a:lnDef>
+      <a:spPr/>
+      <a:bodyPr/>
+      <a:lstStyle/>
+      <a:style>
+        <a:lnRef idx="2">
+          <a:schemeClr val="accent1"/>
+        </a:lnRef>
+        <a:fillRef idx="0">
+          <a:schemeClr val="accent1"/>
+        </a:fillRef>
+        <a:effectRef idx="1">
+          <a:schemeClr val="accent1"/>
+        </a:effectRef>
+        <a:fontRef idx="minor">
+          <a:schemeClr val="tx1"/>
+        </a:fontRef>
+      </a:style>
+    </a:lnDef>
+  </a:objectDefaults>
+  <a:extraClrSchemeLst/>
+  <a:extLst>
+    <a:ext uri="{05A4C25C-085E-4340-85A3-A5531E510DB2}">
+      <thm15:themeFamily xmlns:thm15="http://schemas.microsoft.com/office/thememl/2012/main" name="Office Theme" id="{2E142A2C-CD16-42D6-873A-C26D2A0506FA}" vid="{1BDDFF52-6CD6-40A5-AB3C-68EB2F1E4D0A}"/>
+    </a:ext>
+  </a:extLst>
+</a:theme>
 </file>